--- a/S1-CL1-Cloud-Design-Build/delivery/topic_02/Topic_02_Slides.pptx
+++ b/S1-CL1-Cloud-Design-Build/delivery/topic_02/Topic_02_Slides.pptx
@@ -4355,8 +4355,8 @@
         </p:nvSpPr>
         <p:spPr>
           <a:xfrm>
-            <a:off x="640080" y="502920"/>
-            <a:ext cx="10881360" cy="1005840"/>
+            <a:off x="640080" y="457200"/>
+            <a:ext cx="10881360" cy="960120"/>
           </a:xfrm>
           <a:prstGeom prst="rect">
             <a:avLst/>
@@ -4370,7 +4370,7 @@
           <a:lstStyle/>
           <a:p>
             <a:r>
-              <a:rPr sz="3000" b="1" i="0">
+              <a:rPr sz="2800" b="1" i="0">
                 <a:solidFill>
                   <a:srgbClr val="2A2929"/>
                 </a:solidFill>
@@ -4389,7 +4389,7 @@
         </p:nvSpPr>
         <p:spPr>
           <a:xfrm>
-            <a:off x="658368" y="1481328"/>
+            <a:off x="658368" y="1371600"/>
             <a:ext cx="1463040" cy="50800"/>
           </a:xfrm>
           <a:prstGeom prst="rect">
@@ -4433,8 +4433,8 @@
         </p:nvSpPr>
         <p:spPr>
           <a:xfrm>
-            <a:off x="658368" y="1783080"/>
-            <a:ext cx="10881360" cy="4389120"/>
+            <a:off x="658368" y="1691640"/>
+            <a:ext cx="10881360" cy="4480560"/>
           </a:xfrm>
           <a:prstGeom prst="rect">
             <a:avLst/>
@@ -4442,7 +4442,7 @@
           <a:noFill/>
         </p:spPr>
         <p:txBody>
-          <a:bodyPr wrap="square" anchor="t" lIns="0" rIns="0" tIns="0" bIns="0">
+          <a:bodyPr wrap="square" anchor="ctr" lIns="0" rIns="0" tIns="0" bIns="0">
             <a:spAutoFit/>
           </a:bodyPr>
           <a:lstStyle/>
@@ -4459,7 +4459,7 @@
               </a:spcAft>
             </a:pPr>
             <a:r>
-              <a:rPr sz="1800" b="1" i="0">
+              <a:rPr sz="2400" b="1" i="0">
                 <a:solidFill>
                   <a:srgbClr val="EDAB0C"/>
                 </a:solidFill>
@@ -4468,7 +4468,7 @@
               <a:t>■  </a:t>
             </a:r>
             <a:r>
-              <a:rPr sz="1800" b="0" i="0">
+              <a:rPr sz="2400" b="0" i="0">
                 <a:solidFill>
                   <a:srgbClr val="2A2929"/>
                 </a:solidFill>
@@ -4490,7 +4490,7 @@
               </a:spcAft>
             </a:pPr>
             <a:r>
-              <a:rPr sz="1800" b="1" i="0">
+              <a:rPr sz="2400" b="1" i="0">
                 <a:solidFill>
                   <a:srgbClr val="EDAB0C"/>
                 </a:solidFill>
@@ -4499,7 +4499,7 @@
               <a:t>■  </a:t>
             </a:r>
             <a:r>
-              <a:rPr sz="1800" b="0" i="0">
+              <a:rPr sz="2400" b="0" i="0">
                 <a:solidFill>
                   <a:srgbClr val="2A2929"/>
                 </a:solidFill>
@@ -4521,7 +4521,7 @@
               </a:spcAft>
             </a:pPr>
             <a:r>
-              <a:rPr sz="1800" b="1" i="0">
+              <a:rPr sz="2400" b="1" i="0">
                 <a:solidFill>
                   <a:srgbClr val="EDAB0C"/>
                 </a:solidFill>
@@ -4530,7 +4530,7 @@
               <a:t>■  </a:t>
             </a:r>
             <a:r>
-              <a:rPr sz="1800" b="1" i="0">
+              <a:rPr sz="2400" b="1" i="0">
                 <a:solidFill>
                   <a:srgbClr val="D68E10"/>
                 </a:solidFill>
@@ -4697,8 +4697,8 @@
         </p:nvSpPr>
         <p:spPr>
           <a:xfrm>
-            <a:off x="640080" y="502920"/>
-            <a:ext cx="10881360" cy="1005840"/>
+            <a:off x="640080" y="457200"/>
+            <a:ext cx="10881360" cy="960120"/>
           </a:xfrm>
           <a:prstGeom prst="rect">
             <a:avLst/>
@@ -4712,7 +4712,7 @@
           <a:lstStyle/>
           <a:p>
             <a:r>
-              <a:rPr sz="3000" b="1" i="0">
+              <a:rPr sz="2800" b="1" i="0">
                 <a:solidFill>
                   <a:srgbClr val="2A2929"/>
                 </a:solidFill>
@@ -4747,7 +4747,7 @@
         </p:nvSpPr>
         <p:spPr>
           <a:xfrm>
-            <a:off x="658368" y="1481328"/>
+            <a:off x="658368" y="1371600"/>
             <a:ext cx="1463040" cy="50800"/>
           </a:xfrm>
           <a:prstGeom prst="rect">
@@ -4791,8 +4791,8 @@
         </p:nvSpPr>
         <p:spPr>
           <a:xfrm>
-            <a:off x="658368" y="1783080"/>
-            <a:ext cx="10881360" cy="4389120"/>
+            <a:off x="658368" y="1691640"/>
+            <a:ext cx="10881360" cy="4480560"/>
           </a:xfrm>
           <a:prstGeom prst="rect">
             <a:avLst/>
@@ -4800,7 +4800,7 @@
           <a:noFill/>
         </p:spPr>
         <p:txBody>
-          <a:bodyPr wrap="square" anchor="t" lIns="0" rIns="0" tIns="0" bIns="0">
+          <a:bodyPr wrap="square" anchor="ctr" lIns="0" rIns="0" tIns="0" bIns="0">
             <a:spAutoFit/>
           </a:bodyPr>
           <a:lstStyle/>
@@ -4817,7 +4817,7 @@
               </a:spcAft>
             </a:pPr>
             <a:r>
-              <a:rPr sz="1800" b="1" i="0">
+              <a:rPr sz="2400" b="1" i="0">
                 <a:solidFill>
                   <a:srgbClr val="EDAB0C"/>
                 </a:solidFill>
@@ -4826,7 +4826,7 @@
               <a:t>■  </a:t>
             </a:r>
             <a:r>
-              <a:rPr sz="1800" b="1" i="0">
+              <a:rPr sz="2400" b="1" i="0">
                 <a:solidFill>
                   <a:srgbClr val="2A2929"/>
                 </a:solidFill>
@@ -4848,7 +4848,7 @@
               </a:spcAft>
             </a:pPr>
             <a:r>
-              <a:rPr sz="1500" b="0" i="0">
+              <a:rPr sz="2100" b="0" i="0">
                 <a:solidFill>
                   <a:srgbClr val="7A7A7A"/>
                 </a:solidFill>
@@ -4857,7 +4857,7 @@
               <a:t>–  </a:t>
             </a:r>
             <a:r>
-              <a:rPr sz="1500" b="0" i="0">
+              <a:rPr sz="2100" b="0" i="0">
                 <a:solidFill>
                   <a:srgbClr val="2A2929"/>
                 </a:solidFill>
@@ -4879,7 +4879,7 @@
               </a:spcAft>
             </a:pPr>
             <a:r>
-              <a:rPr sz="1800" b="1" i="0">
+              <a:rPr sz="2400" b="1" i="0">
                 <a:solidFill>
                   <a:srgbClr val="EDAB0C"/>
                 </a:solidFill>
@@ -4888,7 +4888,7 @@
               <a:t>■  </a:t>
             </a:r>
             <a:r>
-              <a:rPr sz="1800" b="1" i="0">
+              <a:rPr sz="2400" b="1" i="0">
                 <a:solidFill>
                   <a:srgbClr val="2A2929"/>
                 </a:solidFill>
@@ -4910,7 +4910,7 @@
               </a:spcAft>
             </a:pPr>
             <a:r>
-              <a:rPr sz="1500" b="0" i="0">
+              <a:rPr sz="2100" b="0" i="0">
                 <a:solidFill>
                   <a:srgbClr val="7A7A7A"/>
                 </a:solidFill>
@@ -4919,7 +4919,7 @@
               <a:t>–  </a:t>
             </a:r>
             <a:r>
-              <a:rPr sz="1500" b="0" i="0">
+              <a:rPr sz="2100" b="0" i="0">
                 <a:solidFill>
                   <a:srgbClr val="2A2929"/>
                 </a:solidFill>
@@ -4941,7 +4941,7 @@
               </a:spcAft>
             </a:pPr>
             <a:r>
-              <a:rPr sz="1800" b="1" i="0">
+              <a:rPr sz="2400" b="1" i="0">
                 <a:solidFill>
                   <a:srgbClr val="27B5CE"/>
                 </a:solidFill>
@@ -4950,7 +4950,7 @@
               <a:t>■  </a:t>
             </a:r>
             <a:r>
-              <a:rPr sz="1800" b="1" i="0">
+              <a:rPr sz="2400" b="1" i="0">
                 <a:solidFill>
                   <a:srgbClr val="27B5CE"/>
                 </a:solidFill>
@@ -5117,8 +5117,8 @@
         </p:nvSpPr>
         <p:spPr>
           <a:xfrm>
-            <a:off x="640080" y="502920"/>
-            <a:ext cx="10881360" cy="1005840"/>
+            <a:off x="640080" y="457200"/>
+            <a:ext cx="10881360" cy="960120"/>
           </a:xfrm>
           <a:prstGeom prst="rect">
             <a:avLst/>
@@ -5132,7 +5132,7 @@
           <a:lstStyle/>
           <a:p>
             <a:r>
-              <a:rPr sz="3000" b="1" i="0">
+              <a:rPr sz="2800" b="1" i="0">
                 <a:solidFill>
                   <a:srgbClr val="2A2929"/>
                 </a:solidFill>
@@ -5151,7 +5151,7 @@
         </p:nvSpPr>
         <p:spPr>
           <a:xfrm>
-            <a:off x="658368" y="1481328"/>
+            <a:off x="658368" y="1371600"/>
             <a:ext cx="1463040" cy="50800"/>
           </a:xfrm>
           <a:prstGeom prst="rect">
@@ -5195,8 +5195,8 @@
         </p:nvSpPr>
         <p:spPr>
           <a:xfrm>
-            <a:off x="658368" y="1783080"/>
-            <a:ext cx="10881360" cy="4389120"/>
+            <a:off x="658368" y="1691640"/>
+            <a:ext cx="10881360" cy="4480560"/>
           </a:xfrm>
           <a:prstGeom prst="rect">
             <a:avLst/>
@@ -5204,7 +5204,7 @@
           <a:noFill/>
         </p:spPr>
         <p:txBody>
-          <a:bodyPr wrap="square" anchor="t" lIns="0" rIns="0" tIns="0" bIns="0">
+          <a:bodyPr wrap="square" anchor="ctr" lIns="0" rIns="0" tIns="0" bIns="0">
             <a:spAutoFit/>
           </a:bodyPr>
           <a:lstStyle/>
@@ -5221,7 +5221,7 @@
               </a:spcAft>
             </a:pPr>
             <a:r>
-              <a:rPr sz="1800" b="1" i="0">
+              <a:rPr sz="2400" b="1" i="0">
                 <a:solidFill>
                   <a:srgbClr val="EDAB0C"/>
                 </a:solidFill>
@@ -5230,7 +5230,7 @@
               <a:t>■  </a:t>
             </a:r>
             <a:r>
-              <a:rPr sz="1800" b="0" i="0">
+              <a:rPr sz="2400" b="0" i="0">
                 <a:solidFill>
                   <a:srgbClr val="2A2929"/>
                 </a:solidFill>
@@ -5252,7 +5252,7 @@
               </a:spcAft>
             </a:pPr>
             <a:r>
-              <a:rPr sz="1800" b="1" i="0">
+              <a:rPr sz="2400" b="1" i="0">
                 <a:solidFill>
                   <a:srgbClr val="EDAB0C"/>
                 </a:solidFill>
@@ -5261,7 +5261,7 @@
               <a:t>■  </a:t>
             </a:r>
             <a:r>
-              <a:rPr sz="1800" b="0" i="0">
+              <a:rPr sz="2400" b="0" i="0">
                 <a:solidFill>
                   <a:srgbClr val="2A2929"/>
                 </a:solidFill>
@@ -5283,7 +5283,7 @@
               </a:spcAft>
             </a:pPr>
             <a:r>
-              <a:rPr sz="1800" b="1" i="0">
+              <a:rPr sz="2400" b="1" i="0">
                 <a:solidFill>
                   <a:srgbClr val="EDAB0C"/>
                 </a:solidFill>
@@ -5292,7 +5292,7 @@
               <a:t>■  </a:t>
             </a:r>
             <a:r>
-              <a:rPr sz="1800" b="0" i="0">
+              <a:rPr sz="2400" b="0" i="0">
                 <a:solidFill>
                   <a:srgbClr val="2A2929"/>
                 </a:solidFill>
@@ -5314,7 +5314,7 @@
               </a:spcAft>
             </a:pPr>
             <a:r>
-              <a:rPr sz="1800" b="1" i="0">
+              <a:rPr sz="2400" b="1" i="0">
                 <a:solidFill>
                   <a:srgbClr val="EDAB0C"/>
                 </a:solidFill>
@@ -5323,7 +5323,7 @@
               <a:t>■  </a:t>
             </a:r>
             <a:r>
-              <a:rPr sz="1800" b="1" i="0">
+              <a:rPr sz="2400" b="1" i="0">
                 <a:solidFill>
                   <a:srgbClr val="D68E10"/>
                 </a:solidFill>
@@ -5563,7 +5563,7 @@
           </a:fontRef>
         </p:style>
         <p:txBody>
-          <a:bodyPr rtlCol="0" anchor="ctr" wrap="none"/>
+          <a:bodyPr rtlCol="0" anchor="ctr"/>
           <a:lstStyle/>
           <a:p>
             <a:pPr algn="ctr"/>
@@ -6979,8 +6979,8 @@
         </p:nvSpPr>
         <p:spPr>
           <a:xfrm>
-            <a:off x="640080" y="502920"/>
-            <a:ext cx="10881360" cy="1005840"/>
+            <a:off x="640080" y="457200"/>
+            <a:ext cx="10881360" cy="960120"/>
           </a:xfrm>
           <a:prstGeom prst="rect">
             <a:avLst/>
@@ -6994,7 +6994,7 @@
           <a:lstStyle/>
           <a:p>
             <a:r>
-              <a:rPr sz="3000" b="1" i="0">
+              <a:rPr sz="2800" b="1" i="0">
                 <a:solidFill>
                   <a:srgbClr val="2A2929"/>
                 </a:solidFill>
@@ -7013,7 +7013,7 @@
         </p:nvSpPr>
         <p:spPr>
           <a:xfrm>
-            <a:off x="658368" y="1481328"/>
+            <a:off x="658368" y="1371600"/>
             <a:ext cx="1463040" cy="50800"/>
           </a:xfrm>
           <a:prstGeom prst="rect">
@@ -7057,8 +7057,8 @@
         </p:nvSpPr>
         <p:spPr>
           <a:xfrm>
-            <a:off x="658368" y="1783080"/>
-            <a:ext cx="10881360" cy="4389120"/>
+            <a:off x="658368" y="1691640"/>
+            <a:ext cx="10881360" cy="4480560"/>
           </a:xfrm>
           <a:prstGeom prst="rect">
             <a:avLst/>
@@ -7066,7 +7066,7 @@
           <a:noFill/>
         </p:spPr>
         <p:txBody>
-          <a:bodyPr wrap="square" anchor="t" lIns="0" rIns="0" tIns="0" bIns="0">
+          <a:bodyPr wrap="square" anchor="ctr" lIns="0" rIns="0" tIns="0" bIns="0">
             <a:spAutoFit/>
           </a:bodyPr>
           <a:lstStyle/>
@@ -7083,7 +7083,7 @@
               </a:spcAft>
             </a:pPr>
             <a:r>
-              <a:rPr sz="1800" b="1" i="0">
+              <a:rPr sz="2400" b="1" i="0">
                 <a:solidFill>
                   <a:srgbClr val="EDAB0C"/>
                 </a:solidFill>
@@ -7092,7 +7092,7 @@
               <a:t>■  </a:t>
             </a:r>
             <a:r>
-              <a:rPr sz="1800" b="0" i="0">
+              <a:rPr sz="2400" b="0" i="0">
                 <a:solidFill>
                   <a:srgbClr val="2A2929"/>
                 </a:solidFill>
@@ -7114,7 +7114,7 @@
               </a:spcAft>
             </a:pPr>
             <a:r>
-              <a:rPr sz="1800" b="1" i="0">
+              <a:rPr sz="2400" b="1" i="0">
                 <a:solidFill>
                   <a:srgbClr val="EDAB0C"/>
                 </a:solidFill>
@@ -7123,7 +7123,7 @@
               <a:t>■  </a:t>
             </a:r>
             <a:r>
-              <a:rPr sz="1800" b="0" i="0">
+              <a:rPr sz="2400" b="0" i="0">
                 <a:solidFill>
                   <a:srgbClr val="2A2929"/>
                 </a:solidFill>
@@ -7145,7 +7145,7 @@
               </a:spcAft>
             </a:pPr>
             <a:r>
-              <a:rPr sz="1800" b="1" i="0">
+              <a:rPr sz="2400" b="1" i="0">
                 <a:solidFill>
                   <a:srgbClr val="EDAB0C"/>
                 </a:solidFill>
@@ -7154,7 +7154,7 @@
               <a:t>■  </a:t>
             </a:r>
             <a:r>
-              <a:rPr sz="1800" b="0" i="0">
+              <a:rPr sz="2400" b="0" i="0">
                 <a:solidFill>
                   <a:srgbClr val="2A2929"/>
                 </a:solidFill>
@@ -7176,7 +7176,7 @@
               </a:spcAft>
             </a:pPr>
             <a:r>
-              <a:rPr sz="1800" b="1" i="0">
+              <a:rPr sz="2400" b="1" i="0">
                 <a:solidFill>
                   <a:srgbClr val="205F61"/>
                 </a:solidFill>
@@ -7185,7 +7185,7 @@
               <a:t>■  </a:t>
             </a:r>
             <a:r>
-              <a:rPr sz="1800" b="1" i="0">
+              <a:rPr sz="2400" b="1" i="0">
                 <a:solidFill>
                   <a:srgbClr val="205F61"/>
                 </a:solidFill>
@@ -7352,8 +7352,8 @@
         </p:nvSpPr>
         <p:spPr>
           <a:xfrm>
-            <a:off x="640080" y="502920"/>
-            <a:ext cx="10881360" cy="1005840"/>
+            <a:off x="640080" y="457200"/>
+            <a:ext cx="10881360" cy="960120"/>
           </a:xfrm>
           <a:prstGeom prst="rect">
             <a:avLst/>
@@ -7367,7 +7367,7 @@
           <a:lstStyle/>
           <a:p>
             <a:r>
-              <a:rPr sz="3000" b="1" i="0">
+              <a:rPr sz="2800" b="1" i="0">
                 <a:solidFill>
                   <a:srgbClr val="2A2929"/>
                 </a:solidFill>
@@ -7402,7 +7402,7 @@
         </p:nvSpPr>
         <p:spPr>
           <a:xfrm>
-            <a:off x="658368" y="1481328"/>
+            <a:off x="658368" y="1371600"/>
             <a:ext cx="1463040" cy="50800"/>
           </a:xfrm>
           <a:prstGeom prst="rect">
@@ -7926,8 +7926,8 @@
         </p:nvSpPr>
         <p:spPr>
           <a:xfrm>
-            <a:off x="640080" y="502920"/>
-            <a:ext cx="10881360" cy="1005840"/>
+            <a:off x="640080" y="457200"/>
+            <a:ext cx="10881360" cy="960120"/>
           </a:xfrm>
           <a:prstGeom prst="rect">
             <a:avLst/>
@@ -7941,7 +7941,7 @@
           <a:lstStyle/>
           <a:p>
             <a:r>
-              <a:rPr sz="3000" b="1" i="0">
+              <a:rPr sz="2800" b="1" i="0">
                 <a:solidFill>
                   <a:srgbClr val="2A2929"/>
                 </a:solidFill>
@@ -7976,7 +7976,7 @@
         </p:nvSpPr>
         <p:spPr>
           <a:xfrm>
-            <a:off x="658368" y="1481328"/>
+            <a:off x="658368" y="1371600"/>
             <a:ext cx="1463040" cy="50800"/>
           </a:xfrm>
           <a:prstGeom prst="rect">
@@ -8020,8 +8020,8 @@
         </p:nvSpPr>
         <p:spPr>
           <a:xfrm>
-            <a:off x="658368" y="1783080"/>
-            <a:ext cx="10881360" cy="4389120"/>
+            <a:off x="658368" y="1691640"/>
+            <a:ext cx="10881360" cy="4480560"/>
           </a:xfrm>
           <a:prstGeom prst="rect">
             <a:avLst/>
@@ -8029,7 +8029,7 @@
           <a:noFill/>
         </p:spPr>
         <p:txBody>
-          <a:bodyPr wrap="square" anchor="t" lIns="0" rIns="0" tIns="0" bIns="0">
+          <a:bodyPr wrap="square" anchor="ctr" lIns="0" rIns="0" tIns="0" bIns="0">
             <a:spAutoFit/>
           </a:bodyPr>
           <a:lstStyle/>
@@ -8046,7 +8046,7 @@
               </a:spcAft>
             </a:pPr>
             <a:r>
-              <a:rPr sz="1800" b="1" i="0">
+              <a:rPr sz="2400" b="1" i="0">
                 <a:solidFill>
                   <a:srgbClr val="EDAB0C"/>
                 </a:solidFill>
@@ -8055,7 +8055,7 @@
               <a:t>■  </a:t>
             </a:r>
             <a:r>
-              <a:rPr sz="1800" b="0" i="0">
+              <a:rPr sz="2400" b="0" i="0">
                 <a:solidFill>
                   <a:srgbClr val="2A2929"/>
                 </a:solidFill>
@@ -8077,7 +8077,7 @@
               </a:spcAft>
             </a:pPr>
             <a:r>
-              <a:rPr sz="1800" b="1" i="0">
+              <a:rPr sz="2400" b="1" i="0">
                 <a:solidFill>
                   <a:srgbClr val="EDAB0C"/>
                 </a:solidFill>
@@ -8086,7 +8086,7 @@
               <a:t>■  </a:t>
             </a:r>
             <a:r>
-              <a:rPr sz="1800" b="0" i="0">
+              <a:rPr sz="2400" b="0" i="0">
                 <a:solidFill>
                   <a:srgbClr val="2A2929"/>
                 </a:solidFill>
@@ -8108,7 +8108,7 @@
               </a:spcAft>
             </a:pPr>
             <a:r>
-              <a:rPr sz="1800" b="1" i="0">
+              <a:rPr sz="2400" b="1" i="0">
                 <a:solidFill>
                   <a:srgbClr val="EDAB0C"/>
                 </a:solidFill>
@@ -8117,7 +8117,7 @@
               <a:t>■  </a:t>
             </a:r>
             <a:r>
-              <a:rPr sz="1800" b="1" i="0">
+              <a:rPr sz="2400" b="1" i="0">
                 <a:solidFill>
                   <a:srgbClr val="D68E10"/>
                 </a:solidFill>
@@ -8139,7 +8139,7 @@
               </a:spcAft>
             </a:pPr>
             <a:r>
-              <a:rPr sz="1800" b="1" i="0">
+              <a:rPr sz="2400" b="1" i="0">
                 <a:solidFill>
                   <a:srgbClr val="EDAB0C"/>
                 </a:solidFill>
@@ -8148,7 +8148,7 @@
               <a:t>■  </a:t>
             </a:r>
             <a:r>
-              <a:rPr sz="1800" b="0" i="0">
+              <a:rPr sz="2400" b="0" i="0">
                 <a:solidFill>
                   <a:srgbClr val="2A2929"/>
                 </a:solidFill>
@@ -8315,8 +8315,8 @@
         </p:nvSpPr>
         <p:spPr>
           <a:xfrm>
-            <a:off x="640080" y="502920"/>
-            <a:ext cx="10881360" cy="1005840"/>
+            <a:off x="640080" y="457200"/>
+            <a:ext cx="10881360" cy="960120"/>
           </a:xfrm>
           <a:prstGeom prst="rect">
             <a:avLst/>
@@ -8330,7 +8330,7 @@
           <a:lstStyle/>
           <a:p>
             <a:r>
-              <a:rPr sz="3000" b="1" i="0">
+              <a:rPr sz="2800" b="1" i="0">
                 <a:solidFill>
                   <a:srgbClr val="2A2929"/>
                 </a:solidFill>
@@ -8365,7 +8365,7 @@
         </p:nvSpPr>
         <p:spPr>
           <a:xfrm>
-            <a:off x="658368" y="1481328"/>
+            <a:off x="658368" y="1371600"/>
             <a:ext cx="1463040" cy="50800"/>
           </a:xfrm>
           <a:prstGeom prst="rect">
@@ -9012,7 +9012,7 @@
           </a:fontRef>
         </p:style>
         <p:txBody>
-          <a:bodyPr rtlCol="0" anchor="ctr" wrap="none"/>
+          <a:bodyPr rtlCol="0" anchor="ctr"/>
           <a:lstStyle/>
           <a:p>
             <a:pPr algn="ctr"/>
@@ -10242,8 +10242,8 @@
         </p:nvSpPr>
         <p:spPr>
           <a:xfrm>
-            <a:off x="914400" y="1371600"/>
-            <a:ext cx="10515600" cy="4114800"/>
+            <a:off x="914400" y="1463040"/>
+            <a:ext cx="10515600" cy="4023360"/>
           </a:xfrm>
           <a:prstGeom prst="rect">
             <a:avLst/>
@@ -10397,8 +10397,8 @@
         </p:nvSpPr>
         <p:spPr>
           <a:xfrm>
-            <a:off x="640080" y="502920"/>
-            <a:ext cx="10881360" cy="1005840"/>
+            <a:off x="640080" y="457200"/>
+            <a:ext cx="10881360" cy="960120"/>
           </a:xfrm>
           <a:prstGeom prst="rect">
             <a:avLst/>
@@ -10412,7 +10412,7 @@
           <a:lstStyle/>
           <a:p>
             <a:r>
-              <a:rPr sz="3000" b="1" i="0">
+              <a:rPr sz="2800" b="1" i="0">
                 <a:solidFill>
                   <a:srgbClr val="2A2929"/>
                 </a:solidFill>
@@ -10431,7 +10431,7 @@
         </p:nvSpPr>
         <p:spPr>
           <a:xfrm>
-            <a:off x="658368" y="1481328"/>
+            <a:off x="658368" y="1371600"/>
             <a:ext cx="1463040" cy="50800"/>
           </a:xfrm>
           <a:prstGeom prst="rect">
@@ -10475,8 +10475,8 @@
         </p:nvSpPr>
         <p:spPr>
           <a:xfrm>
-            <a:off x="658368" y="1783080"/>
-            <a:ext cx="10881360" cy="4389120"/>
+            <a:off x="658368" y="1691640"/>
+            <a:ext cx="10881360" cy="4480560"/>
           </a:xfrm>
           <a:prstGeom prst="rect">
             <a:avLst/>
@@ -10484,7 +10484,7 @@
           <a:noFill/>
         </p:spPr>
         <p:txBody>
-          <a:bodyPr wrap="square" anchor="t" lIns="0" rIns="0" tIns="0" bIns="0">
+          <a:bodyPr wrap="square" anchor="ctr" lIns="0" rIns="0" tIns="0" bIns="0">
             <a:spAutoFit/>
           </a:bodyPr>
           <a:lstStyle/>
@@ -10501,7 +10501,7 @@
               </a:spcAft>
             </a:pPr>
             <a:r>
-              <a:rPr sz="1800" b="1" i="0">
+              <a:rPr sz="2400" b="1" i="0">
                 <a:solidFill>
                   <a:srgbClr val="EDAB0C"/>
                 </a:solidFill>
@@ -10510,7 +10510,7 @@
               <a:t>■  </a:t>
             </a:r>
             <a:r>
-              <a:rPr sz="1800" b="0" i="0">
+              <a:rPr sz="2400" b="0" i="0">
                 <a:solidFill>
                   <a:srgbClr val="2A2929"/>
                 </a:solidFill>
@@ -10532,7 +10532,7 @@
               </a:spcAft>
             </a:pPr>
             <a:r>
-              <a:rPr sz="1500" b="0" i="0">
+              <a:rPr sz="2100" b="0" i="0">
                 <a:solidFill>
                   <a:srgbClr val="7A7A7A"/>
                 </a:solidFill>
@@ -10541,7 +10541,7 @@
               <a:t>–  </a:t>
             </a:r>
             <a:r>
-              <a:rPr sz="1500" b="0" i="0">
+              <a:rPr sz="2100" b="0" i="0">
                 <a:solidFill>
                   <a:srgbClr val="2A2929"/>
                 </a:solidFill>
@@ -10563,7 +10563,7 @@
               </a:spcAft>
             </a:pPr>
             <a:r>
-              <a:rPr sz="1500" b="0" i="0">
+              <a:rPr sz="2100" b="0" i="0">
                 <a:solidFill>
                   <a:srgbClr val="7A7A7A"/>
                 </a:solidFill>
@@ -10572,7 +10572,7 @@
               <a:t>–  </a:t>
             </a:r>
             <a:r>
-              <a:rPr sz="1500" b="0" i="0">
+              <a:rPr sz="2100" b="0" i="0">
                 <a:solidFill>
                   <a:srgbClr val="2A2929"/>
                 </a:solidFill>
@@ -10594,7 +10594,7 @@
               </a:spcAft>
             </a:pPr>
             <a:r>
-              <a:rPr sz="1500" b="0" i="0">
+              <a:rPr sz="2100" b="0" i="0">
                 <a:solidFill>
                   <a:srgbClr val="7A7A7A"/>
                 </a:solidFill>
@@ -10603,7 +10603,7 @@
               <a:t>–  </a:t>
             </a:r>
             <a:r>
-              <a:rPr sz="1500" b="0" i="0">
+              <a:rPr sz="2100" b="0" i="0">
                 <a:solidFill>
                   <a:srgbClr val="2A2929"/>
                 </a:solidFill>
@@ -10625,7 +10625,7 @@
               </a:spcAft>
             </a:pPr>
             <a:r>
-              <a:rPr sz="1800" b="1" i="0">
+              <a:rPr sz="2400" b="1" i="0">
                 <a:solidFill>
                   <a:srgbClr val="EDAB0C"/>
                 </a:solidFill>
@@ -10634,7 +10634,7 @@
               <a:t>■  </a:t>
             </a:r>
             <a:r>
-              <a:rPr sz="1800" b="0" i="0">
+              <a:rPr sz="2400" b="0" i="0">
                 <a:solidFill>
                   <a:srgbClr val="2A2929"/>
                 </a:solidFill>
@@ -10656,7 +10656,7 @@
               </a:spcAft>
             </a:pPr>
             <a:r>
-              <a:rPr sz="1800" b="1" i="0">
+              <a:rPr sz="2400" b="1" i="0">
                 <a:solidFill>
                   <a:srgbClr val="92268F"/>
                 </a:solidFill>
@@ -10665,7 +10665,7 @@
               <a:t>■  </a:t>
             </a:r>
             <a:r>
-              <a:rPr sz="1800" b="1" i="0">
+              <a:rPr sz="2400" b="1" i="0">
                 <a:solidFill>
                   <a:srgbClr val="92268F"/>
                 </a:solidFill>
@@ -11124,8 +11124,8 @@
         </p:nvSpPr>
         <p:spPr>
           <a:xfrm>
-            <a:off x="640080" y="502920"/>
-            <a:ext cx="10881360" cy="1005840"/>
+            <a:off x="640080" y="457200"/>
+            <a:ext cx="10881360" cy="960120"/>
           </a:xfrm>
           <a:prstGeom prst="rect">
             <a:avLst/>
@@ -11139,7 +11139,7 @@
           <a:lstStyle/>
           <a:p>
             <a:r>
-              <a:rPr sz="3000" b="1" i="0">
+              <a:rPr sz="2800" b="1" i="0">
                 <a:solidFill>
                   <a:srgbClr val="2A2929"/>
                 </a:solidFill>
@@ -11174,7 +11174,7 @@
         </p:nvSpPr>
         <p:spPr>
           <a:xfrm>
-            <a:off x="658368" y="1481328"/>
+            <a:off x="658368" y="1371600"/>
             <a:ext cx="1463040" cy="50800"/>
           </a:xfrm>
           <a:prstGeom prst="rect">
@@ -11218,8 +11218,8 @@
         </p:nvSpPr>
         <p:spPr>
           <a:xfrm>
-            <a:off x="658368" y="1783080"/>
-            <a:ext cx="10881360" cy="4389120"/>
+            <a:off x="658368" y="1691640"/>
+            <a:ext cx="10881360" cy="4480560"/>
           </a:xfrm>
           <a:prstGeom prst="rect">
             <a:avLst/>
@@ -11227,7 +11227,7 @@
           <a:noFill/>
         </p:spPr>
         <p:txBody>
-          <a:bodyPr wrap="square" anchor="t" lIns="0" rIns="0" tIns="0" bIns="0">
+          <a:bodyPr wrap="square" anchor="ctr" lIns="0" rIns="0" tIns="0" bIns="0">
             <a:spAutoFit/>
           </a:bodyPr>
           <a:lstStyle/>
@@ -11244,7 +11244,7 @@
               </a:spcAft>
             </a:pPr>
             <a:r>
-              <a:rPr sz="1800" b="1" i="0">
+              <a:rPr sz="2400" b="1" i="0">
                 <a:solidFill>
                   <a:srgbClr val="EDAB0C"/>
                 </a:solidFill>
@@ -11253,7 +11253,7 @@
               <a:t>■  </a:t>
             </a:r>
             <a:r>
-              <a:rPr sz="1800" b="0" i="0">
+              <a:rPr sz="2400" b="0" i="0">
                 <a:solidFill>
                   <a:srgbClr val="2A2929"/>
                 </a:solidFill>
@@ -11275,7 +11275,7 @@
               </a:spcAft>
             </a:pPr>
             <a:r>
-              <a:rPr sz="1800" b="1" i="0">
+              <a:rPr sz="2400" b="1" i="0">
                 <a:solidFill>
                   <a:srgbClr val="EDAB0C"/>
                 </a:solidFill>
@@ -11284,7 +11284,7 @@
               <a:t>■  </a:t>
             </a:r>
             <a:r>
-              <a:rPr sz="1800" b="0" i="0">
+              <a:rPr sz="2400" b="0" i="0">
                 <a:solidFill>
                   <a:srgbClr val="2A2929"/>
                 </a:solidFill>
@@ -11306,7 +11306,7 @@
               </a:spcAft>
             </a:pPr>
             <a:r>
-              <a:rPr sz="1800" b="1" i="0">
+              <a:rPr sz="2400" b="1" i="0">
                 <a:solidFill>
                   <a:srgbClr val="EDAB0C"/>
                 </a:solidFill>
@@ -11315,7 +11315,7 @@
               <a:t>■  </a:t>
             </a:r>
             <a:r>
-              <a:rPr sz="1800" b="0" i="0">
+              <a:rPr sz="2400" b="0" i="0">
                 <a:solidFill>
                   <a:srgbClr val="2A2929"/>
                 </a:solidFill>
@@ -11337,7 +11337,7 @@
               </a:spcAft>
             </a:pPr>
             <a:r>
-              <a:rPr sz="1800" b="1" i="0">
+              <a:rPr sz="2400" b="1" i="0">
                 <a:solidFill>
                   <a:srgbClr val="EDAB0C"/>
                 </a:solidFill>
@@ -11346,7 +11346,7 @@
               <a:t>■  </a:t>
             </a:r>
             <a:r>
-              <a:rPr sz="1800" b="1" i="0">
+              <a:rPr sz="2400" b="1" i="0">
                 <a:solidFill>
                   <a:srgbClr val="D68E10"/>
                 </a:solidFill>
@@ -11513,8 +11513,8 @@
         </p:nvSpPr>
         <p:spPr>
           <a:xfrm>
-            <a:off x="640080" y="502920"/>
-            <a:ext cx="10881360" cy="1005840"/>
+            <a:off x="640080" y="457200"/>
+            <a:ext cx="10881360" cy="960120"/>
           </a:xfrm>
           <a:prstGeom prst="rect">
             <a:avLst/>
@@ -11528,7 +11528,7 @@
           <a:lstStyle/>
           <a:p>
             <a:r>
-              <a:rPr sz="3000" b="1" i="0">
+              <a:rPr sz="2800" b="1" i="0">
                 <a:solidFill>
                   <a:srgbClr val="2A2929"/>
                 </a:solidFill>
@@ -11547,7 +11547,7 @@
         </p:nvSpPr>
         <p:spPr>
           <a:xfrm>
-            <a:off x="658368" y="1481328"/>
+            <a:off x="658368" y="1371600"/>
             <a:ext cx="1463040" cy="50800"/>
           </a:xfrm>
           <a:prstGeom prst="rect">
@@ -11591,8 +11591,8 @@
         </p:nvSpPr>
         <p:spPr>
           <a:xfrm>
-            <a:off x="658368" y="1783080"/>
-            <a:ext cx="10881360" cy="4389120"/>
+            <a:off x="658368" y="1691640"/>
+            <a:ext cx="10881360" cy="4480560"/>
           </a:xfrm>
           <a:prstGeom prst="rect">
             <a:avLst/>
@@ -11600,7 +11600,7 @@
           <a:noFill/>
         </p:spPr>
         <p:txBody>
-          <a:bodyPr wrap="square" anchor="t" lIns="0" rIns="0" tIns="0" bIns="0">
+          <a:bodyPr wrap="square" anchor="ctr" lIns="0" rIns="0" tIns="0" bIns="0">
             <a:spAutoFit/>
           </a:bodyPr>
           <a:lstStyle/>
@@ -11617,7 +11617,7 @@
               </a:spcAft>
             </a:pPr>
             <a:r>
-              <a:rPr sz="1800" b="1" i="0">
+              <a:rPr sz="2400" b="1" i="0">
                 <a:solidFill>
                   <a:srgbClr val="EDAB0C"/>
                 </a:solidFill>
@@ -11626,7 +11626,7 @@
               <a:t>■  </a:t>
             </a:r>
             <a:r>
-              <a:rPr sz="1800" b="1" i="0">
+              <a:rPr sz="2400" b="1" i="0">
                 <a:solidFill>
                   <a:srgbClr val="2A2929"/>
                 </a:solidFill>
@@ -11648,7 +11648,7 @@
               </a:spcAft>
             </a:pPr>
             <a:r>
-              <a:rPr sz="1500" b="0" i="0">
+              <a:rPr sz="2100" b="0" i="0">
                 <a:solidFill>
                   <a:srgbClr val="7A7A7A"/>
                 </a:solidFill>
@@ -11657,7 +11657,7 @@
               <a:t>–  </a:t>
             </a:r>
             <a:r>
-              <a:rPr sz="1500" b="0" i="0">
+              <a:rPr sz="2100" b="0" i="0">
                 <a:solidFill>
                   <a:srgbClr val="2A2929"/>
                 </a:solidFill>
@@ -11679,7 +11679,7 @@
               </a:spcAft>
             </a:pPr>
             <a:r>
-              <a:rPr sz="1800" b="1" i="0">
+              <a:rPr sz="2400" b="1" i="0">
                 <a:solidFill>
                   <a:srgbClr val="EDAB0C"/>
                 </a:solidFill>
@@ -11688,7 +11688,7 @@
               <a:t>■  </a:t>
             </a:r>
             <a:r>
-              <a:rPr sz="1800" b="1" i="0">
+              <a:rPr sz="2400" b="1" i="0">
                 <a:solidFill>
                   <a:srgbClr val="2A2929"/>
                 </a:solidFill>
@@ -11710,7 +11710,7 @@
               </a:spcAft>
             </a:pPr>
             <a:r>
-              <a:rPr sz="1500" b="0" i="0">
+              <a:rPr sz="2100" b="0" i="0">
                 <a:solidFill>
                   <a:srgbClr val="7A7A7A"/>
                 </a:solidFill>
@@ -11719,7 +11719,7 @@
               <a:t>–  </a:t>
             </a:r>
             <a:r>
-              <a:rPr sz="1500" b="0" i="0">
+              <a:rPr sz="2100" b="0" i="0">
                 <a:solidFill>
                   <a:srgbClr val="2A2929"/>
                 </a:solidFill>
@@ -11741,7 +11741,7 @@
               </a:spcAft>
             </a:pPr>
             <a:r>
-              <a:rPr sz="1800" b="1" i="0">
+              <a:rPr sz="2400" b="1" i="0">
                 <a:solidFill>
                   <a:srgbClr val="EDAB0C"/>
                 </a:solidFill>
@@ -11750,7 +11750,7 @@
               <a:t>■  </a:t>
             </a:r>
             <a:r>
-              <a:rPr sz="1800" b="1" i="0">
+              <a:rPr sz="2400" b="1" i="0">
                 <a:solidFill>
                   <a:srgbClr val="2A2929"/>
                 </a:solidFill>
@@ -11772,7 +11772,7 @@
               </a:spcAft>
             </a:pPr>
             <a:r>
-              <a:rPr sz="1500" b="0" i="0">
+              <a:rPr sz="2100" b="0" i="0">
                 <a:solidFill>
                   <a:srgbClr val="7A7A7A"/>
                 </a:solidFill>
@@ -11781,7 +11781,7 @@
               <a:t>–  </a:t>
             </a:r>
             <a:r>
-              <a:rPr sz="1500" b="0" i="0">
+              <a:rPr sz="2100" b="0" i="0">
                 <a:solidFill>
                   <a:srgbClr val="2A2929"/>
                 </a:solidFill>
@@ -11803,7 +11803,7 @@
               </a:spcAft>
             </a:pPr>
             <a:r>
-              <a:rPr sz="1800" b="1" i="0">
+              <a:rPr sz="2400" b="1" i="0">
                 <a:solidFill>
                   <a:srgbClr val="92268F"/>
                 </a:solidFill>
@@ -11812,7 +11812,7 @@
               <a:t>■  </a:t>
             </a:r>
             <a:r>
-              <a:rPr sz="1800" b="1" i="0">
+              <a:rPr sz="2400" b="1" i="0">
                 <a:solidFill>
                   <a:srgbClr val="92268F"/>
                 </a:solidFill>
@@ -11979,8 +11979,8 @@
         </p:nvSpPr>
         <p:spPr>
           <a:xfrm>
-            <a:off x="640080" y="502920"/>
-            <a:ext cx="10881360" cy="1005840"/>
+            <a:off x="640080" y="457200"/>
+            <a:ext cx="10881360" cy="960120"/>
           </a:xfrm>
           <a:prstGeom prst="rect">
             <a:avLst/>
@@ -11994,7 +11994,7 @@
           <a:lstStyle/>
           <a:p>
             <a:r>
-              <a:rPr sz="3000" b="1" i="0">
+              <a:rPr sz="2800" b="1" i="0">
                 <a:solidFill>
                   <a:srgbClr val="2A2929"/>
                 </a:solidFill>
@@ -12029,7 +12029,7 @@
         </p:nvSpPr>
         <p:spPr>
           <a:xfrm>
-            <a:off x="658368" y="1481328"/>
+            <a:off x="658368" y="1371600"/>
             <a:ext cx="1463040" cy="50800"/>
           </a:xfrm>
           <a:prstGeom prst="rect">
@@ -12073,8 +12073,8 @@
         </p:nvSpPr>
         <p:spPr>
           <a:xfrm>
-            <a:off x="658368" y="1783080"/>
-            <a:ext cx="10881360" cy="4389120"/>
+            <a:off x="658368" y="1691640"/>
+            <a:ext cx="10881360" cy="4480560"/>
           </a:xfrm>
           <a:prstGeom prst="rect">
             <a:avLst/>
@@ -12082,7 +12082,7 @@
           <a:noFill/>
         </p:spPr>
         <p:txBody>
-          <a:bodyPr wrap="square" anchor="t" lIns="0" rIns="0" tIns="0" bIns="0">
+          <a:bodyPr wrap="square" anchor="ctr" lIns="0" rIns="0" tIns="0" bIns="0">
             <a:spAutoFit/>
           </a:bodyPr>
           <a:lstStyle/>
@@ -12099,7 +12099,7 @@
               </a:spcAft>
             </a:pPr>
             <a:r>
-              <a:rPr sz="1800" b="1" i="0">
+              <a:rPr sz="2400" b="1" i="0">
                 <a:solidFill>
                   <a:srgbClr val="EDAB0C"/>
                 </a:solidFill>
@@ -12108,7 +12108,7 @@
               <a:t>■  </a:t>
             </a:r>
             <a:r>
-              <a:rPr sz="1800" b="0" i="0">
+              <a:rPr sz="2400" b="0" i="0">
                 <a:solidFill>
                   <a:srgbClr val="2A2929"/>
                 </a:solidFill>
@@ -12130,7 +12130,7 @@
               </a:spcAft>
             </a:pPr>
             <a:r>
-              <a:rPr sz="1800" b="1" i="0">
+              <a:rPr sz="2400" b="1" i="0">
                 <a:solidFill>
                   <a:srgbClr val="EDAB0C"/>
                 </a:solidFill>
@@ -12139,7 +12139,7 @@
               <a:t>■  </a:t>
             </a:r>
             <a:r>
-              <a:rPr sz="1800" b="0" i="0">
+              <a:rPr sz="2400" b="0" i="0">
                 <a:solidFill>
                   <a:srgbClr val="2A2929"/>
                 </a:solidFill>
@@ -12161,7 +12161,7 @@
               </a:spcAft>
             </a:pPr>
             <a:r>
-              <a:rPr sz="1800" b="1" i="0">
+              <a:rPr sz="2400" b="1" i="0">
                 <a:solidFill>
                   <a:srgbClr val="EDAB0C"/>
                 </a:solidFill>
@@ -12170,7 +12170,7 @@
               <a:t>■  </a:t>
             </a:r>
             <a:r>
-              <a:rPr sz="1800" b="0" i="0">
+              <a:rPr sz="2400" b="0" i="0">
                 <a:solidFill>
                   <a:srgbClr val="2A2929"/>
                 </a:solidFill>
@@ -12192,7 +12192,7 @@
               </a:spcAft>
             </a:pPr>
             <a:r>
-              <a:rPr sz="1500" b="0" i="0">
+              <a:rPr sz="2100" b="0" i="0">
                 <a:solidFill>
                   <a:srgbClr val="7A7A7A"/>
                 </a:solidFill>
@@ -12201,7 +12201,7 @@
               <a:t>–  </a:t>
             </a:r>
             <a:r>
-              <a:rPr sz="1500" b="0" i="0">
+              <a:rPr sz="2100" b="0" i="0">
                 <a:solidFill>
                   <a:srgbClr val="2A2929"/>
                 </a:solidFill>
@@ -12223,7 +12223,7 @@
               </a:spcAft>
             </a:pPr>
             <a:r>
-              <a:rPr sz="1500" b="0" i="0">
+              <a:rPr sz="2100" b="0" i="0">
                 <a:solidFill>
                   <a:srgbClr val="7A7A7A"/>
                 </a:solidFill>
@@ -12232,7 +12232,7 @@
               <a:t>–  </a:t>
             </a:r>
             <a:r>
-              <a:rPr sz="1500" b="0" i="0">
+              <a:rPr sz="2100" b="0" i="0">
                 <a:solidFill>
                   <a:srgbClr val="2A2929"/>
                 </a:solidFill>
@@ -12399,8 +12399,8 @@
         </p:nvSpPr>
         <p:spPr>
           <a:xfrm>
-            <a:off x="640080" y="502920"/>
-            <a:ext cx="10881360" cy="1005840"/>
+            <a:off x="640080" y="457200"/>
+            <a:ext cx="10881360" cy="960120"/>
           </a:xfrm>
           <a:prstGeom prst="rect">
             <a:avLst/>
@@ -12414,7 +12414,7 @@
           <a:lstStyle/>
           <a:p>
             <a:r>
-              <a:rPr sz="3000" b="1" i="0">
+              <a:rPr sz="2800" b="1" i="0">
                 <a:solidFill>
                   <a:srgbClr val="2A2929"/>
                 </a:solidFill>
@@ -12433,7 +12433,7 @@
         </p:nvSpPr>
         <p:spPr>
           <a:xfrm>
-            <a:off x="658368" y="1481328"/>
+            <a:off x="658368" y="1371600"/>
             <a:ext cx="1463040" cy="50800"/>
           </a:xfrm>
           <a:prstGeom prst="rect">
@@ -12477,8 +12477,8 @@
         </p:nvSpPr>
         <p:spPr>
           <a:xfrm>
-            <a:off x="658368" y="1783080"/>
-            <a:ext cx="10881360" cy="4389120"/>
+            <a:off x="658368" y="1691640"/>
+            <a:ext cx="10881360" cy="4480560"/>
           </a:xfrm>
           <a:prstGeom prst="rect">
             <a:avLst/>
@@ -12486,7 +12486,7 @@
           <a:noFill/>
         </p:spPr>
         <p:txBody>
-          <a:bodyPr wrap="square" anchor="t" lIns="0" rIns="0" tIns="0" bIns="0">
+          <a:bodyPr wrap="square" anchor="ctr" lIns="0" rIns="0" tIns="0" bIns="0">
             <a:spAutoFit/>
           </a:bodyPr>
           <a:lstStyle/>
@@ -12503,7 +12503,7 @@
               </a:spcAft>
             </a:pPr>
             <a:r>
-              <a:rPr sz="1800" b="1" i="0">
+              <a:rPr sz="2400" b="1" i="0">
                 <a:solidFill>
                   <a:srgbClr val="EDAB0C"/>
                 </a:solidFill>
@@ -12512,7 +12512,7 @@
               <a:t>■  </a:t>
             </a:r>
             <a:r>
-              <a:rPr sz="1800" b="0" i="0">
+              <a:rPr sz="2400" b="0" i="0">
                 <a:solidFill>
                   <a:srgbClr val="2A2929"/>
                 </a:solidFill>
@@ -12534,7 +12534,7 @@
               </a:spcAft>
             </a:pPr>
             <a:r>
-              <a:rPr sz="1800" b="1" i="0">
+              <a:rPr sz="2400" b="1" i="0">
                 <a:solidFill>
                   <a:srgbClr val="EDAB0C"/>
                 </a:solidFill>
@@ -12543,7 +12543,7 @@
               <a:t>■  </a:t>
             </a:r>
             <a:r>
-              <a:rPr sz="1800" b="0" i="0">
+              <a:rPr sz="2400" b="0" i="0">
                 <a:solidFill>
                   <a:srgbClr val="2A2929"/>
                 </a:solidFill>
@@ -12565,7 +12565,7 @@
               </a:spcAft>
             </a:pPr>
             <a:r>
-              <a:rPr sz="1800" b="1" i="0">
+              <a:rPr sz="2400" b="1" i="0">
                 <a:solidFill>
                   <a:srgbClr val="EDAB0C"/>
                 </a:solidFill>
@@ -12574,7 +12574,7 @@
               <a:t>■  </a:t>
             </a:r>
             <a:r>
-              <a:rPr sz="1800" b="0" i="0">
+              <a:rPr sz="2400" b="0" i="0">
                 <a:solidFill>
                   <a:srgbClr val="2A2929"/>
                 </a:solidFill>
@@ -12596,7 +12596,7 @@
               </a:spcAft>
             </a:pPr>
             <a:r>
-              <a:rPr sz="1800" b="1" i="0">
+              <a:rPr sz="2400" b="1" i="0">
                 <a:solidFill>
                   <a:srgbClr val="92268F"/>
                 </a:solidFill>
@@ -12605,7 +12605,7 @@
               <a:t>■  </a:t>
             </a:r>
             <a:r>
-              <a:rPr sz="1800" b="1" i="0">
+              <a:rPr sz="2400" b="1" i="0">
                 <a:solidFill>
                   <a:srgbClr val="92268F"/>
                 </a:solidFill>
@@ -12845,7 +12845,7 @@
           </a:fontRef>
         </p:style>
         <p:txBody>
-          <a:bodyPr rtlCol="0" anchor="ctr" wrap="none"/>
+          <a:bodyPr rtlCol="0" anchor="ctr"/>
           <a:lstStyle/>
           <a:p>
             <a:pPr algn="ctr"/>

--- a/S1-CL1-Cloud-Design-Build/delivery/topic_02/Topic_02_Slides.pptx
+++ b/S1-CL1-Cloud-Design-Build/delivery/topic_02/Topic_02_Slides.pptx
@@ -7,27 +7,27 @@
   <p:sldIdLst>
     <p:sldId id="256" r:id="rId7"/>
     <p:sldId id="257" r:id="rId8"/>
-    <p:sldId id="258" r:id="rId9"/>
-    <p:sldId id="259" r:id="rId10"/>
-    <p:sldId id="260" r:id="rId11"/>
-    <p:sldId id="261" r:id="rId12"/>
-    <p:sldId id="262" r:id="rId13"/>
-    <p:sldId id="263" r:id="rId14"/>
-    <p:sldId id="264" r:id="rId15"/>
-    <p:sldId id="265" r:id="rId16"/>
-    <p:sldId id="266" r:id="rId17"/>
-    <p:sldId id="267" r:id="rId18"/>
-    <p:sldId id="268" r:id="rId19"/>
-    <p:sldId id="269" r:id="rId20"/>
-    <p:sldId id="270" r:id="rId21"/>
-    <p:sldId id="271" r:id="rId22"/>
-    <p:sldId id="272" r:id="rId23"/>
-    <p:sldId id="273" r:id="rId24"/>
-    <p:sldId id="274" r:id="rId25"/>
-    <p:sldId id="275" r:id="rId26"/>
-    <p:sldId id="276" r:id="rId27"/>
-    <p:sldId id="277" r:id="rId28"/>
-    <p:sldId id="278" r:id="rId29"/>
+    <p:sldId id="258" r:id="rId10"/>
+    <p:sldId id="259" r:id="rId11"/>
+    <p:sldId id="260" r:id="rId12"/>
+    <p:sldId id="261" r:id="rId13"/>
+    <p:sldId id="262" r:id="rId14"/>
+    <p:sldId id="263" r:id="rId15"/>
+    <p:sldId id="264" r:id="rId16"/>
+    <p:sldId id="265" r:id="rId17"/>
+    <p:sldId id="266" r:id="rId18"/>
+    <p:sldId id="267" r:id="rId19"/>
+    <p:sldId id="268" r:id="rId20"/>
+    <p:sldId id="269" r:id="rId21"/>
+    <p:sldId id="270" r:id="rId22"/>
+    <p:sldId id="271" r:id="rId23"/>
+    <p:sldId id="272" r:id="rId24"/>
+    <p:sldId id="273" r:id="rId25"/>
+    <p:sldId id="274" r:id="rId26"/>
+    <p:sldId id="275" r:id="rId27"/>
+    <p:sldId id="276" r:id="rId28"/>
+    <p:sldId id="277" r:id="rId29"/>
+    <p:sldId id="278" r:id="rId30"/>
   </p:sldIdLst>
   <p:sldSz cx="12191695" cy="6858000" type="screen4x3"/>
   <p:notesSz cx="6858000" cy="9144000"/>
@@ -127,6 +127,2081 @@
     </a:lvl9pPr>
   </p:defaultTextStyle>
 </p:presentation>
+</file>
+
+<file path=ppt/notesMasters/notesMaster1.xml><?xml version="1.0" encoding="utf-8"?>
+<p:notesMaster xmlns:a="http://schemas.openxmlformats.org/drawingml/2006/main" xmlns:p="http://schemas.openxmlformats.org/presentationml/2006/main" xmlns:r="http://schemas.openxmlformats.org/officeDocument/2006/relationships">
+  <p:cSld>
+    <p:bg>
+      <p:bgRef idx="1001">
+        <a:schemeClr val="bg1"/>
+      </p:bgRef>
+    </p:bg>
+    <p:spTree>
+      <p:nvGrpSpPr>
+        <p:cNvPr id="1" name=""/>
+        <p:cNvGrpSpPr/>
+        <p:nvPr/>
+      </p:nvGrpSpPr>
+      <p:grpSpPr>
+        <a:xfrm>
+          <a:off x="0" y="0"/>
+          <a:ext cx="0" cy="0"/>
+          <a:chOff x="0" y="0"/>
+          <a:chExt cx="0" cy="0"/>
+        </a:xfrm>
+      </p:grpSpPr>
+      <p:sp>
+        <p:nvSpPr>
+          <p:cNvPr id="2" name="Header Placeholder 1"/>
+          <p:cNvSpPr>
+            <a:spLocks noGrp="1"/>
+          </p:cNvSpPr>
+          <p:nvPr>
+            <p:ph type="hdr" sz="quarter"/>
+          </p:nvPr>
+        </p:nvSpPr>
+        <p:spPr>
+          <a:xfrm>
+            <a:off x="0" y="0"/>
+            <a:ext cx="2971800" cy="457200"/>
+          </a:xfrm>
+          <a:prstGeom prst="rect">
+            <a:avLst/>
+          </a:prstGeom>
+        </p:spPr>
+        <p:txBody>
+          <a:bodyPr vert="horz" lIns="91440" tIns="45720" rIns="91440" bIns="45720" rtlCol="0"/>
+          <a:lstStyle>
+            <a:lvl1pPr algn="l">
+              <a:defRPr sz="1200"/>
+            </a:lvl1pPr>
+          </a:lstStyle>
+          <a:p>
+            <a:endParaRPr lang="en-US"/>
+          </a:p>
+        </p:txBody>
+      </p:sp>
+      <p:sp>
+        <p:nvSpPr>
+          <p:cNvPr id="3" name="Date Placeholder 2"/>
+          <p:cNvSpPr>
+            <a:spLocks noGrp="1"/>
+          </p:cNvSpPr>
+          <p:nvPr>
+            <p:ph type="dt" idx="1"/>
+          </p:nvPr>
+        </p:nvSpPr>
+        <p:spPr>
+          <a:xfrm>
+            <a:off x="3884613" y="0"/>
+            <a:ext cx="2971800" cy="457200"/>
+          </a:xfrm>
+          <a:prstGeom prst="rect">
+            <a:avLst/>
+          </a:prstGeom>
+        </p:spPr>
+        <p:txBody>
+          <a:bodyPr vert="horz" lIns="91440" tIns="45720" rIns="91440" bIns="45720" rtlCol="0"/>
+          <a:lstStyle>
+            <a:lvl1pPr algn="r">
+              <a:defRPr sz="1200"/>
+            </a:lvl1pPr>
+          </a:lstStyle>
+          <a:p>
+            <a:fld id="{0F89C1C7-3DCD-1040-A9CF-14679D8B5DDD}" type="datetimeFigureOut">
+              <a:rPr lang="en-US" smtClean="0"/>
+              <a:t>10/17/16</a:t>
+            </a:fld>
+            <a:endParaRPr lang="en-US"/>
+          </a:p>
+        </p:txBody>
+      </p:sp>
+      <p:sp>
+        <p:nvSpPr>
+          <p:cNvPr id="4" name="Slide Image Placeholder 3"/>
+          <p:cNvSpPr>
+            <a:spLocks noGrp="1" noRot="1" noChangeAspect="1"/>
+          </p:cNvSpPr>
+          <p:nvPr>
+            <p:ph type="sldImg" idx="2"/>
+          </p:nvPr>
+        </p:nvSpPr>
+        <p:spPr>
+          <a:xfrm>
+            <a:off x="1143000" y="685800"/>
+            <a:ext cx="4572000" cy="3429000"/>
+          </a:xfrm>
+          <a:prstGeom prst="rect">
+            <a:avLst/>
+          </a:prstGeom>
+          <a:noFill/>
+          <a:ln w="12700">
+            <a:solidFill>
+              <a:prstClr val="black"/>
+            </a:solidFill>
+          </a:ln>
+        </p:spPr>
+        <p:txBody>
+          <a:bodyPr vert="horz" lIns="91440" tIns="45720" rIns="91440" bIns="45720" rtlCol="0" anchor="ctr"/>
+          <a:lstStyle/>
+          <a:p>
+            <a:endParaRPr lang="en-US"/>
+          </a:p>
+        </p:txBody>
+      </p:sp>
+      <p:sp>
+        <p:nvSpPr>
+          <p:cNvPr id="5" name="Notes Placeholder 4"/>
+          <p:cNvSpPr>
+            <a:spLocks noGrp="1"/>
+          </p:cNvSpPr>
+          <p:nvPr>
+            <p:ph type="body" sz="quarter" idx="3"/>
+          </p:nvPr>
+        </p:nvSpPr>
+        <p:spPr>
+          <a:xfrm>
+            <a:off x="685800" y="4343400"/>
+            <a:ext cx="5486400" cy="4114800"/>
+          </a:xfrm>
+          <a:prstGeom prst="rect">
+            <a:avLst/>
+          </a:prstGeom>
+        </p:spPr>
+        <p:txBody>
+          <a:bodyPr vert="horz" lIns="91440" tIns="45720" rIns="91440" bIns="45720" rtlCol="0"/>
+          <a:lstStyle/>
+          <a:p>
+            <a:pPr lvl="0"/>
+            <a:r>
+              <a:rPr lang="en-US" smtClean="0"/>
+              <a:t>Click to edit Master text styles</a:t>
+            </a:r>
+          </a:p>
+          <a:p>
+            <a:pPr lvl="1"/>
+            <a:r>
+              <a:rPr lang="en-US" smtClean="0"/>
+              <a:t>Second level</a:t>
+            </a:r>
+          </a:p>
+          <a:p>
+            <a:pPr lvl="2"/>
+            <a:r>
+              <a:rPr lang="en-US" smtClean="0"/>
+              <a:t>Third level</a:t>
+            </a:r>
+          </a:p>
+          <a:p>
+            <a:pPr lvl="3"/>
+            <a:r>
+              <a:rPr lang="en-US" smtClean="0"/>
+              <a:t>Fourth level</a:t>
+            </a:r>
+          </a:p>
+          <a:p>
+            <a:pPr lvl="4"/>
+            <a:r>
+              <a:rPr lang="en-US" smtClean="0"/>
+              <a:t>Fifth level</a:t>
+            </a:r>
+            <a:endParaRPr lang="en-US"/>
+          </a:p>
+        </p:txBody>
+      </p:sp>
+      <p:sp>
+        <p:nvSpPr>
+          <p:cNvPr id="6" name="Footer Placeholder 5"/>
+          <p:cNvSpPr>
+            <a:spLocks noGrp="1"/>
+          </p:cNvSpPr>
+          <p:nvPr>
+            <p:ph type="ftr" sz="quarter" idx="4"/>
+          </p:nvPr>
+        </p:nvSpPr>
+        <p:spPr>
+          <a:xfrm>
+            <a:off x="0" y="8685213"/>
+            <a:ext cx="2971800" cy="457200"/>
+          </a:xfrm>
+          <a:prstGeom prst="rect">
+            <a:avLst/>
+          </a:prstGeom>
+        </p:spPr>
+        <p:txBody>
+          <a:bodyPr vert="horz" lIns="91440" tIns="45720" rIns="91440" bIns="45720" rtlCol="0" anchor="b"/>
+          <a:lstStyle>
+            <a:lvl1pPr algn="l">
+              <a:defRPr sz="1200"/>
+            </a:lvl1pPr>
+          </a:lstStyle>
+          <a:p>
+            <a:endParaRPr lang="en-US"/>
+          </a:p>
+        </p:txBody>
+      </p:sp>
+      <p:sp>
+        <p:nvSpPr>
+          <p:cNvPr id="7" name="Slide Number Placeholder 6"/>
+          <p:cNvSpPr>
+            <a:spLocks noGrp="1"/>
+          </p:cNvSpPr>
+          <p:nvPr>
+            <p:ph type="sldNum" sz="quarter" idx="5"/>
+          </p:nvPr>
+        </p:nvSpPr>
+        <p:spPr>
+          <a:xfrm>
+            <a:off x="3884613" y="8685213"/>
+            <a:ext cx="2971800" cy="457200"/>
+          </a:xfrm>
+          <a:prstGeom prst="rect">
+            <a:avLst/>
+          </a:prstGeom>
+        </p:spPr>
+        <p:txBody>
+          <a:bodyPr vert="horz" lIns="91440" tIns="45720" rIns="91440" bIns="45720" rtlCol="0" anchor="b"/>
+          <a:lstStyle>
+            <a:lvl1pPr algn="r">
+              <a:defRPr sz="1200"/>
+            </a:lvl1pPr>
+          </a:lstStyle>
+          <a:p>
+            <a:fld id="{BB5E49A5-4136-284D-997B-48E1D791AD67}" type="slidenum">
+              <a:rPr lang="en-US" smtClean="0"/>
+              <a:t>‹#›</a:t>
+            </a:fld>
+            <a:endParaRPr lang="en-US"/>
+          </a:p>
+        </p:txBody>
+      </p:sp>
+    </p:spTree>
+    <p:extLst>
+      <p:ext uri="{BB962C8B-B14F-4D97-AF65-F5344CB8AC3E}">
+        <p14:creationId xmlns:p14="http://schemas.microsoft.com/office/powerpoint/2010/main" val="2623252185"/>
+      </p:ext>
+    </p:extLst>
+  </p:cSld>
+  <p:clrMap bg1="lt1" tx1="dk1" bg2="lt2" tx2="dk2" accent1="accent1" accent2="accent2" accent3="accent3" accent4="accent4" accent5="accent5" accent6="accent6" hlink="hlink" folHlink="folHlink"/>
+  <p:notesStyle>
+    <a:lvl1pPr marL="0" algn="l" defTabSz="457200" rtl="0" eaLnBrk="1" latinLnBrk="0" hangingPunct="1">
+      <a:defRPr sz="1200" kern="1200">
+        <a:solidFill>
+          <a:schemeClr val="tx1"/>
+        </a:solidFill>
+        <a:latin typeface="+mn-lt"/>
+        <a:ea typeface="+mn-ea"/>
+        <a:cs typeface="+mn-cs"/>
+      </a:defRPr>
+    </a:lvl1pPr>
+    <a:lvl2pPr marL="457200" algn="l" defTabSz="457200" rtl="0" eaLnBrk="1" latinLnBrk="0" hangingPunct="1">
+      <a:defRPr sz="1200" kern="1200">
+        <a:solidFill>
+          <a:schemeClr val="tx1"/>
+        </a:solidFill>
+        <a:latin typeface="+mn-lt"/>
+        <a:ea typeface="+mn-ea"/>
+        <a:cs typeface="+mn-cs"/>
+      </a:defRPr>
+    </a:lvl2pPr>
+    <a:lvl3pPr marL="914400" algn="l" defTabSz="457200" rtl="0" eaLnBrk="1" latinLnBrk="0" hangingPunct="1">
+      <a:defRPr sz="1200" kern="1200">
+        <a:solidFill>
+          <a:schemeClr val="tx1"/>
+        </a:solidFill>
+        <a:latin typeface="+mn-lt"/>
+        <a:ea typeface="+mn-ea"/>
+        <a:cs typeface="+mn-cs"/>
+      </a:defRPr>
+    </a:lvl3pPr>
+    <a:lvl4pPr marL="1371600" algn="l" defTabSz="457200" rtl="0" eaLnBrk="1" latinLnBrk="0" hangingPunct="1">
+      <a:defRPr sz="1200" kern="1200">
+        <a:solidFill>
+          <a:schemeClr val="tx1"/>
+        </a:solidFill>
+        <a:latin typeface="+mn-lt"/>
+        <a:ea typeface="+mn-ea"/>
+        <a:cs typeface="+mn-cs"/>
+      </a:defRPr>
+    </a:lvl4pPr>
+    <a:lvl5pPr marL="1828800" algn="l" defTabSz="457200" rtl="0" eaLnBrk="1" latinLnBrk="0" hangingPunct="1">
+      <a:defRPr sz="1200" kern="1200">
+        <a:solidFill>
+          <a:schemeClr val="tx1"/>
+        </a:solidFill>
+        <a:latin typeface="+mn-lt"/>
+        <a:ea typeface="+mn-ea"/>
+        <a:cs typeface="+mn-cs"/>
+      </a:defRPr>
+    </a:lvl5pPr>
+    <a:lvl6pPr marL="2286000" algn="l" defTabSz="457200" rtl="0" eaLnBrk="1" latinLnBrk="0" hangingPunct="1">
+      <a:defRPr sz="1200" kern="1200">
+        <a:solidFill>
+          <a:schemeClr val="tx1"/>
+        </a:solidFill>
+        <a:latin typeface="+mn-lt"/>
+        <a:ea typeface="+mn-ea"/>
+        <a:cs typeface="+mn-cs"/>
+      </a:defRPr>
+    </a:lvl6pPr>
+    <a:lvl7pPr marL="2743200" algn="l" defTabSz="457200" rtl="0" eaLnBrk="1" latinLnBrk="0" hangingPunct="1">
+      <a:defRPr sz="1200" kern="1200">
+        <a:solidFill>
+          <a:schemeClr val="tx1"/>
+        </a:solidFill>
+        <a:latin typeface="+mn-lt"/>
+        <a:ea typeface="+mn-ea"/>
+        <a:cs typeface="+mn-cs"/>
+      </a:defRPr>
+    </a:lvl7pPr>
+    <a:lvl8pPr marL="3200400" algn="l" defTabSz="457200" rtl="0" eaLnBrk="1" latinLnBrk="0" hangingPunct="1">
+      <a:defRPr sz="1200" kern="1200">
+        <a:solidFill>
+          <a:schemeClr val="tx1"/>
+        </a:solidFill>
+        <a:latin typeface="+mn-lt"/>
+        <a:ea typeface="+mn-ea"/>
+        <a:cs typeface="+mn-cs"/>
+      </a:defRPr>
+    </a:lvl8pPr>
+    <a:lvl9pPr marL="3657600" algn="l" defTabSz="457200" rtl="0" eaLnBrk="1" latinLnBrk="0" hangingPunct="1">
+      <a:defRPr sz="1200" kern="1200">
+        <a:solidFill>
+          <a:schemeClr val="tx1"/>
+        </a:solidFill>
+        <a:latin typeface="+mn-lt"/>
+        <a:ea typeface="+mn-ea"/>
+        <a:cs typeface="+mn-cs"/>
+      </a:defRPr>
+    </a:lvl9pPr>
+  </p:notesStyle>
+</p:notesMaster>
+</file>
+
+<file path=ppt/notesSlides/notesSlide1.xml><?xml version="1.0" encoding="utf-8"?>
+<p:notes xmlns:a="http://schemas.openxmlformats.org/drawingml/2006/main" xmlns:p="http://schemas.openxmlformats.org/presentationml/2006/main" xmlns:r="http://schemas.openxmlformats.org/officeDocument/2006/relationships">
+  <p:cSld>
+    <p:spTree>
+      <p:nvGrpSpPr>
+        <p:cNvPr id="1" name=""/>
+        <p:cNvGrpSpPr/>
+        <p:nvPr/>
+      </p:nvGrpSpPr>
+      <p:grpSpPr>
+        <a:xfrm>
+          <a:off x="0" y="0"/>
+          <a:ext cx="0" cy="0"/>
+          <a:chOff x="0" y="0"/>
+          <a:chExt cx="0" cy="0"/>
+        </a:xfrm>
+      </p:grpSpPr>
+      <p:sp>
+        <p:nvSpPr>
+          <p:cNvPr id="2" name="Slide Image Placeholder 1"/>
+          <p:cNvSpPr>
+            <a:spLocks noGrp="1"/>
+          </p:cNvSpPr>
+          <p:nvPr>
+            <p:ph type="sldImg" idx="2"/>
+          </p:nvPr>
+        </p:nvSpPr>
+        <p:spPr/>
+      </p:sp>
+      <p:sp>
+        <p:nvSpPr>
+          <p:cNvPr id="3" name="Notes Placeholder 2"/>
+          <p:cNvSpPr>
+            <a:spLocks noGrp="1"/>
+          </p:cNvSpPr>
+          <p:nvPr>
+            <p:ph type="body" idx="3" sz="quarter"/>
+          </p:nvPr>
+        </p:nvSpPr>
+        <p:spPr/>
+        <p:txBody>
+          <a:bodyPr/>
+          <a:lstStyle/>
+          <a:p>
+            <a:r>
+              <a:t>Frame the whole Topic as the pivot from Topic 1: they can speak cloud now — today they DIAGNOSE.</a:t>
+            </a:r>
+          </a:p>
+          <a:p>
+            <a:r>
+              <a:t>Set expectations, don't yet teach a section.</a:t>
+            </a:r>
+          </a:p>
+          <a:p>
+            <a:r>
+              <a:t>• First bullet: literacy was the warm-up; the real consulting job is working out where the</a:t>
+            </a:r>
+          </a:p>
+          <a:p>
+            <a:r>
+              <a:t>  organisation is, where it needs to be, and the gap between. No solutions yet.</a:t>
+            </a:r>
+          </a:p>
+          <a:p>
+            <a:r>
+              <a:t>• Second bullet: that's the whole job of a case for change — locate the client on the map before</a:t>
+            </a:r>
+          </a:p>
+          <a:p>
+            <a:r>
+              <a:t>  you plot a route.</a:t>
+            </a:r>
+          </a:p>
+          <a:p>
+            <a:r>
+              <a:t>• Third bullet (bolded): the three moves — align to strategy → describe the current state → expose</a:t>
+            </a:r>
+          </a:p>
+          <a:p>
+            <a:r>
+              <a:t>  the gaps. Say them in that order; each depends on the one before.</a:t>
+            </a:r>
+          </a:p>
+          <a:p>
+            <a:r>
+              <a:t>• Fourth bullet: these three become the OPENING SECTIONS of the business case (AT1 §3–§5). What</a:t>
+            </a:r>
+          </a:p>
+          <a:p>
+            <a:r>
+              <a:t>  they build today is directly the front half of the AT1 deliverable.</a:t>
+            </a:r>
+          </a:p>
+          <a:p>
+            <a:r>
+              <a:t>Misconception to pre-empt: "we're picking a cloud solution today." No — diagnosis comes before</a:t>
+            </a:r>
+          </a:p>
+          <a:p>
+            <a:r>
+              <a:t>prescription; solutions are Topic 3. Manage the student who jumps straight to "move it to AWS".</a:t>
+            </a:r>
+          </a:p>
+          <a:p>
+            <a:r>
+              <a:t>Question to pose: "Before you can recommend a fix, what three things must you establish about the</a:t>
+            </a:r>
+          </a:p>
+          <a:p>
+            <a:r>
+              <a:t>client?" — draws out strategy / current state / gap.</a:t>
+            </a:r>
+          </a:p>
+          <a:p>
+            <a:r>
+              <a:t>UoC/AT1 tie: this Topic develops PC 1.1–1.3 and PE 1–3; the output is AT1 Part A §3–§5.</a:t>
+            </a:r>
+          </a:p>
+        </p:txBody>
+      </p:sp>
+      <p:sp>
+        <p:nvSpPr>
+          <p:cNvPr id="4" name="Slide Number Placeholder 3"/>
+          <p:cNvSpPr>
+            <a:spLocks noGrp="1"/>
+          </p:cNvSpPr>
+          <p:nvPr>
+            <p:ph type="sldNum" idx="5" sz="quarter"/>
+          </p:nvPr>
+        </p:nvSpPr>
+        <p:spPr/>
+      </p:sp>
+    </p:spTree>
+  </p:cSld>
+  <p:clrMapOvr>
+    <a:masterClrMapping/>
+  </p:clrMapOvr>
+</p:notes>
+</file>
+
+<file path=ppt/notesSlides/notesSlide10.xml><?xml version="1.0" encoding="utf-8"?>
+<p:notes xmlns:a="http://schemas.openxmlformats.org/drawingml/2006/main" xmlns:p="http://schemas.openxmlformats.org/presentationml/2006/main" xmlns:r="http://schemas.openxmlformats.org/officeDocument/2006/relationships">
+  <p:cSld>
+    <p:spTree>
+      <p:nvGrpSpPr>
+        <p:cNvPr id="1" name=""/>
+        <p:cNvGrpSpPr/>
+        <p:nvPr/>
+      </p:nvGrpSpPr>
+      <p:grpSpPr>
+        <a:xfrm>
+          <a:off x="0" y="0"/>
+          <a:ext cx="0" cy="0"/>
+          <a:chOff x="0" y="0"/>
+          <a:chExt cx="0" cy="0"/>
+        </a:xfrm>
+      </p:grpSpPr>
+      <p:sp>
+        <p:nvSpPr>
+          <p:cNvPr id="2" name="Slide Image Placeholder 1"/>
+          <p:cNvSpPr>
+            <a:spLocks noGrp="1"/>
+          </p:cNvSpPr>
+          <p:nvPr>
+            <p:ph type="sldImg" idx="2"/>
+          </p:nvPr>
+        </p:nvSpPr>
+        <p:spPr/>
+      </p:sp>
+      <p:sp>
+        <p:nvSpPr>
+          <p:cNvPr id="3" name="Notes Placeholder 2"/>
+          <p:cNvSpPr>
+            <a:spLocks noGrp="1"/>
+          </p:cNvSpPr>
+          <p:nvPr>
+            <p:ph type="body" idx="3" sz="quarter"/>
+          </p:nvPr>
+        </p:nvSpPr>
+        <p:spPr/>
+        <p:txBody>
+          <a:bodyPr/>
+          <a:lstStyle/>
+          <a:p>
+            <a:r>
+              <a:t>The three-step method that turns source docs into a synthesised current state — teach it as a</a:t>
+            </a:r>
+          </a:p>
+          <a:p>
+            <a:r>
+              <a:t>repeatable procedure they'll run in the activity next.</a:t>
+            </a:r>
+          </a:p>
+          <a:p>
+            <a:r>
+              <a:t>• Step 1: read the source docs — environment overview, server/app specs, consultation notes.</a:t>
+            </a:r>
+          </a:p>
+          <a:p>
+            <a:r>
+              <a:t>• Step 2: for EACH fact ask "does this affect the renew-vs-migrate decision?" If no, cut it (this is</a:t>
+            </a:r>
+          </a:p>
+          <a:p>
+            <a:r>
+              <a:t>  the relevance filter applied).</a:t>
+            </a:r>
+          </a:p>
+          <a:p>
+            <a:r>
+              <a:t>• Step 3: re-state what's left in PLAIN LANGUAGE, grouped — platform / workload / dependencies /</a:t>
+            </a:r>
+          </a:p>
+          <a:p>
+            <a:r>
+              <a:t>  condition-risk. Grouping is what makes it read as synthesis, not a list.</a:t>
+            </a:r>
+          </a:p>
+          <a:p>
+            <a:r>
+              <a:t>• Aim ~half a page, no copy-paste (bolded).</a:t>
+            </a:r>
+          </a:p>
+          <a:p>
+            <a:r>
+              <a:t>Misconception to pre-empt: "re-state = reword each sentence." No — you regroup and compress across</a:t>
+            </a:r>
+          </a:p>
+          <a:p>
+            <a:r>
+              <a:t>documents; the output is shorter and organised by theme, not a paraphrase of every line.</a:t>
+            </a:r>
+          </a:p>
+          <a:p>
+            <a:r>
+              <a:t>Question to pose: "You've got five source docs — what's the first question you ask of every fact in</a:t>
+            </a:r>
+          </a:p>
+          <a:p>
+            <a:r>
+              <a:t>them?" ("does it affect the decision?").</a:t>
+            </a:r>
+          </a:p>
+          <a:p>
+            <a:r>
+              <a:t>UoC/AT1 tie: PC 1.2 / PE 2 → AT1 §4; this procedure is exactly how a strong A2 gets written.</a:t>
+            </a:r>
+          </a:p>
+        </p:txBody>
+      </p:sp>
+      <p:sp>
+        <p:nvSpPr>
+          <p:cNvPr id="4" name="Slide Number Placeholder 3"/>
+          <p:cNvSpPr>
+            <a:spLocks noGrp="1"/>
+          </p:cNvSpPr>
+          <p:nvPr>
+            <p:ph type="sldNum" idx="5" sz="quarter"/>
+          </p:nvPr>
+        </p:nvSpPr>
+        <p:spPr/>
+      </p:sp>
+    </p:spTree>
+  </p:cSld>
+  <p:clrMapOvr>
+    <a:masterClrMapping/>
+  </p:clrMapOvr>
+</p:notes>
+</file>
+
+<file path=ppt/notesSlides/notesSlide11.xml><?xml version="1.0" encoding="utf-8"?>
+<p:notes xmlns:a="http://schemas.openxmlformats.org/drawingml/2006/main" xmlns:p="http://schemas.openxmlformats.org/presentationml/2006/main" xmlns:r="http://schemas.openxmlformats.org/officeDocument/2006/relationships">
+  <p:cSld>
+    <p:spTree>
+      <p:nvGrpSpPr>
+        <p:cNvPr id="1" name=""/>
+        <p:cNvGrpSpPr/>
+        <p:nvPr/>
+      </p:nvGrpSpPr>
+      <p:grpSpPr>
+        <a:xfrm>
+          <a:off x="0" y="0"/>
+          <a:ext cx="0" cy="0"/>
+          <a:chOff x="0" y="0"/>
+          <a:chExt cx="0" cy="0"/>
+        </a:xfrm>
+      </p:grpSpPr>
+      <p:sp>
+        <p:nvSpPr>
+          <p:cNvPr id="2" name="Slide Image Placeholder 1"/>
+          <p:cNvSpPr>
+            <a:spLocks noGrp="1"/>
+          </p:cNvSpPr>
+          <p:nvPr>
+            <p:ph type="sldImg" idx="2"/>
+          </p:nvPr>
+        </p:nvSpPr>
+        <p:spPr/>
+      </p:sp>
+      <p:sp>
+        <p:nvSpPr>
+          <p:cNvPr id="3" name="Notes Placeholder 2"/>
+          <p:cNvSpPr>
+            <a:spLocks noGrp="1"/>
+          </p:cNvSpPr>
+          <p:nvPr>
+            <p:ph type="body" idx="3" sz="quarter"/>
+          </p:nvPr>
+        </p:nvSpPr>
+        <p:spPr/>
+        <p:txBody>
+          <a:bodyPr/>
+          <a:lstStyle/>
+          <a:p>
+            <a:r>
+              <a:t>Facilitation — the Section 2 practice; students draft §4 of the practice business case (Ledgerline),</a:t>
+            </a:r>
+          </a:p>
+          <a:p>
+            <a:r>
+              <a:t>mirroring AT1 §4 on a different system.</a:t>
+            </a:r>
+          </a:p>
+          <a:p>
+            <a:r>
+              <a:t>Tell students: "In your working copy of the Business Case, add the Current State section for the</a:t>
+            </a:r>
+          </a:p>
+          <a:p>
+            <a:r>
+              <a:t>Accounting System (Ledgerline). Synthesise — in your own words, material facts only."</a:t>
+            </a:r>
+          </a:p>
+          <a:p>
+            <a:r>
+              <a:t>Steps (put on the board):</a:t>
+            </a:r>
+          </a:p>
+          <a:p>
+            <a:r>
+              <a:t>1. Use the Accounting application spec, server specs, operational costing, the ICT Environment</a:t>
+            </a:r>
+          </a:p>
+          <a:p>
+            <a:r>
+              <a:t>   Overview, and the consultation notes on the scenario intranet.</a:t>
+            </a:r>
+          </a:p>
+          <a:p>
+            <a:r>
+              <a:t>2. Cover: platform &amp; stack · workload (incl. month-end / EOFY peaks) · integrations (AD, O365, LMS</a:t>
+            </a:r>
+          </a:p>
+          <a:p>
+            <a:r>
+              <a:t>   fee-status, payroll, banking) · condition &amp; constraints.</a:t>
+            </a:r>
+          </a:p>
+          <a:p>
+            <a:r>
+              <a:t>3. Run the relevance filter on every fact; group what survives.</a:t>
+            </a:r>
+          </a:p>
+          <a:p>
+            <a:r>
+              <a:t>Must produce: ~half a page, own words, grouped by theme, no verbatim copying.</a:t>
+            </a:r>
+          </a:p>
+          <a:p>
+            <a:r>
+              <a:t>Timing: ~20 min then discuss. Where they get stuck: they PASTE spec tables verbatim — circulate and</a:t>
+            </a:r>
+          </a:p>
+          <a:p>
+            <a:r>
+              <a:t>make them re-state in plain language; also watch for irrelevant detail creeping in.</a:t>
+            </a:r>
+          </a:p>
+          <a:p>
+            <a:r>
+              <a:t>Share-back prompt: "Which limitation in your current state most obviously sets up a gap?" (bridges to</a:t>
+            </a:r>
+          </a:p>
+          <a:p>
+            <a:r>
+              <a:t>Section 3).</a:t>
+            </a:r>
+          </a:p>
+          <a:p>
+            <a:r>
+              <a:t>No-leakage note: Ledgerline is PRACTICE; AT1 assesses the same synthesis skill on the LMS —</a:t>
+            </a:r>
+          </a:p>
+          <a:p>
+            <a:r>
+              <a:t>comparable, not identical. Keep them on the scenario source docs.</a:t>
+            </a:r>
+          </a:p>
+        </p:txBody>
+      </p:sp>
+      <p:sp>
+        <p:nvSpPr>
+          <p:cNvPr id="4" name="Slide Number Placeholder 3"/>
+          <p:cNvSpPr>
+            <a:spLocks noGrp="1"/>
+          </p:cNvSpPr>
+          <p:nvPr>
+            <p:ph type="sldNum" idx="5" sz="quarter"/>
+          </p:nvPr>
+        </p:nvSpPr>
+        <p:spPr/>
+      </p:sp>
+    </p:spTree>
+  </p:cSld>
+  <p:clrMapOvr>
+    <a:masterClrMapping/>
+  </p:clrMapOvr>
+</p:notes>
+</file>
+
+<file path=ppt/notesSlides/notesSlide12.xml><?xml version="1.0" encoding="utf-8"?>
+<p:notes xmlns:a="http://schemas.openxmlformats.org/drawingml/2006/main" xmlns:p="http://schemas.openxmlformats.org/presentationml/2006/main" xmlns:r="http://schemas.openxmlformats.org/officeDocument/2006/relationships">
+  <p:cSld>
+    <p:spTree>
+      <p:nvGrpSpPr>
+        <p:cNvPr id="1" name=""/>
+        <p:cNvGrpSpPr/>
+        <p:nvPr/>
+      </p:nvGrpSpPr>
+      <p:grpSpPr>
+        <a:xfrm>
+          <a:off x="0" y="0"/>
+          <a:ext cx="0" cy="0"/>
+          <a:chOff x="0" y="0"/>
+          <a:chExt cx="0" cy="0"/>
+        </a:xfrm>
+      </p:grpSpPr>
+      <p:sp>
+        <p:nvSpPr>
+          <p:cNvPr id="2" name="Slide Image Placeholder 1"/>
+          <p:cNvSpPr>
+            <a:spLocks noGrp="1"/>
+          </p:cNvSpPr>
+          <p:nvPr>
+            <p:ph type="sldImg" idx="2"/>
+          </p:nvPr>
+        </p:nvSpPr>
+        <p:spPr/>
+      </p:sp>
+      <p:sp>
+        <p:nvSpPr>
+          <p:cNvPr id="3" name="Notes Placeholder 2"/>
+          <p:cNvSpPr>
+            <a:spLocks noGrp="1"/>
+          </p:cNvSpPr>
+          <p:nvPr>
+            <p:ph type="body" idx="3" sz="quarter"/>
+          </p:nvPr>
+        </p:nvSpPr>
+        <p:spPr/>
+        <p:txBody>
+          <a:bodyPr/>
+          <a:lstStyle/>
+          <a:p>
+            <a:r>
+              <a:t>Open Section 3 — teach gap analysis as the BRIDGE that makes the problem concrete and hands the next</a:t>
+            </a:r>
+          </a:p>
+          <a:p>
+            <a:r>
+              <a:t>stage its worklist.</a:t>
+            </a:r>
+          </a:p>
+          <a:p>
+            <a:r>
+              <a:t>• First bullet: it bridges where we want to be (strategy + requirements) and where we are (your</a:t>
+            </a:r>
+          </a:p>
+          <a:p>
+            <a:r>
+              <a:t>  current state) — it literally joins §3 to §4.</a:t>
+            </a:r>
+          </a:p>
+          <a:p>
+            <a:r>
+              <a:t>• Second/third bullets: it makes the problem CONCRETE and MEASURABLE, and it hands the next stage a</a:t>
+            </a:r>
+          </a:p>
+          <a:p>
+            <a:r>
+              <a:t>  list of changes to evaluate (the seed of Topic 3's options).</a:t>
+            </a:r>
+          </a:p>
+          <a:p>
+            <a:r>
+              <a:t>• The green line: "No gap → no case." If you can't show a gap, there's no justified change — say it.</a:t>
+            </a:r>
+          </a:p>
+          <a:p>
+            <a:r>
+              <a:t>Misconception to pre-empt: "the gap analysis is where I propose the solution." No — the "proposed</a:t>
+            </a:r>
+          </a:p>
+          <a:p>
+            <a:r>
+              <a:t>change" is a CANDIDATE to evaluate later, not a decision; gap analysis proves the problem, Topic 3</a:t>
+            </a:r>
+          </a:p>
+          <a:p>
+            <a:r>
+              <a:t>weighs the fix.</a:t>
+            </a:r>
+          </a:p>
+          <a:p>
+            <a:r>
+              <a:t>Question to pose: "Where do the 'desired' and 'current' columns each come from?" (desired ← strategy</a:t>
+            </a:r>
+          </a:p>
+          <a:p>
+            <a:r>
+              <a:t>+ requirements; current ← your §4 synthesis — it's traceable both ways).</a:t>
+            </a:r>
+          </a:p>
+          <a:p>
+            <a:r>
+              <a:t>UoC/AT1 tie: PC 1.3 / PE 3 → AT1 §5 Gap Analysis (criterion A3); it's the hinge into the options work.</a:t>
+            </a:r>
+          </a:p>
+        </p:txBody>
+      </p:sp>
+      <p:sp>
+        <p:nvSpPr>
+          <p:cNvPr id="4" name="Slide Number Placeholder 3"/>
+          <p:cNvSpPr>
+            <a:spLocks noGrp="1"/>
+          </p:cNvSpPr>
+          <p:nvPr>
+            <p:ph type="sldNum" idx="5" sz="quarter"/>
+          </p:nvPr>
+        </p:nvSpPr>
+        <p:spPr/>
+      </p:sp>
+    </p:spTree>
+  </p:cSld>
+  <p:clrMapOvr>
+    <a:masterClrMapping/>
+  </p:clrMapOvr>
+</p:notes>
+</file>
+
+<file path=ppt/notesSlides/notesSlide13.xml><?xml version="1.0" encoding="utf-8"?>
+<p:notes xmlns:a="http://schemas.openxmlformats.org/drawingml/2006/main" xmlns:p="http://schemas.openxmlformats.org/presentationml/2006/main" xmlns:r="http://schemas.openxmlformats.org/officeDocument/2006/relationships">
+  <p:cSld>
+    <p:spTree>
+      <p:nvGrpSpPr>
+        <p:cNvPr id="1" name=""/>
+        <p:cNvGrpSpPr/>
+        <p:nvPr/>
+      </p:nvGrpSpPr>
+      <p:grpSpPr>
+        <a:xfrm>
+          <a:off x="0" y="0"/>
+          <a:ext cx="0" cy="0"/>
+          <a:chOff x="0" y="0"/>
+          <a:chExt cx="0" cy="0"/>
+        </a:xfrm>
+      </p:grpSpPr>
+      <p:sp>
+        <p:nvSpPr>
+          <p:cNvPr id="2" name="Slide Image Placeholder 1"/>
+          <p:cNvSpPr>
+            <a:spLocks noGrp="1"/>
+          </p:cNvSpPr>
+          <p:nvPr>
+            <p:ph type="sldImg" idx="2"/>
+          </p:nvPr>
+        </p:nvSpPr>
+        <p:spPr/>
+      </p:sp>
+      <p:sp>
+        <p:nvSpPr>
+          <p:cNvPr id="3" name="Notes Placeholder 2"/>
+          <p:cNvSpPr>
+            <a:spLocks noGrp="1"/>
+          </p:cNvSpPr>
+          <p:nvPr>
+            <p:ph type="body" idx="3" sz="quarter"/>
+          </p:nvPr>
+        </p:nvSpPr>
+        <p:spPr/>
+        <p:txBody>
+          <a:bodyPr/>
+          <a:lstStyle/>
+          <a:p>
+            <a:r>
+              <a:t>Facilitation — the Section 3 practice; students build §5 of the practice business case (Ledgerline)</a:t>
+            </a:r>
+          </a:p>
+          <a:p>
+            <a:r>
+              <a:t>as a structured gap table, mirroring AT1 §5.</a:t>
+            </a:r>
+          </a:p>
+          <a:p>
+            <a:r>
+              <a:t>Tell students: "In your working copy of the Business Case, add the Gap Analysis for the Accounting</a:t>
+            </a:r>
+          </a:p>
+          <a:p>
+            <a:r>
+              <a:t>System (Ledgerline) — a table of at least 3 rows, every column filled and traceable."</a:t>
+            </a:r>
+          </a:p>
+          <a:p>
+            <a:r>
+              <a:t>Steps (put on the board):</a:t>
+            </a:r>
+          </a:p>
+          <a:p>
+            <a:r>
+              <a:t>1. Draw objectives from your Strategic Alignment work + the migration requirements, e.g.: reduce</a:t>
+            </a:r>
+          </a:p>
+          <a:p>
+            <a:r>
+              <a:t>   in-house infrastructure dependency (ageing server); business-hours availability &gt;=99.5% (RPO &lt;=1h /</a:t>
+            </a:r>
+          </a:p>
+          <a:p>
+            <a:r>
+              <a:t>   RTO &lt;=1 business day); keep financial data onshore + 7-year retention; size for month-end / EOFY</a:t>
+            </a:r>
+          </a:p>
+          <a:p>
+            <a:r>
+              <a:t>   peaks without year-round over-provisioning.</a:t>
+            </a:r>
+          </a:p>
+          <a:p>
+            <a:r>
+              <a:t>2. Fill every column: objective → current → desired → gap → opportunity → proposed change.</a:t>
+            </a:r>
+          </a:p>
+          <a:p>
+            <a:r>
+              <a:t>3. Check each row traces BACK to a real objective (from §3) and your current-state facts (from §4).</a:t>
+            </a:r>
+          </a:p>
+          <a:p>
+            <a:r>
+              <a:t>Must produce: a &gt;=3-row gap table, all six columns filled, each row traceable both ways.</a:t>
+            </a:r>
+          </a:p>
+          <a:p>
+            <a:r>
+              <a:t>Timing: ~25 min then discuss. Where they get stuck: they jump to "move to AWS" in every "proposed</a:t>
+            </a:r>
+          </a:p>
+          <a:p>
+            <a:r>
+              <a:t>change" cell — remind them proposed change is a CANDIDATE seed, not a chosen solution; and they leave</a:t>
+            </a:r>
+          </a:p>
+          <a:p>
+            <a:r>
+              <a:t>"opportunity" blank — it's the bridge from gap to proposed change.</a:t>
+            </a:r>
+          </a:p>
+          <a:p>
+            <a:r>
+              <a:t>Share-back prompt: take one row and trace it end-to-end — objective from the plan, current from §4.</a:t>
+            </a:r>
+          </a:p>
+          <a:p>
+            <a:r>
+              <a:t>No-leakage note: Ledgerline is PRACTICE; AT1 assesses the gap-analysis skill on the LMS — comparable,</a:t>
+            </a:r>
+          </a:p>
+          <a:p>
+            <a:r>
+              <a:t>not identical.</a:t>
+            </a:r>
+          </a:p>
+        </p:txBody>
+      </p:sp>
+      <p:sp>
+        <p:nvSpPr>
+          <p:cNvPr id="4" name="Slide Number Placeholder 3"/>
+          <p:cNvSpPr>
+            <a:spLocks noGrp="1"/>
+          </p:cNvSpPr>
+          <p:nvPr>
+            <p:ph type="sldNum" idx="5" sz="quarter"/>
+          </p:nvPr>
+        </p:nvSpPr>
+        <p:spPr/>
+      </p:sp>
+    </p:spTree>
+  </p:cSld>
+  <p:clrMapOvr>
+    <a:masterClrMapping/>
+  </p:clrMapOvr>
+</p:notes>
+</file>
+
+<file path=ppt/notesSlides/notesSlide2.xml><?xml version="1.0" encoding="utf-8"?>
+<p:notes xmlns:a="http://schemas.openxmlformats.org/drawingml/2006/main" xmlns:p="http://schemas.openxmlformats.org/presentationml/2006/main" xmlns:r="http://schemas.openxmlformats.org/officeDocument/2006/relationships">
+  <p:cSld>
+    <p:spTree>
+      <p:nvGrpSpPr>
+        <p:cNvPr id="1" name=""/>
+        <p:cNvGrpSpPr/>
+        <p:nvPr/>
+      </p:nvGrpSpPr>
+      <p:grpSpPr>
+        <a:xfrm>
+          <a:off x="0" y="0"/>
+          <a:ext cx="0" cy="0"/>
+          <a:chOff x="0" y="0"/>
+          <a:chExt cx="0" cy="0"/>
+        </a:xfrm>
+      </p:grpSpPr>
+      <p:sp>
+        <p:nvSpPr>
+          <p:cNvPr id="2" name="Slide Image Placeholder 1"/>
+          <p:cNvSpPr>
+            <a:spLocks noGrp="1"/>
+          </p:cNvSpPr>
+          <p:nvPr>
+            <p:ph type="sldImg" idx="2"/>
+          </p:nvPr>
+        </p:nvSpPr>
+        <p:spPr/>
+      </p:sp>
+      <p:sp>
+        <p:nvSpPr>
+          <p:cNvPr id="3" name="Notes Placeholder 2"/>
+          <p:cNvSpPr>
+            <a:spLocks noGrp="1"/>
+          </p:cNvSpPr>
+          <p:nvPr>
+            <p:ph type="body" idx="3" sz="quarter"/>
+          </p:nvPr>
+        </p:nvSpPr>
+        <p:spPr/>
+        <p:txBody>
+          <a:bodyPr/>
+          <a:lstStyle/>
+          <a:p>
+            <a:r>
+              <a:t>The anchor framing for the Topic — a case for change is an EVIDENCE chain, not a hunch. Teach it</a:t>
+            </a:r>
+          </a:p>
+          <a:p>
+            <a:r>
+              <a:t>deliberately; the three-question order is the skeleton of everything today.</a:t>
+            </a:r>
+          </a:p>
+          <a:p>
+            <a:r>
+              <a:t>• Walk the three questions in order: where does the org want to go (strategy) → where is it now</a:t>
+            </a:r>
+          </a:p>
+          <a:p>
+            <a:r>
+              <a:t>  (current state) → what's missing to get there (gaps). Each answer feeds the next.</a:t>
+            </a:r>
+          </a:p>
+          <a:p>
+            <a:r>
+              <a:t>• Stress the last two bullets: they are NOT choosing a solution yet — they're proving the problem</a:t>
+            </a:r>
+          </a:p>
+          <a:p>
+            <a:r>
+              <a:t>  is real and worth solving. "Diagnose before you prescribe" (the magenta line) is the Topic's motto.</a:t>
+            </a:r>
+          </a:p>
+          <a:p>
+            <a:r>
+              <a:t>Misconception to pre-empt: students treat "the case for change" as arguing FOR cloud. It isn't — it</a:t>
+            </a:r>
+          </a:p>
+          <a:p>
+            <a:r>
+              <a:t>argues the problem exists; the solution could even be "renew on-prem". Keep it solution-neutral.</a:t>
+            </a:r>
+          </a:p>
+          <a:p>
+            <a:r>
+              <a:t>Question to pose: "If a doctor prescribed before diagnosing, what would go wrong — and how is a rushed</a:t>
+            </a:r>
+          </a:p>
+          <a:p>
+            <a:r>
+              <a:t>cloud recommendation the same mistake?"</a:t>
+            </a:r>
+          </a:p>
+          <a:p>
+            <a:r>
+              <a:t>UoC/AT1 tie: PE 1–3 in sequence; this three-part spine maps one-to-one onto AT1 §3 / §4 / §5.</a:t>
+            </a:r>
+          </a:p>
+        </p:txBody>
+      </p:sp>
+      <p:sp>
+        <p:nvSpPr>
+          <p:cNvPr id="4" name="Slide Number Placeholder 3"/>
+          <p:cNvSpPr>
+            <a:spLocks noGrp="1"/>
+          </p:cNvSpPr>
+          <p:nvPr>
+            <p:ph type="sldNum" idx="5" sz="quarter"/>
+          </p:nvPr>
+        </p:nvSpPr>
+        <p:spPr/>
+      </p:sp>
+    </p:spTree>
+  </p:cSld>
+  <p:clrMapOvr>
+    <a:masterClrMapping/>
+  </p:clrMapOvr>
+</p:notes>
+</file>
+
+<file path=ppt/notesSlides/notesSlide3.xml><?xml version="1.0" encoding="utf-8"?>
+<p:notes xmlns:a="http://schemas.openxmlformats.org/drawingml/2006/main" xmlns:p="http://schemas.openxmlformats.org/presentationml/2006/main" xmlns:r="http://schemas.openxmlformats.org/officeDocument/2006/relationships">
+  <p:cSld>
+    <p:spTree>
+      <p:nvGrpSpPr>
+        <p:cNvPr id="1" name=""/>
+        <p:cNvGrpSpPr/>
+        <p:nvPr/>
+      </p:nvGrpSpPr>
+      <p:grpSpPr>
+        <a:xfrm>
+          <a:off x="0" y="0"/>
+          <a:ext cx="0" cy="0"/>
+          <a:chOff x="0" y="0"/>
+          <a:chExt cx="0" cy="0"/>
+        </a:xfrm>
+      </p:grpSpPr>
+      <p:sp>
+        <p:nvSpPr>
+          <p:cNvPr id="2" name="Slide Image Placeholder 1"/>
+          <p:cNvSpPr>
+            <a:spLocks noGrp="1"/>
+          </p:cNvSpPr>
+          <p:nvPr>
+            <p:ph type="sldImg" idx="2"/>
+          </p:nvPr>
+        </p:nvSpPr>
+        <p:spPr/>
+      </p:sp>
+      <p:sp>
+        <p:nvSpPr>
+          <p:cNvPr id="3" name="Notes Placeholder 2"/>
+          <p:cNvSpPr>
+            <a:spLocks noGrp="1"/>
+          </p:cNvSpPr>
+          <p:nvPr>
+            <p:ph type="body" idx="3" sz="quarter"/>
+          </p:nvPr>
+        </p:nvSpPr>
+        <p:spPr/>
+        <p:txBody>
+          <a:bodyPr/>
+          <a:lstStyle/>
+          <a:p>
+            <a:r>
+              <a:t>Open Section 1. Teach WHY the business case leads with strategy — it's what unlocks funding.</a:t>
+            </a:r>
+          </a:p>
+          <a:p>
+            <a:r>
+              <a:t>• First two bullets: a board funds change that moves the organisation toward ITS OWN stated goals;</a:t>
+            </a:r>
+          </a:p>
+          <a:p>
+            <a:r>
+              <a:t>  so you lead by showing the initiative serves the strategy, not technology for its own sake.</a:t>
+            </a:r>
+          </a:p>
+          <a:p>
+            <a:r>
+              <a:t>• Third bullet: define strategic alignment plainly — "here's what they said they want; here's how</a:t>
+            </a:r>
+          </a:p>
+          <a:p>
+            <a:r>
+              <a:t>  this delivers it." It's an argument, not a description.</a:t>
+            </a:r>
+          </a:p>
+          <a:p>
+            <a:r>
+              <a:t>• Fourth bullet (bolded): it's the "why this, why now" that earns everything downstream. If you can't</a:t>
+            </a:r>
+          </a:p>
+          <a:p>
+            <a:r>
+              <a:t>  tie the initiative to a stated goal, the case is already weak.</a:t>
+            </a:r>
+          </a:p>
+          <a:p>
+            <a:r>
+              <a:t>Misconception to pre-empt: "strategic alignment = describe the company." No — it's a targeted argument</a:t>
+            </a:r>
+          </a:p>
+          <a:p>
+            <a:r>
+              <a:t>connecting THIS initiative to a specific organisational objective, with a citation.</a:t>
+            </a:r>
+          </a:p>
+          <a:p>
+            <a:r>
+              <a:t>Question to pose: "YAT's board has limited money — why would 'the servers are old' persuade them less</a:t>
+            </a:r>
+          </a:p>
+          <a:p>
+            <a:r>
+              <a:t>than 'this serves your national-growth goal'?" (funders back strategy, not maintenance).</a:t>
+            </a:r>
+          </a:p>
+          <a:p>
+            <a:r>
+              <a:t>UoC/AT1 tie: PC 1.1 / PE 1 → AT1 §3 Strategic Alignment Analysis (criterion A1).</a:t>
+            </a:r>
+          </a:p>
+        </p:txBody>
+      </p:sp>
+      <p:sp>
+        <p:nvSpPr>
+          <p:cNvPr id="4" name="Slide Number Placeholder 3"/>
+          <p:cNvSpPr>
+            <a:spLocks noGrp="1"/>
+          </p:cNvSpPr>
+          <p:nvPr>
+            <p:ph type="sldNum" idx="5" sz="quarter"/>
+          </p:nvPr>
+        </p:nvSpPr>
+        <p:spPr/>
+      </p:sp>
+    </p:spTree>
+  </p:cSld>
+  <p:clrMapOvr>
+    <a:masterClrMapping/>
+  </p:clrMapOvr>
+</p:notes>
+</file>
+
+<file path=ppt/notesSlides/notesSlide4.xml><?xml version="1.0" encoding="utf-8"?>
+<p:notes xmlns:a="http://schemas.openxmlformats.org/drawingml/2006/main" xmlns:p="http://schemas.openxmlformats.org/presentationml/2006/main" xmlns:r="http://schemas.openxmlformats.org/officeDocument/2006/relationships">
+  <p:cSld>
+    <p:spTree>
+      <p:nvGrpSpPr>
+        <p:cNvPr id="1" name=""/>
+        <p:cNvGrpSpPr/>
+        <p:nvPr/>
+      </p:nvGrpSpPr>
+      <p:grpSpPr>
+        <a:xfrm>
+          <a:off x="0" y="0"/>
+          <a:ext cx="0" cy="0"/>
+          <a:chOff x="0" y="0"/>
+          <a:chExt cx="0" cy="0"/>
+        </a:xfrm>
+      </p:grpSpPr>
+      <p:sp>
+        <p:nvSpPr>
+          <p:cNvPr id="2" name="Slide Image Placeholder 1"/>
+          <p:cNvSpPr>
+            <a:spLocks noGrp="1"/>
+          </p:cNvSpPr>
+          <p:nvPr>
+            <p:ph type="sldImg" idx="2"/>
+          </p:nvPr>
+        </p:nvSpPr>
+        <p:spPr/>
+      </p:sp>
+      <p:sp>
+        <p:nvSpPr>
+          <p:cNvPr id="3" name="Notes Placeholder 2"/>
+          <p:cNvSpPr>
+            <a:spLocks noGrp="1"/>
+          </p:cNvSpPr>
+          <p:nvPr>
+            <p:ph type="body" idx="3" sz="quarter"/>
+          </p:nvPr>
+        </p:nvSpPr>
+        <p:spPr/>
+        <p:txBody>
+          <a:bodyPr/>
+          <a:lstStyle/>
+          <a:p>
+            <a:r>
+              <a:t>The how-to slide for Section 1 — teach students to READ a strategic plan structurally instead of</a:t>
+            </a:r>
+          </a:p>
+          <a:p>
+            <a:r>
+              <a:t>skimming it. The three layers are the examinable technique.</a:t>
+            </a:r>
+          </a:p>
+          <a:p>
+            <a:r>
+              <a:t>• Walk the layers top-down: business objectives (where the whole org is going, e.g. grow students</a:t>
+            </a:r>
+          </a:p>
+          <a:p>
+            <a:r>
+              <a:t>  15%/yr) → ICT goals (how ICT supports that, e.g. reduce in-house dependency, 99.9% for critical</a:t>
+            </a:r>
+          </a:p>
+          <a:p>
+            <a:r>
+              <a:t>  systems) → initiatives (the planned actions, e.g. move suitable systems to cloud).</a:t>
+            </a:r>
+          </a:p>
+          <a:p>
+            <a:r>
+              <a:t>• The payoff (magenta line): trace YOUR initiative UP these layers to a real business objective, and</a:t>
+            </a:r>
+          </a:p>
+          <a:p>
+            <a:r>
+              <a:t>  pull only what's MATERIAL — don't recite the whole plan.</a:t>
+            </a:r>
+          </a:p>
+          <a:p>
+            <a:r>
+              <a:t>Misconception to pre-empt: students copy every objective in the plan. No — most won't be relevant;</a:t>
+            </a:r>
+          </a:p>
+          <a:p>
+            <a:r>
+              <a:t>selecting the material few and tracing them up is the analytical skill being marked.</a:t>
+            </a:r>
+          </a:p>
+          <a:p>
+            <a:r>
+              <a:t>Question to pose: "Migrating Ledgerline — which ICT goal does it serve, and which business objective</a:t>
+            </a:r>
+          </a:p>
+          <a:p>
+            <a:r>
+              <a:t>sits above that goal?" (traces the chain live).</a:t>
+            </a:r>
+          </a:p>
+          <a:p>
+            <a:r>
+              <a:t>UoC/AT1 tie: PC 1.1 / PE 1 → AT1 §3; the "trace up, material only" habit is exactly what A1 rewards.</a:t>
+            </a:r>
+          </a:p>
+        </p:txBody>
+      </p:sp>
+      <p:sp>
+        <p:nvSpPr>
+          <p:cNvPr id="4" name="Slide Number Placeholder 3"/>
+          <p:cNvSpPr>
+            <a:spLocks noGrp="1"/>
+          </p:cNvSpPr>
+          <p:nvPr>
+            <p:ph type="sldNum" idx="5" sz="quarter"/>
+          </p:nvPr>
+        </p:nvSpPr>
+        <p:spPr/>
+      </p:sp>
+    </p:spTree>
+  </p:cSld>
+  <p:clrMapOvr>
+    <a:masterClrMapping/>
+  </p:clrMapOvr>
+</p:notes>
+</file>
+
+<file path=ppt/notesSlides/notesSlide5.xml><?xml version="1.0" encoding="utf-8"?>
+<p:notes xmlns:a="http://schemas.openxmlformats.org/drawingml/2006/main" xmlns:p="http://schemas.openxmlformats.org/presentationml/2006/main" xmlns:r="http://schemas.openxmlformats.org/officeDocument/2006/relationships">
+  <p:cSld>
+    <p:spTree>
+      <p:nvGrpSpPr>
+        <p:cNvPr id="1" name=""/>
+        <p:cNvGrpSpPr/>
+        <p:nvPr/>
+      </p:nvGrpSpPr>
+      <p:grpSpPr>
+        <a:xfrm>
+          <a:off x="0" y="0"/>
+          <a:ext cx="0" cy="0"/>
+          <a:chOff x="0" y="0"/>
+          <a:chExt cx="0" cy="0"/>
+        </a:xfrm>
+      </p:grpSpPr>
+      <p:sp>
+        <p:nvSpPr>
+          <p:cNvPr id="2" name="Slide Image Placeholder 1"/>
+          <p:cNvSpPr>
+            <a:spLocks noGrp="1"/>
+          </p:cNvSpPr>
+          <p:nvPr>
+            <p:ph type="sldImg" idx="2"/>
+          </p:nvPr>
+        </p:nvSpPr>
+        <p:spPr/>
+      </p:sp>
+      <p:sp>
+        <p:nvSpPr>
+          <p:cNvPr id="3" name="Notes Placeholder 2"/>
+          <p:cNvSpPr>
+            <a:spLocks noGrp="1"/>
+          </p:cNvSpPr>
+          <p:nvPr>
+            <p:ph type="body" idx="3" sz="quarter"/>
+          </p:nvPr>
+        </p:nvSpPr>
+        <p:spPr/>
+        <p:txBody>
+          <a:bodyPr/>
+          <a:lstStyle/>
+          <a:p>
+            <a:r>
+              <a:t>Second half of Section 1 — a strategic argument needs the EXTERNAL industry context, not just the</a:t>
+            </a:r>
+          </a:p>
+          <a:p>
+            <a:r>
+              <a:t>client's internal plan.</a:t>
+            </a:r>
+          </a:p>
+          <a:p>
+            <a:r>
+              <a:t>• First bullet: a plan doesn't exist in a vacuum; compare it against where the industry is heading.</a:t>
+            </a:r>
+          </a:p>
+          <a:p>
+            <a:r>
+              <a:t>• Second bullet: name the trends that matter here — cloud adoption, managed services, OPEX over CAPEX,</a:t>
+            </a:r>
+          </a:p>
+          <a:p>
+            <a:r>
+              <a:t>  resilience. These are the yardsticks.</a:t>
+            </a:r>
+          </a:p>
+          <a:p>
+            <a:r>
+              <a:t>• Third/fourth bullets: name BOTH directions — alignment (plan matches industry direction →</a:t>
+            </a:r>
+          </a:p>
+          <a:p>
+            <a:r>
+              <a:t>  strengthens the case) and divergence (plan lags or differs → a risk, or an opportunity to flag).</a:t>
+            </a:r>
+          </a:p>
+          <a:p>
+            <a:r>
+              <a:t>Misconception to pre-empt: "industry context = cheerlead for cloud." No — a balanced analysis names</a:t>
+            </a:r>
+          </a:p>
+          <a:p>
+            <a:r>
+              <a:t>where the client is behind AND where a trend might not fit them; honesty is the mark of analysis.</a:t>
+            </a:r>
+          </a:p>
+          <a:p>
+            <a:r>
+              <a:t>Question to pose: "The sector is moving to managed cloud services — where does that ALIGN with YAT's</a:t>
+            </a:r>
+          </a:p>
+          <a:p>
+            <a:r>
+              <a:t>plan, and is there anywhere it might DIVERGE for a small RTO?"</a:t>
+            </a:r>
+          </a:p>
+          <a:p>
+            <a:r>
+              <a:t>UoC/AT1 tie: KE 4 (current/emerging trends and directions) → AT1 §3; the outside view is what lifts</a:t>
+            </a:r>
+          </a:p>
+          <a:p>
+            <a:r>
+              <a:t>A1 from description to analysis.</a:t>
+            </a:r>
+          </a:p>
+        </p:txBody>
+      </p:sp>
+      <p:sp>
+        <p:nvSpPr>
+          <p:cNvPr id="4" name="Slide Number Placeholder 3"/>
+          <p:cNvSpPr>
+            <a:spLocks noGrp="1"/>
+          </p:cNvSpPr>
+          <p:nvPr>
+            <p:ph type="sldNum" idx="5" sz="quarter"/>
+          </p:nvPr>
+        </p:nvSpPr>
+        <p:spPr/>
+      </p:sp>
+    </p:spTree>
+  </p:cSld>
+  <p:clrMapOvr>
+    <a:masterClrMapping/>
+  </p:clrMapOvr>
+</p:notes>
+</file>
+
+<file path=ppt/notesSlides/notesSlide6.xml><?xml version="1.0" encoding="utf-8"?>
+<p:notes xmlns:a="http://schemas.openxmlformats.org/drawingml/2006/main" xmlns:p="http://schemas.openxmlformats.org/presentationml/2006/main" xmlns:r="http://schemas.openxmlformats.org/officeDocument/2006/relationships">
+  <p:cSld>
+    <p:spTree>
+      <p:nvGrpSpPr>
+        <p:cNvPr id="1" name=""/>
+        <p:cNvGrpSpPr/>
+        <p:nvPr/>
+      </p:nvGrpSpPr>
+      <p:grpSpPr>
+        <a:xfrm>
+          <a:off x="0" y="0"/>
+          <a:ext cx="0" cy="0"/>
+          <a:chOff x="0" y="0"/>
+          <a:chExt cx="0" cy="0"/>
+        </a:xfrm>
+      </p:grpSpPr>
+      <p:sp>
+        <p:nvSpPr>
+          <p:cNvPr id="2" name="Slide Image Placeholder 1"/>
+          <p:cNvSpPr>
+            <a:spLocks noGrp="1"/>
+          </p:cNvSpPr>
+          <p:nvPr>
+            <p:ph type="sldImg" idx="2"/>
+          </p:nvPr>
+        </p:nvSpPr>
+        <p:spPr/>
+      </p:sp>
+      <p:sp>
+        <p:nvSpPr>
+          <p:cNvPr id="3" name="Notes Placeholder 2"/>
+          <p:cNvSpPr>
+            <a:spLocks noGrp="1"/>
+          </p:cNvSpPr>
+          <p:nvPr>
+            <p:ph type="body" idx="3" sz="quarter"/>
+          </p:nvPr>
+        </p:nvSpPr>
+        <p:spPr/>
+        <p:txBody>
+          <a:bodyPr/>
+          <a:lstStyle/>
+          <a:p>
+            <a:r>
+              <a:t>The quality checklist for Section 1 — read it as the marker's-eye view of a strong §3, right before</a:t>
+            </a:r>
+          </a:p>
+          <a:p>
+            <a:r>
+              <a:t>they attempt it. Keep it short; it's a rubric, not new content.</a:t>
+            </a:r>
+          </a:p>
+          <a:p>
+            <a:r>
+              <a:t>• Every claim CITED to the plan (e.g. "ICT Strategic Plan — ICT Goals") — no unsourced assertions.</a:t>
+            </a:r>
+          </a:p>
+          <a:p>
+            <a:r>
+              <a:t>• MATERIAL items only — not the whole plan recited.</a:t>
+            </a:r>
+          </a:p>
+          <a:p>
+            <a:r>
+              <a:t>• TRACES the initiative up to a real organisational goal (the three-layer move).</a:t>
+            </a:r>
+          </a:p>
+          <a:p>
+            <a:r>
+              <a:t>• ALIGNMENT AND DIVERGENCE both named (magenta line) — balanced, not cheerleading.</a:t>
+            </a:r>
+          </a:p>
+          <a:p>
+            <a:r>
+              <a:t>Misconception to pre-empt: "more is better." No — a padded §3 that recites the plan scores worse than</a:t>
+            </a:r>
+          </a:p>
+          <a:p>
+            <a:r>
+              <a:t>a tight one that cites four material objectives and traces them.</a:t>
+            </a:r>
+          </a:p>
+          <a:p>
+            <a:r>
+              <a:t>Question to pose: "If I marked your §3, what's the single fastest way to lose marks?" (uncited claims /</a:t>
+            </a:r>
+          </a:p>
+          <a:p>
+            <a:r>
+              <a:t>reciting everything / no divergence named).</a:t>
+            </a:r>
+          </a:p>
+          <a:p>
+            <a:r>
+              <a:t>UoC/AT1 tie: this is the A1 acceptance standard for AT1 §3 — hand them the bar before the activity.</a:t>
+            </a:r>
+          </a:p>
+        </p:txBody>
+      </p:sp>
+      <p:sp>
+        <p:nvSpPr>
+          <p:cNvPr id="4" name="Slide Number Placeholder 3"/>
+          <p:cNvSpPr>
+            <a:spLocks noGrp="1"/>
+          </p:cNvSpPr>
+          <p:nvPr>
+            <p:ph type="sldNum" idx="5" sz="quarter"/>
+          </p:nvPr>
+        </p:nvSpPr>
+        <p:spPr/>
+      </p:sp>
+    </p:spTree>
+  </p:cSld>
+  <p:clrMapOvr>
+    <a:masterClrMapping/>
+  </p:clrMapOvr>
+</p:notes>
+</file>
+
+<file path=ppt/notesSlides/notesSlide7.xml><?xml version="1.0" encoding="utf-8"?>
+<p:notes xmlns:a="http://schemas.openxmlformats.org/drawingml/2006/main" xmlns:p="http://schemas.openxmlformats.org/presentationml/2006/main" xmlns:r="http://schemas.openxmlformats.org/officeDocument/2006/relationships">
+  <p:cSld>
+    <p:spTree>
+      <p:nvGrpSpPr>
+        <p:cNvPr id="1" name=""/>
+        <p:cNvGrpSpPr/>
+        <p:nvPr/>
+      </p:nvGrpSpPr>
+      <p:grpSpPr>
+        <a:xfrm>
+          <a:off x="0" y="0"/>
+          <a:ext cx="0" cy="0"/>
+          <a:chOff x="0" y="0"/>
+          <a:chExt cx="0" cy="0"/>
+        </a:xfrm>
+      </p:grpSpPr>
+      <p:sp>
+        <p:nvSpPr>
+          <p:cNvPr id="2" name="Slide Image Placeholder 1"/>
+          <p:cNvSpPr>
+            <a:spLocks noGrp="1"/>
+          </p:cNvSpPr>
+          <p:nvPr>
+            <p:ph type="sldImg" idx="2"/>
+          </p:nvPr>
+        </p:nvSpPr>
+        <p:spPr/>
+      </p:sp>
+      <p:sp>
+        <p:nvSpPr>
+          <p:cNvPr id="3" name="Notes Placeholder 2"/>
+          <p:cNvSpPr>
+            <a:spLocks noGrp="1"/>
+          </p:cNvSpPr>
+          <p:nvPr>
+            <p:ph type="body" idx="3" sz="quarter"/>
+          </p:nvPr>
+        </p:nvSpPr>
+        <p:spPr/>
+        <p:txBody>
+          <a:bodyPr/>
+          <a:lstStyle/>
+          <a:p>
+            <a:r>
+              <a:t>Facilitation — the Section 1 practice; students draft §3 of the PRACTICE business case (Ledgerline).</a:t>
+            </a:r>
+          </a:p>
+          <a:p>
+            <a:r>
+              <a:t>This mirrors AT1 §3 against a different system.</a:t>
+            </a:r>
+          </a:p>
+          <a:p>
+            <a:r>
+              <a:t>Tell students: "In your working copy of the Business Case, write the Strategic Alignment section for</a:t>
+            </a:r>
+          </a:p>
+          <a:p>
+            <a:r>
+              <a:t>moving YAT's Accounting System (Ledgerline) to the cloud. Argue it — don't just describe."</a:t>
+            </a:r>
+          </a:p>
+          <a:p>
+            <a:r>
+              <a:t>Steps (put on the board):</a:t>
+            </a:r>
+          </a:p>
+          <a:p>
+            <a:r>
+              <a:t>1. Read YAT's ICT Strategic Plan on the scenario intranet.</a:t>
+            </a:r>
+          </a:p>
+          <a:p>
+            <a:r>
+              <a:t>2. Which ICT goals/objectives does this migration serve? Trace up to a business objective — CITE them.</a:t>
+            </a:r>
+          </a:p>
+          <a:p>
+            <a:r>
+              <a:t>3. Add one or two points of industry context — where's the sector heading?</a:t>
+            </a:r>
+          </a:p>
+          <a:p>
+            <a:r>
+              <a:t>4. Note both alignment and divergence honestly.</a:t>
+            </a:r>
+          </a:p>
+          <a:p>
+            <a:r>
+              <a:t>Must produce: ~half a page — a cited strategic-alignment argument, traced up the three layers, with</a:t>
+            </a:r>
+          </a:p>
+          <a:p>
+            <a:r>
+              <a:t>alignment AND divergence named.</a:t>
+            </a:r>
+          </a:p>
+          <a:p>
+            <a:r>
+              <a:t>Timing: ~20 min then discuss. Where they get stuck: they DESCRIBE YAT instead of ARGUING alignment —</a:t>
+            </a:r>
+          </a:p>
+          <a:p>
+            <a:r>
+              <a:t>circulate and push them to answer "which goal does this serve?"; also watch for uncited claims.</a:t>
+            </a:r>
+          </a:p>
+          <a:p>
+            <a:r>
+              <a:t>Share-back prompt: take two answers and ask the room which one traces to a real business objective.</a:t>
+            </a:r>
+          </a:p>
+          <a:p>
+            <a:r>
+              <a:t>No-leakage note: Ledgerline is the PRACTICE client — AT1 assesses the SAME skill on the LMS</a:t>
+            </a:r>
+          </a:p>
+          <a:p>
+            <a:r>
+              <a:t>(comparable, not identical); keep them on the scenario plan here.</a:t>
+            </a:r>
+          </a:p>
+        </p:txBody>
+      </p:sp>
+      <p:sp>
+        <p:nvSpPr>
+          <p:cNvPr id="4" name="Slide Number Placeholder 3"/>
+          <p:cNvSpPr>
+            <a:spLocks noGrp="1"/>
+          </p:cNvSpPr>
+          <p:nvPr>
+            <p:ph type="sldNum" idx="5" sz="quarter"/>
+          </p:nvPr>
+        </p:nvSpPr>
+        <p:spPr/>
+      </p:sp>
+    </p:spTree>
+  </p:cSld>
+  <p:clrMapOvr>
+    <a:masterClrMapping/>
+  </p:clrMapOvr>
+</p:notes>
+</file>
+
+<file path=ppt/notesSlides/notesSlide8.xml><?xml version="1.0" encoding="utf-8"?>
+<p:notes xmlns:a="http://schemas.openxmlformats.org/drawingml/2006/main" xmlns:p="http://schemas.openxmlformats.org/presentationml/2006/main" xmlns:r="http://schemas.openxmlformats.org/officeDocument/2006/relationships">
+  <p:cSld>
+    <p:spTree>
+      <p:nvGrpSpPr>
+        <p:cNvPr id="1" name=""/>
+        <p:cNvGrpSpPr/>
+        <p:nvPr/>
+      </p:nvGrpSpPr>
+      <p:grpSpPr>
+        <a:xfrm>
+          <a:off x="0" y="0"/>
+          <a:ext cx="0" cy="0"/>
+          <a:chOff x="0" y="0"/>
+          <a:chExt cx="0" cy="0"/>
+        </a:xfrm>
+      </p:grpSpPr>
+      <p:sp>
+        <p:nvSpPr>
+          <p:cNvPr id="2" name="Slide Image Placeholder 1"/>
+          <p:cNvSpPr>
+            <a:spLocks noGrp="1"/>
+          </p:cNvSpPr>
+          <p:nvPr>
+            <p:ph type="sldImg" idx="2"/>
+          </p:nvPr>
+        </p:nvSpPr>
+        <p:spPr/>
+      </p:sp>
+      <p:sp>
+        <p:nvSpPr>
+          <p:cNvPr id="3" name="Notes Placeholder 2"/>
+          <p:cNvSpPr>
+            <a:spLocks noGrp="1"/>
+          </p:cNvSpPr>
+          <p:nvPr>
+            <p:ph type="body" idx="3" sz="quarter"/>
+          </p:nvPr>
+        </p:nvSpPr>
+        <p:spPr/>
+        <p:txBody>
+          <a:bodyPr/>
+          <a:lstStyle/>
+          <a:p>
+            <a:r>
+              <a:t>Open Section 2 with its single governing idea — current state is SYNTHESIS, not a copy-paste of the</a:t>
+            </a:r>
+          </a:p>
+          <a:p>
+            <a:r>
+              <a:t>IT docs. This is the one thing students most often get wrong.</a:t>
+            </a:r>
+          </a:p>
+          <a:p>
+            <a:r>
+              <a:t>• First bullet: summarise the current environment IN YOUR OWN WORDS, focused on what's material to</a:t>
+            </a:r>
+          </a:p>
+          <a:p>
+            <a:r>
+              <a:t>  THIS decision.</a:t>
+            </a:r>
+          </a:p>
+          <a:p>
+            <a:r>
+              <a:t>• Second bullet: the board needs the picture that explains why change is needed — not a reproduction</a:t>
+            </a:r>
+          </a:p>
+          <a:p>
+            <a:r>
+              <a:t>  of the source documents.</a:t>
+            </a:r>
+          </a:p>
+          <a:p>
+            <a:r>
+              <a:t>• Third bullet (bolded): distil it down; don't transcribe it. Say the word "distil" out loud — it's</a:t>
+            </a:r>
+          </a:p>
+          <a:p>
+            <a:r>
+              <a:t>  the verb for the whole section.</a:t>
+            </a:r>
+          </a:p>
+          <a:p>
+            <a:r>
+              <a:t>Misconception to pre-empt: "thorough = paste everything in." No — a wall of copied specs is a FAIL of</a:t>
+            </a:r>
+          </a:p>
+          <a:p>
+            <a:r>
+              <a:t>synthesis; the skill is choosing and re-stating the material few in plain language.</a:t>
+            </a:r>
+          </a:p>
+          <a:p>
+            <a:r>
+              <a:t>Question to pose: "If the board can already read the IT docs, what's YOUR value in the current-state</a:t>
+            </a:r>
+          </a:p>
+          <a:p>
+            <a:r>
+              <a:t>section?" (you distil and interpret — you make it decision-relevant).</a:t>
+            </a:r>
+          </a:p>
+          <a:p>
+            <a:r>
+              <a:t>UoC/AT1 tie: PC 1.2 / PE 2 → AT1 §4 Current State (criterion A2); "own words, material only" is A2.</a:t>
+            </a:r>
+          </a:p>
+        </p:txBody>
+      </p:sp>
+      <p:sp>
+        <p:nvSpPr>
+          <p:cNvPr id="4" name="Slide Number Placeholder 3"/>
+          <p:cNvSpPr>
+            <a:spLocks noGrp="1"/>
+          </p:cNvSpPr>
+          <p:nvPr>
+            <p:ph type="sldNum" idx="5" sz="quarter"/>
+          </p:nvPr>
+        </p:nvSpPr>
+        <p:spPr/>
+      </p:sp>
+    </p:spTree>
+  </p:cSld>
+  <p:clrMapOvr>
+    <a:masterClrMapping/>
+  </p:clrMapOvr>
+</p:notes>
+</file>
+
+<file path=ppt/notesSlides/notesSlide9.xml><?xml version="1.0" encoding="utf-8"?>
+<p:notes xmlns:a="http://schemas.openxmlformats.org/drawingml/2006/main" xmlns:p="http://schemas.openxmlformats.org/presentationml/2006/main" xmlns:r="http://schemas.openxmlformats.org/officeDocument/2006/relationships">
+  <p:cSld>
+    <p:spTree>
+      <p:nvGrpSpPr>
+        <p:cNvPr id="1" name=""/>
+        <p:cNvGrpSpPr/>
+        <p:nvPr/>
+      </p:nvGrpSpPr>
+      <p:grpSpPr>
+        <a:xfrm>
+          <a:off x="0" y="0"/>
+          <a:ext cx="0" cy="0"/>
+          <a:chOff x="0" y="0"/>
+          <a:chExt cx="0" cy="0"/>
+        </a:xfrm>
+      </p:grpSpPr>
+      <p:sp>
+        <p:nvSpPr>
+          <p:cNvPr id="2" name="Slide Image Placeholder 1"/>
+          <p:cNvSpPr>
+            <a:spLocks noGrp="1"/>
+          </p:cNvSpPr>
+          <p:nvPr>
+            <p:ph type="sldImg" idx="2"/>
+          </p:nvPr>
+        </p:nvSpPr>
+        <p:spPr/>
+      </p:sp>
+      <p:sp>
+        <p:nvSpPr>
+          <p:cNvPr id="3" name="Notes Placeholder 2"/>
+          <p:cNvSpPr>
+            <a:spLocks noGrp="1"/>
+          </p:cNvSpPr>
+          <p:nvPr>
+            <p:ph type="body" idx="3" sz="quarter"/>
+          </p:nvPr>
+        </p:nvSpPr>
+        <p:spPr/>
+        <p:txBody>
+          <a:bodyPr/>
+          <a:lstStyle/>
+          <a:p>
+            <a:r>
+              <a:t>The how-to for Section 2 — teach the KEEP/DROP filter that separates material facts from noise.</a:t>
+            </a:r>
+          </a:p>
+          <a:p>
+            <a:r>
+              <a:t>• KEEP (if it bears on the decision): platform &amp; stack, age/condition/capacity, availability today,</a:t>
+            </a:r>
+          </a:p>
+          <a:p>
+            <a:r>
+              <a:t>  dependencies &amp; integrations, constraints, pain points. Read the list as "things that could change</a:t>
+            </a:r>
+          </a:p>
+          <a:p>
+            <a:r>
+              <a:t>  the renew-vs-migrate call".</a:t>
+            </a:r>
+          </a:p>
+          <a:p>
+            <a:r>
+              <a:t>• DROP: detail that doesn't move the decision — printer counts, unrelated systems.</a:t>
+            </a:r>
+          </a:p>
+          <a:p>
+            <a:r>
+              <a:t>• The sky-accent line: a good current state QUIETLY SURFACES the limitations that motivate the change</a:t>
+            </a:r>
+          </a:p>
+          <a:p>
+            <a:r>
+              <a:t>  — it sets up the gap analysis without shouting.</a:t>
+            </a:r>
+          </a:p>
+          <a:p>
+            <a:r>
+              <a:t>Misconception to pre-empt: "keep vs drop is about importance." No — it's about RELEVANCE TO THIS</a:t>
+            </a:r>
+          </a:p>
+          <a:p>
+            <a:r>
+              <a:t>DECISION; a fact can be true and important yet irrelevant to renew-vs-migrate, so it goes.</a:t>
+            </a:r>
+          </a:p>
+          <a:p>
+            <a:r>
+              <a:t>Question to pose: "The Ledgerline server is 6 years old and there are 12 office printers — which fact</a:t>
+            </a:r>
+          </a:p>
+          <a:p>
+            <a:r>
+              <a:t>do you keep, and why?" (age bears on renew-vs-migrate; printers don't).</a:t>
+            </a:r>
+          </a:p>
+          <a:p>
+            <a:r>
+              <a:t>UoC/AT1 tie: PC 1.2 / PE 2 → AT1 §4; the filter is how A2 stays material rather than a data dump.</a:t>
+            </a:r>
+          </a:p>
+        </p:txBody>
+      </p:sp>
+      <p:sp>
+        <p:nvSpPr>
+          <p:cNvPr id="4" name="Slide Number Placeholder 3"/>
+          <p:cNvSpPr>
+            <a:spLocks noGrp="1"/>
+          </p:cNvSpPr>
+          <p:nvPr>
+            <p:ph type="sldNum" idx="5" sz="quarter"/>
+          </p:nvPr>
+        </p:nvSpPr>
+        <p:spPr/>
+      </p:sp>
+    </p:spTree>
+  </p:cSld>
+  <p:clrMapOvr>
+    <a:masterClrMapping/>
+  </p:clrMapOvr>
+</p:notes>
 </file>
 
 <file path=ppt/slideLayouts/slideLayout1.xml><?xml version="1.0" encoding="utf-8"?>
@@ -13694,4 +15769,324 @@
   </a:objectDefaults>
   <a:extraClrSchemeLst/>
 </a:theme>
+</file>
+
+<file path=ppt/theme/theme2.xml><?xml version="1.0" encoding="utf-8"?>
+<a:theme xmlns:a="http://schemas.openxmlformats.org/drawingml/2006/main" name="Office Theme">
+  <a:themeElements>
+    <a:clrScheme name="Office">
+      <a:dk1>
+        <a:sysClr val="windowText" lastClr="000000"/>
+      </a:dk1>
+      <a:lt1>
+        <a:sysClr val="window" lastClr="FFFFFF"/>
+      </a:lt1>
+      <a:dk2>
+        <a:srgbClr val="1F497D"/>
+      </a:dk2>
+      <a:lt2>
+        <a:srgbClr val="EEECE1"/>
+      </a:lt2>
+      <a:accent1>
+        <a:srgbClr val="4F81BD"/>
+      </a:accent1>
+      <a:accent2>
+        <a:srgbClr val="C0504D"/>
+      </a:accent2>
+      <a:accent3>
+        <a:srgbClr val="9BBB59"/>
+      </a:accent3>
+      <a:accent4>
+        <a:srgbClr val="8064A2"/>
+      </a:accent4>
+      <a:accent5>
+        <a:srgbClr val="4BACC6"/>
+      </a:accent5>
+      <a:accent6>
+        <a:srgbClr val="F79646"/>
+      </a:accent6>
+      <a:hlink>
+        <a:srgbClr val="0000FF"/>
+      </a:hlink>
+      <a:folHlink>
+        <a:srgbClr val="800080"/>
+      </a:folHlink>
+    </a:clrScheme>
+    <a:fontScheme name="Office">
+      <a:majorFont>
+        <a:latin typeface="Calibri"/>
+        <a:ea typeface=""/>
+        <a:cs typeface=""/>
+        <a:font script="Jpan" typeface="ＭＳ Ｐゴシック"/>
+        <a:font script="Hang" typeface="맑은 고딕"/>
+        <a:font script="Hans" typeface="宋体"/>
+        <a:font script="Hant" typeface="新細明體"/>
+        <a:font script="Arab" typeface="Times New Roman"/>
+        <a:font script="Hebr" typeface="Times New Roman"/>
+        <a:font script="Thai" typeface="Angsana New"/>
+        <a:font script="Ethi" typeface="Nyala"/>
+        <a:font script="Beng" typeface="Vrinda"/>
+        <a:font script="Gujr" typeface="Shruti"/>
+        <a:font script="Khmr" typeface="MoolBoran"/>
+        <a:font script="Knda" typeface="Tunga"/>
+        <a:font script="Guru" typeface="Raavi"/>
+        <a:font script="Cans" typeface="Euphemia"/>
+        <a:font script="Cher" typeface="Plantagenet Cherokee"/>
+        <a:font script="Yiii" typeface="Microsoft Yi Baiti"/>
+        <a:font script="Tibt" typeface="Microsoft Himalaya"/>
+        <a:font script="Thaa" typeface="MV Boli"/>
+        <a:font script="Deva" typeface="Mangal"/>
+        <a:font script="Telu" typeface="Gautami"/>
+        <a:font script="Taml" typeface="Latha"/>
+        <a:font script="Syrc" typeface="Estrangelo Edessa"/>
+        <a:font script="Orya" typeface="Kalinga"/>
+        <a:font script="Mlym" typeface="Kartika"/>
+        <a:font script="Laoo" typeface="DokChampa"/>
+        <a:font script="Sinh" typeface="Iskoola Pota"/>
+        <a:font script="Mong" typeface="Mongolian Baiti"/>
+        <a:font script="Viet" typeface="Times New Roman"/>
+        <a:font script="Uigh" typeface="Microsoft Uighur"/>
+        <a:font script="Geor" typeface="Sylfaen"/>
+      </a:majorFont>
+      <a:minorFont>
+        <a:latin typeface="Calibri"/>
+        <a:ea typeface=""/>
+        <a:cs typeface=""/>
+        <a:font script="Jpan" typeface="ＭＳ Ｐゴシック"/>
+        <a:font script="Hang" typeface="맑은 고딕"/>
+        <a:font script="Hans" typeface="宋体"/>
+        <a:font script="Hant" typeface="新細明體"/>
+        <a:font script="Arab" typeface="Arial"/>
+        <a:font script="Hebr" typeface="Arial"/>
+        <a:font script="Thai" typeface="Cordia New"/>
+        <a:font script="Ethi" typeface="Nyala"/>
+        <a:font script="Beng" typeface="Vrinda"/>
+        <a:font script="Gujr" typeface="Shruti"/>
+        <a:font script="Khmr" typeface="DaunPenh"/>
+        <a:font script="Knda" typeface="Tunga"/>
+        <a:font script="Guru" typeface="Raavi"/>
+        <a:font script="Cans" typeface="Euphemia"/>
+        <a:font script="Cher" typeface="Plantagenet Cherokee"/>
+        <a:font script="Yiii" typeface="Microsoft Yi Baiti"/>
+        <a:font script="Tibt" typeface="Microsoft Himalaya"/>
+        <a:font script="Thaa" typeface="MV Boli"/>
+        <a:font script="Deva" typeface="Mangal"/>
+        <a:font script="Telu" typeface="Gautami"/>
+        <a:font script="Taml" typeface="Latha"/>
+        <a:font script="Syrc" typeface="Estrangelo Edessa"/>
+        <a:font script="Orya" typeface="Kalinga"/>
+        <a:font script="Mlym" typeface="Kartika"/>
+        <a:font script="Laoo" typeface="DokChampa"/>
+        <a:font script="Sinh" typeface="Iskoola Pota"/>
+        <a:font script="Mong" typeface="Mongolian Baiti"/>
+        <a:font script="Viet" typeface="Arial"/>
+        <a:font script="Uigh" typeface="Microsoft Uighur"/>
+        <a:font script="Geor" typeface="Sylfaen"/>
+      </a:minorFont>
+    </a:fontScheme>
+    <a:fmtScheme name="Office">
+      <a:fillStyleLst>
+        <a:solidFill>
+          <a:schemeClr val="phClr"/>
+        </a:solidFill>
+        <a:gradFill rotWithShape="1">
+          <a:gsLst>
+            <a:gs pos="0">
+              <a:schemeClr val="phClr">
+                <a:tint val="50000"/>
+                <a:satMod val="300000"/>
+              </a:schemeClr>
+            </a:gs>
+            <a:gs pos="35000">
+              <a:schemeClr val="phClr">
+                <a:tint val="37000"/>
+                <a:satMod val="300000"/>
+              </a:schemeClr>
+            </a:gs>
+            <a:gs pos="100000">
+              <a:schemeClr val="phClr">
+                <a:tint val="15000"/>
+                <a:satMod val="350000"/>
+              </a:schemeClr>
+            </a:gs>
+          </a:gsLst>
+          <a:lin ang="16200000" scaled="1"/>
+        </a:gradFill>
+        <a:gradFill rotWithShape="1">
+          <a:gsLst>
+            <a:gs pos="0">
+              <a:schemeClr val="phClr">
+                <a:tint val="100000"/>
+                <a:shade val="100000"/>
+                <a:satMod val="130000"/>
+              </a:schemeClr>
+            </a:gs>
+            <a:gs pos="100000">
+              <a:schemeClr val="phClr">
+                <a:tint val="50000"/>
+                <a:shade val="100000"/>
+                <a:satMod val="350000"/>
+              </a:schemeClr>
+            </a:gs>
+          </a:gsLst>
+          <a:lin ang="16200000" scaled="0"/>
+        </a:gradFill>
+      </a:fillStyleLst>
+      <a:lnStyleLst>
+        <a:ln w="9525" cap="flat" cmpd="sng" algn="ctr">
+          <a:solidFill>
+            <a:schemeClr val="phClr">
+              <a:shade val="95000"/>
+              <a:satMod val="105000"/>
+            </a:schemeClr>
+          </a:solidFill>
+          <a:prstDash val="solid"/>
+        </a:ln>
+        <a:ln w="25400" cap="flat" cmpd="sng" algn="ctr">
+          <a:solidFill>
+            <a:schemeClr val="phClr"/>
+          </a:solidFill>
+          <a:prstDash val="solid"/>
+        </a:ln>
+        <a:ln w="38100" cap="flat" cmpd="sng" algn="ctr">
+          <a:solidFill>
+            <a:schemeClr val="phClr"/>
+          </a:solidFill>
+          <a:prstDash val="solid"/>
+        </a:ln>
+      </a:lnStyleLst>
+      <a:effectStyleLst>
+        <a:effectStyle>
+          <a:effectLst>
+            <a:outerShdw blurRad="40000" dist="20000" dir="5400000" rotWithShape="0">
+              <a:srgbClr val="000000">
+                <a:alpha val="38000"/>
+              </a:srgbClr>
+            </a:outerShdw>
+          </a:effectLst>
+        </a:effectStyle>
+        <a:effectStyle>
+          <a:effectLst>
+            <a:outerShdw blurRad="40000" dist="23000" dir="5400000" rotWithShape="0">
+              <a:srgbClr val="000000">
+                <a:alpha val="35000"/>
+              </a:srgbClr>
+            </a:outerShdw>
+          </a:effectLst>
+        </a:effectStyle>
+        <a:effectStyle>
+          <a:effectLst>
+            <a:outerShdw blurRad="40000" dist="23000" dir="5400000" rotWithShape="0">
+              <a:srgbClr val="000000">
+                <a:alpha val="35000"/>
+              </a:srgbClr>
+            </a:outerShdw>
+          </a:effectLst>
+          <a:scene3d>
+            <a:camera prst="orthographicFront">
+              <a:rot lat="0" lon="0" rev="0"/>
+            </a:camera>
+            <a:lightRig rig="threePt" dir="t">
+              <a:rot lat="0" lon="0" rev="1200000"/>
+            </a:lightRig>
+          </a:scene3d>
+          <a:sp3d>
+            <a:bevelT w="63500" h="25400"/>
+          </a:sp3d>
+        </a:effectStyle>
+      </a:effectStyleLst>
+      <a:bgFillStyleLst>
+        <a:solidFill>
+          <a:schemeClr val="phClr"/>
+        </a:solidFill>
+        <a:gradFill rotWithShape="1">
+          <a:gsLst>
+            <a:gs pos="0">
+              <a:schemeClr val="phClr">
+                <a:tint val="40000"/>
+                <a:satMod val="350000"/>
+              </a:schemeClr>
+            </a:gs>
+            <a:gs pos="40000">
+              <a:schemeClr val="phClr">
+                <a:tint val="45000"/>
+                <a:shade val="99000"/>
+                <a:satMod val="350000"/>
+              </a:schemeClr>
+            </a:gs>
+            <a:gs pos="100000">
+              <a:schemeClr val="phClr">
+                <a:shade val="20000"/>
+                <a:satMod val="255000"/>
+              </a:schemeClr>
+            </a:gs>
+          </a:gsLst>
+          <a:path path="circle">
+            <a:fillToRect l="50000" t="-80000" r="50000" b="180000"/>
+          </a:path>
+        </a:gradFill>
+        <a:gradFill rotWithShape="1">
+          <a:gsLst>
+            <a:gs pos="0">
+              <a:schemeClr val="phClr">
+                <a:tint val="80000"/>
+                <a:satMod val="300000"/>
+              </a:schemeClr>
+            </a:gs>
+            <a:gs pos="100000">
+              <a:schemeClr val="phClr">
+                <a:shade val="30000"/>
+                <a:satMod val="200000"/>
+              </a:schemeClr>
+            </a:gs>
+          </a:gsLst>
+          <a:path path="circle">
+            <a:fillToRect l="50000" t="50000" r="50000" b="50000"/>
+          </a:path>
+        </a:gradFill>
+      </a:bgFillStyleLst>
+    </a:fmtScheme>
+  </a:themeElements>
+  <a:objectDefaults>
+    <a:spDef>
+      <a:spPr/>
+      <a:bodyPr/>
+      <a:lstStyle/>
+      <a:style>
+        <a:lnRef idx="1">
+          <a:schemeClr val="accent1"/>
+        </a:lnRef>
+        <a:fillRef idx="3">
+          <a:schemeClr val="accent1"/>
+        </a:fillRef>
+        <a:effectRef idx="2">
+          <a:schemeClr val="accent1"/>
+        </a:effectRef>
+        <a:fontRef idx="minor">
+          <a:schemeClr val="lt1"/>
+        </a:fontRef>
+      </a:style>
+    </a:spDef>
+    <a:lnDef>
+      <a:spPr/>
+      <a:bodyPr/>
+      <a:lstStyle/>
+      <a:style>
+        <a:lnRef idx="2">
+          <a:schemeClr val="accent1"/>
+        </a:lnRef>
+        <a:fillRef idx="0">
+          <a:schemeClr val="accent1"/>
+        </a:fillRef>
+        <a:effectRef idx="1">
+          <a:schemeClr val="accent1"/>
+        </a:effectRef>
+        <a:fontRef idx="minor">
+          <a:schemeClr val="tx1"/>
+        </a:fontRef>
+      </a:style>
+    </a:lnDef>
+  </a:objectDefaults>
+  <a:extraClrSchemeLst/>
+</a:theme>
 </file>
--- a/S1-CL1-Cloud-Design-Build/delivery/topic_02/Topic_02_Slides.pptx
+++ b/S1-CL1-Cloud-Design-Build/delivery/topic_02/Topic_02_Slides.pptx
@@ -539,7 +539,7 @@
           </a:p>
           <a:p>
             <a:r>
-              <a:t>  organisation is, where it needs to be, and the gap between. No solutions yet.</a:t>
+              <a:t>organisation is, where it needs to be, and the gap between. No solutions yet.</a:t>
             </a:r>
           </a:p>
           <a:p>
@@ -549,7 +549,7 @@
           </a:p>
           <a:p>
             <a:r>
-              <a:t>  you plot a route.</a:t>
+              <a:t>you plot a route.</a:t>
             </a:r>
           </a:p>
           <a:p>
@@ -559,7 +559,7 @@
           </a:p>
           <a:p>
             <a:r>
-              <a:t>  the gaps. Say them in that order; each depends on the one before.</a:t>
+              <a:t>the gaps. Say them in that order; each depends on the one before.</a:t>
             </a:r>
           </a:p>
           <a:p>
@@ -569,7 +569,7 @@
           </a:p>
           <a:p>
             <a:r>
-              <a:t>  they build today is directly the front half of the AT1 deliverable.</a:t>
+              <a:t>they build today is directly the front half of the AT1 deliverable.</a:t>
             </a:r>
           </a:p>
           <a:p>
@@ -684,7 +684,7 @@
           </a:p>
           <a:p>
             <a:r>
-              <a:t>  the relevance filter applied).</a:t>
+              <a:t>the relevance filter applied).</a:t>
             </a:r>
           </a:p>
           <a:p>
@@ -694,7 +694,7 @@
           </a:p>
           <a:p>
             <a:r>
-              <a:t>  condition-risk. Grouping is what makes it read as synthesis, not a list.</a:t>
+              <a:t>condition-risk. Grouping is what makes it read as synthesis, not a list.</a:t>
             </a:r>
           </a:p>
           <a:p>
@@ -824,7 +824,7 @@
           </a:p>
           <a:p>
             <a:r>
-              <a:t>   Overview, and the consultation notes on the scenario intranet.</a:t>
+              <a:t>Overview, and the consultation notes on the scenario intranet.</a:t>
             </a:r>
           </a:p>
           <a:p>
@@ -834,7 +834,7 @@
           </a:p>
           <a:p>
             <a:r>
-              <a:t>   fee-status, payroll, banking) · condition &amp; constraints.</a:t>
+              <a:t>fee-status, payroll, banking) · condition &amp; constraints.</a:t>
             </a:r>
           </a:p>
           <a:p>
@@ -959,7 +959,7 @@
           </a:p>
           <a:p>
             <a:r>
-              <a:t>  current state) — it literally joins §3 to §4.</a:t>
+              <a:t>current state) — it literally joins §3 to §4.</a:t>
             </a:r>
           </a:p>
           <a:p>
@@ -969,7 +969,7 @@
           </a:p>
           <a:p>
             <a:r>
-              <a:t>  list of changes to evaluate (the seed of Topic 3's options).</a:t>
+              <a:t>list of changes to evaluate (the seed of Topic 3's options).</a:t>
             </a:r>
           </a:p>
           <a:p>
@@ -1104,17 +1104,17 @@
           </a:p>
           <a:p>
             <a:r>
-              <a:t>   in-house infrastructure dependency (ageing server); business-hours availability &gt;=99.5% (RPO &lt;=1h /</a:t>
-            </a:r>
-          </a:p>
-          <a:p>
-            <a:r>
-              <a:t>   RTO &lt;=1 business day); keep financial data onshore + 7-year retention; size for month-end / EOFY</a:t>
-            </a:r>
-          </a:p>
-          <a:p>
-            <a:r>
-              <a:t>   peaks without year-round over-provisioning.</a:t>
+              <a:t>in-house infrastructure dependency (ageing server); business-hours availability &gt;=99.5% (RPO &lt;=1h /</a:t>
+            </a:r>
+          </a:p>
+          <a:p>
+            <a:r>
+              <a:t>RTO &lt;=1 business day); keep financial data onshore + 7-year retention; size for month-end / EOFY</a:t>
+            </a:r>
+          </a:p>
+          <a:p>
+            <a:r>
+              <a:t>peaks without year-round over-provisioning.</a:t>
             </a:r>
           </a:p>
           <a:p>
@@ -1244,7 +1244,7 @@
           </a:p>
           <a:p>
             <a:r>
-              <a:t>  (current state) → what's missing to get there (gaps). Each answer feeds the next.</a:t>
+              <a:t>(current state) → what's missing to get there (gaps). Each answer feeds the next.</a:t>
             </a:r>
           </a:p>
           <a:p>
@@ -1254,7 +1254,7 @@
           </a:p>
           <a:p>
             <a:r>
-              <a:t>  is real and worth solving. "Diagnose before you prescribe" (the magenta line) is the Topic's motto.</a:t>
+              <a:t>is real and worth solving. "Diagnose before you prescribe" (the magenta line) is the Topic's motto.</a:t>
             </a:r>
           </a:p>
           <a:p>
@@ -1359,7 +1359,7 @@
           </a:p>
           <a:p>
             <a:r>
-              <a:t>  so you lead by showing the initiative serves the strategy, not technology for its own sake.</a:t>
+              <a:t>so you lead by showing the initiative serves the strategy, not technology for its own sake.</a:t>
             </a:r>
           </a:p>
           <a:p>
@@ -1369,7 +1369,7 @@
           </a:p>
           <a:p>
             <a:r>
-              <a:t>  this delivers it." It's an argument, not a description.</a:t>
+              <a:t>this delivers it." It's an argument, not a description.</a:t>
             </a:r>
           </a:p>
           <a:p>
@@ -1379,7 +1379,7 @@
           </a:p>
           <a:p>
             <a:r>
-              <a:t>  tie the initiative to a stated goal, the case is already weak.</a:t>
+              <a:t>tie the initiative to a stated goal, the case is already weak.</a:t>
             </a:r>
           </a:p>
           <a:p>
@@ -1489,12 +1489,12 @@
           </a:p>
           <a:p>
             <a:r>
-              <a:t>  15%/yr) → ICT goals (how ICT supports that, e.g. reduce in-house dependency, 99.9% for critical</a:t>
-            </a:r>
-          </a:p>
-          <a:p>
-            <a:r>
-              <a:t>  systems) → initiatives (the planned actions, e.g. move suitable systems to cloud).</a:t>
+              <a:t>15%/yr) → ICT goals (how ICT supports that, e.g. reduce in-house dependency, 99.9% for critical</a:t>
+            </a:r>
+          </a:p>
+          <a:p>
+            <a:r>
+              <a:t>systems) → initiatives (the planned actions, e.g. move suitable systems to cloud).</a:t>
             </a:r>
           </a:p>
           <a:p>
@@ -1504,7 +1504,7 @@
           </a:p>
           <a:p>
             <a:r>
-              <a:t>  pull only what's MATERIAL — don't recite the whole plan.</a:t>
+              <a:t>pull only what's MATERIAL — don't recite the whole plan.</a:t>
             </a:r>
           </a:p>
           <a:p>
@@ -1619,7 +1619,7 @@
           </a:p>
           <a:p>
             <a:r>
-              <a:t>  resilience. These are the yardsticks.</a:t>
+              <a:t>resilience. These are the yardsticks.</a:t>
             </a:r>
           </a:p>
           <a:p>
@@ -1629,7 +1629,7 @@
           </a:p>
           <a:p>
             <a:r>
-              <a:t>  strengthens the case) and divergence (plan lags or differs → a risk, or an opportunity to flag).</a:t>
+              <a:t>strengthens the case) and divergence (plan lags or differs → a risk, or an opportunity to flag).</a:t>
             </a:r>
           </a:p>
           <a:p>
@@ -2009,7 +2009,7 @@
           </a:p>
           <a:p>
             <a:r>
-              <a:t>  THIS decision.</a:t>
+              <a:t>THIS decision.</a:t>
             </a:r>
           </a:p>
           <a:p>
@@ -2019,7 +2019,7 @@
           </a:p>
           <a:p>
             <a:r>
-              <a:t>  of the source documents.</a:t>
+              <a:t>of the source documents.</a:t>
             </a:r>
           </a:p>
           <a:p>
@@ -2029,7 +2029,7 @@
           </a:p>
           <a:p>
             <a:r>
-              <a:t>  the verb for the whole section.</a:t>
+              <a:t>the verb for the whole section.</a:t>
             </a:r>
           </a:p>
           <a:p>
@@ -2134,12 +2134,12 @@
           </a:p>
           <a:p>
             <a:r>
-              <a:t>  dependencies &amp; integrations, constraints, pain points. Read the list as "things that could change</a:t>
-            </a:r>
-          </a:p>
-          <a:p>
-            <a:r>
-              <a:t>  the renew-vs-migrate call".</a:t>
+              <a:t>dependencies &amp; integrations, constraints, pain points. Read the list as "things that could change</a:t>
+            </a:r>
+          </a:p>
+          <a:p>
+            <a:r>
+              <a:t>the renew-vs-migrate call".</a:t>
             </a:r>
           </a:p>
           <a:p>
@@ -2154,7 +2154,7 @@
           </a:p>
           <a:p>
             <a:r>
-              <a:t>  — it sets up the gap analysis without shouting.</a:t>
+              <a:t>— it sets up the gap analysis without shouting.</a:t>
             </a:r>
           </a:p>
           <a:p>
@@ -6605,9 +6605,9 @@
               <a:t>■  </a:t>
             </a:r>
             <a:r>
-              <a:rPr sz="2400" b="1" i="0">
-                <a:solidFill>
-                  <a:srgbClr val="D68E10"/>
+              <a:rPr sz="2400" b="0" i="0">
+                <a:solidFill>
+                  <a:srgbClr val="2A2929"/>
                 </a:solidFill>
                 <a:latin typeface="Roboto"/>
               </a:rPr>
@@ -6901,7 +6901,7 @@
               <a:t>■  </a:t>
             </a:r>
             <a:r>
-              <a:rPr sz="2400" b="1" i="0">
+              <a:rPr sz="2400" b="0" i="0">
                 <a:solidFill>
                   <a:srgbClr val="2A2929"/>
                 </a:solidFill>
@@ -6963,7 +6963,7 @@
               <a:t>■  </a:t>
             </a:r>
             <a:r>
-              <a:rPr sz="2400" b="1" i="0">
+              <a:rPr sz="2400" b="0" i="0">
                 <a:solidFill>
                   <a:srgbClr val="2A2929"/>
                 </a:solidFill>
@@ -7018,16 +7018,16 @@
             <a:r>
               <a:rPr sz="2400" b="1" i="0">
                 <a:solidFill>
-                  <a:srgbClr val="27B5CE"/>
+                  <a:srgbClr val="EDAB0C"/>
                 </a:solidFill>
                 <a:latin typeface="Roboto"/>
               </a:rPr>
               <a:t>■  </a:t>
             </a:r>
             <a:r>
-              <a:rPr sz="2400" b="1" i="0">
-                <a:solidFill>
-                  <a:srgbClr val="27B5CE"/>
+              <a:rPr sz="2400" b="0" i="0">
+                <a:solidFill>
+                  <a:srgbClr val="2A2929"/>
                 </a:solidFill>
                 <a:latin typeface="Roboto"/>
               </a:rPr>
@@ -7398,9 +7398,9 @@
               <a:t>■  </a:t>
             </a:r>
             <a:r>
-              <a:rPr sz="2400" b="1" i="0">
-                <a:solidFill>
-                  <a:srgbClr val="D68E10"/>
+              <a:rPr sz="2400" b="0" i="0">
+                <a:solidFill>
+                  <a:srgbClr val="2A2929"/>
                 </a:solidFill>
                 <a:latin typeface="Roboto"/>
               </a:rPr>
@@ -7731,7 +7731,7 @@
               <a:t>■  </a:t>
             </a:r>
             <a:r>
-              <a:rPr sz="1700" b="1" i="0">
+              <a:rPr sz="1700" b="0" i="0">
                 <a:solidFill>
                   <a:srgbClr val="2A2929"/>
                 </a:solidFill>
@@ -7879,7 +7879,7 @@
             <a:r>
               <a:rPr sz="1700" b="1" i="0">
                 <a:solidFill>
-                  <a:srgbClr val="27B5CE"/>
+                  <a:srgbClr val="EDAB0C"/>
                 </a:solidFill>
                 <a:latin typeface="Roboto"/>
               </a:rPr>
@@ -7888,7 +7888,7 @@
             <a:r>
               <a:rPr sz="1700" b="0" i="0">
                 <a:solidFill>
-                  <a:srgbClr val="27B5CE"/>
+                  <a:srgbClr val="2A2929"/>
                 </a:solidFill>
                 <a:latin typeface="Roboto"/>
               </a:rPr>
@@ -9253,16 +9253,16 @@
             <a:r>
               <a:rPr sz="2400" b="1" i="0">
                 <a:solidFill>
-                  <a:srgbClr val="205F61"/>
+                  <a:srgbClr val="EDAB0C"/>
                 </a:solidFill>
                 <a:latin typeface="Roboto"/>
               </a:rPr>
               <a:t>■  </a:t>
             </a:r>
             <a:r>
-              <a:rPr sz="2400" b="1" i="0">
-                <a:solidFill>
-                  <a:srgbClr val="205F61"/>
+              <a:rPr sz="2400" b="0" i="0">
+                <a:solidFill>
+                  <a:srgbClr val="2A2929"/>
                 </a:solidFill>
                 <a:latin typeface="Roboto"/>
               </a:rPr>
@@ -9523,7 +9523,7 @@
         </p:nvGraphicFramePr>
         <p:xfrm>
           <a:off x="658368" y="1828800"/>
-          <a:ext cx="10881360" cy="914400"/>
+          <a:ext cx="10881360" cy="457200"/>
         </p:xfrm>
         <a:graphic>
           <a:graphicData uri="http://schemas.openxmlformats.org/drawingml/2006/table">
@@ -9532,12 +9532,12 @@
                 <a:tableStyleId>{5C22544A-7EE6-4342-B048-85BDC9FD1C3A}</a:tableStyleId>
               </a:tblPr>
               <a:tblGrid>
-                <a:gridCol w="2011680"/>
-                <a:gridCol w="1828800"/>
-                <a:gridCol w="1737360"/>
-                <a:gridCol w="1737360"/>
-                <a:gridCol w="1737360"/>
-                <a:gridCol w="1828800"/>
+                <a:gridCol w="1813560"/>
+                <a:gridCol w="1813560"/>
+                <a:gridCol w="1813560"/>
+                <a:gridCol w="1813560"/>
+                <a:gridCol w="1813560"/>
+                <a:gridCol w="1813560"/>
               </a:tblGrid>
               <a:tr h="457200">
                 <a:tc>
@@ -9673,140 +9673,6 @@
                   </a:tcPr>
                 </a:tc>
               </a:tr>
-              <a:tr h="457200">
-                <a:tc>
-                  <a:txBody>
-                    <a:bodyPr/>
-                    <a:lstStyle/>
-                    <a:p>
-                      <a:r>
-                        <a:rPr sz="1300" b="0" i="0">
-                          <a:solidFill>
-                            <a:srgbClr val="2A2929"/>
-                          </a:solidFill>
-                          <a:latin typeface="Roboto"/>
-                        </a:rPr>
-                        <a:t/>
-                      </a:r>
-                    </a:p>
-                  </a:txBody>
-                  <a:tcPr marL="76200" marR="76200" marT="50800" marB="50800">
-                    <a:solidFill>
-                      <a:srgbClr val="FFFFFF"/>
-                    </a:solidFill>
-                  </a:tcPr>
-                </a:tc>
-                <a:tc>
-                  <a:txBody>
-                    <a:bodyPr/>
-                    <a:lstStyle/>
-                    <a:p>
-                      <a:r>
-                        <a:rPr sz="1300" b="0" i="0">
-                          <a:solidFill>
-                            <a:srgbClr val="2A2929"/>
-                          </a:solidFill>
-                          <a:latin typeface="Roboto"/>
-                        </a:rPr>
-                        <a:t/>
-                      </a:r>
-                    </a:p>
-                  </a:txBody>
-                  <a:tcPr marL="76200" marR="76200" marT="50800" marB="50800">
-                    <a:solidFill>
-                      <a:srgbClr val="FFFFFF"/>
-                    </a:solidFill>
-                  </a:tcPr>
-                </a:tc>
-                <a:tc>
-                  <a:txBody>
-                    <a:bodyPr/>
-                    <a:lstStyle/>
-                    <a:p>
-                      <a:r>
-                        <a:rPr sz="1300" b="0" i="0">
-                          <a:solidFill>
-                            <a:srgbClr val="2A2929"/>
-                          </a:solidFill>
-                          <a:latin typeface="Roboto"/>
-                        </a:rPr>
-                        <a:t/>
-                      </a:r>
-                    </a:p>
-                  </a:txBody>
-                  <a:tcPr marL="76200" marR="76200" marT="50800" marB="50800">
-                    <a:solidFill>
-                      <a:srgbClr val="FFFFFF"/>
-                    </a:solidFill>
-                  </a:tcPr>
-                </a:tc>
-                <a:tc>
-                  <a:txBody>
-                    <a:bodyPr/>
-                    <a:lstStyle/>
-                    <a:p>
-                      <a:r>
-                        <a:rPr sz="1300" b="0" i="0">
-                          <a:solidFill>
-                            <a:srgbClr val="2A2929"/>
-                          </a:solidFill>
-                          <a:latin typeface="Roboto"/>
-                        </a:rPr>
-                        <a:t/>
-                      </a:r>
-                    </a:p>
-                  </a:txBody>
-                  <a:tcPr marL="76200" marR="76200" marT="50800" marB="50800">
-                    <a:solidFill>
-                      <a:srgbClr val="FFFFFF"/>
-                    </a:solidFill>
-                  </a:tcPr>
-                </a:tc>
-                <a:tc>
-                  <a:txBody>
-                    <a:bodyPr/>
-                    <a:lstStyle/>
-                    <a:p>
-                      <a:r>
-                        <a:rPr sz="1300" b="0" i="0">
-                          <a:solidFill>
-                            <a:srgbClr val="2A2929"/>
-                          </a:solidFill>
-                          <a:latin typeface="Roboto"/>
-                        </a:rPr>
-                        <a:t/>
-                      </a:r>
-                    </a:p>
-                  </a:txBody>
-                  <a:tcPr marL="76200" marR="76200" marT="50800" marB="50800">
-                    <a:solidFill>
-                      <a:srgbClr val="FFFFFF"/>
-                    </a:solidFill>
-                  </a:tcPr>
-                </a:tc>
-                <a:tc>
-                  <a:txBody>
-                    <a:bodyPr/>
-                    <a:lstStyle/>
-                    <a:p>
-                      <a:r>
-                        <a:rPr sz="1300" b="0" i="0">
-                          <a:solidFill>
-                            <a:srgbClr val="2A2929"/>
-                          </a:solidFill>
-                          <a:latin typeface="Roboto"/>
-                        </a:rPr>
-                        <a:t/>
-                      </a:r>
-                    </a:p>
-                  </a:txBody>
-                  <a:tcPr marL="76200" marR="76200" marT="50800" marB="50800">
-                    <a:solidFill>
-                      <a:srgbClr val="FFFFFF"/>
-                    </a:solidFill>
-                  </a:tcPr>
-                </a:tc>
-              </a:tr>
             </a:tbl>
           </a:graphicData>
         </a:graphic>
@@ -10192,9 +10058,9 @@
               <a:t>■  </a:t>
             </a:r>
             <a:r>
-              <a:rPr sz="2400" b="1" i="0">
-                <a:solidFill>
-                  <a:srgbClr val="D68E10"/>
+              <a:rPr sz="2400" b="0" i="0">
+                <a:solidFill>
+                  <a:srgbClr val="2A2929"/>
                 </a:solidFill>
                 <a:latin typeface="Roboto"/>
               </a:rPr>
@@ -10495,8 +10361,8 @@
                 <a:tableStyleId>{5C22544A-7EE6-4342-B048-85BDC9FD1C3A}</a:tableStyleId>
               </a:tblPr>
               <a:tblGrid>
-                <a:gridCol w="2377440"/>
-                <a:gridCol w="8503920"/>
+                <a:gridCol w="5440680"/>
+                <a:gridCol w="5440680"/>
               </a:tblGrid>
               <a:tr h="457200">
                 <a:tc>
@@ -11180,7 +11046,7 @@
               <a:t>■  </a:t>
             </a:r>
             <a:r>
-              <a:rPr sz="1700" b="1" i="0">
+              <a:rPr sz="1700" b="0" i="0">
                 <a:solidFill>
                   <a:srgbClr val="2A2929"/>
                 </a:solidFill>
@@ -11390,7 +11256,7 @@
             <a:r>
               <a:rPr sz="1700" b="1" i="0">
                 <a:solidFill>
-                  <a:srgbClr val="205F61"/>
+                  <a:srgbClr val="EDAB0C"/>
                 </a:solidFill>
                 <a:latin typeface="Roboto"/>
               </a:rPr>
@@ -11399,7 +11265,7 @@
             <a:r>
               <a:rPr sz="1700" b="0" i="0">
                 <a:solidFill>
-                  <a:srgbClr val="205F61"/>
+                  <a:srgbClr val="2A2929"/>
                 </a:solidFill>
                 <a:latin typeface="Roboto"/>
               </a:rPr>
@@ -12733,16 +12599,16 @@
             <a:r>
               <a:rPr sz="2400" b="1" i="0">
                 <a:solidFill>
-                  <a:srgbClr val="92268F"/>
+                  <a:srgbClr val="EDAB0C"/>
                 </a:solidFill>
                 <a:latin typeface="Roboto"/>
               </a:rPr>
               <a:t>■  </a:t>
             </a:r>
             <a:r>
-              <a:rPr sz="2400" b="1" i="0">
-                <a:solidFill>
-                  <a:srgbClr val="92268F"/>
+              <a:rPr sz="2400" b="0" i="0">
+                <a:solidFill>
+                  <a:srgbClr val="2A2929"/>
                 </a:solidFill>
                 <a:latin typeface="Roboto"/>
               </a:rPr>
@@ -13421,9 +13287,9 @@
               <a:t>■  </a:t>
             </a:r>
             <a:r>
-              <a:rPr sz="2400" b="1" i="0">
-                <a:solidFill>
-                  <a:srgbClr val="D68E10"/>
+              <a:rPr sz="2400" b="0" i="0">
+                <a:solidFill>
+                  <a:srgbClr val="2A2929"/>
                 </a:solidFill>
                 <a:latin typeface="Roboto"/>
               </a:rPr>
@@ -13701,7 +13567,7 @@
               <a:t>■  </a:t>
             </a:r>
             <a:r>
-              <a:rPr sz="2400" b="1" i="0">
+              <a:rPr sz="2400" b="0" i="0">
                 <a:solidFill>
                   <a:srgbClr val="2A2929"/>
                 </a:solidFill>
@@ -13763,7 +13629,7 @@
               <a:t>■  </a:t>
             </a:r>
             <a:r>
-              <a:rPr sz="2400" b="1" i="0">
+              <a:rPr sz="2400" b="0" i="0">
                 <a:solidFill>
                   <a:srgbClr val="2A2929"/>
                 </a:solidFill>
@@ -13825,7 +13691,7 @@
               <a:t>■  </a:t>
             </a:r>
             <a:r>
-              <a:rPr sz="2400" b="1" i="0">
+              <a:rPr sz="2400" b="0" i="0">
                 <a:solidFill>
                   <a:srgbClr val="2A2929"/>
                 </a:solidFill>
@@ -13880,16 +13746,16 @@
             <a:r>
               <a:rPr sz="2400" b="1" i="0">
                 <a:solidFill>
-                  <a:srgbClr val="92268F"/>
+                  <a:srgbClr val="EDAB0C"/>
                 </a:solidFill>
                 <a:latin typeface="Roboto"/>
               </a:rPr>
               <a:t>■  </a:t>
             </a:r>
             <a:r>
-              <a:rPr sz="2400" b="1" i="0">
-                <a:solidFill>
-                  <a:srgbClr val="92268F"/>
+              <a:rPr sz="2400" b="0" i="0">
+                <a:solidFill>
+                  <a:srgbClr val="2A2929"/>
                 </a:solidFill>
                 <a:latin typeface="Roboto"/>
               </a:rPr>
@@ -14673,16 +14539,16 @@
             <a:r>
               <a:rPr sz="2400" b="1" i="0">
                 <a:solidFill>
-                  <a:srgbClr val="92268F"/>
+                  <a:srgbClr val="EDAB0C"/>
                 </a:solidFill>
                 <a:latin typeface="Roboto"/>
               </a:rPr>
               <a:t>■  </a:t>
             </a:r>
             <a:r>
-              <a:rPr sz="2400" b="1" i="0">
-                <a:solidFill>
-                  <a:srgbClr val="92268F"/>
+              <a:rPr sz="2400" b="0" i="0">
+                <a:solidFill>
+                  <a:srgbClr val="2A2929"/>
                 </a:solidFill>
                 <a:latin typeface="Roboto"/>
               </a:rPr>
@@ -15013,7 +14879,7 @@
               <a:t>■  </a:t>
             </a:r>
             <a:r>
-              <a:rPr sz="1700" b="1" i="0">
+              <a:rPr sz="1700" b="0" i="0">
                 <a:solidFill>
                   <a:srgbClr val="2A2929"/>
                 </a:solidFill>
@@ -15223,7 +15089,7 @@
             <a:r>
               <a:rPr sz="1700" b="1" i="0">
                 <a:solidFill>
-                  <a:srgbClr val="92268F"/>
+                  <a:srgbClr val="EDAB0C"/>
                 </a:solidFill>
                 <a:latin typeface="Roboto"/>
               </a:rPr>
@@ -15232,7 +15098,7 @@
             <a:r>
               <a:rPr sz="1700" b="0" i="0">
                 <a:solidFill>
-                  <a:srgbClr val="92268F"/>
+                  <a:srgbClr val="2A2929"/>
                 </a:solidFill>
                 <a:latin typeface="Roboto"/>
               </a:rPr>

--- a/S1-CL1-Cloud-Design-Build/delivery/topic_02/Topic_02_Slides.pptx
+++ b/S1-CL1-Cloud-Design-Build/delivery/topic_02/Topic_02_Slides.pptx
@@ -4,32 +4,35 @@
   <p:sldMasterIdLst>
     <p:sldMasterId id="2147483648" r:id="rId1"/>
   </p:sldMasterIdLst>
+  <p:notesMasterIdLst>
+    <p:notesMasterId r:id="rId25"/>
+  </p:notesMasterIdLst>
   <p:sldIdLst>
-    <p:sldId id="256" r:id="rId7"/>
-    <p:sldId id="257" r:id="rId8"/>
-    <p:sldId id="258" r:id="rId10"/>
-    <p:sldId id="259" r:id="rId11"/>
-    <p:sldId id="260" r:id="rId12"/>
-    <p:sldId id="261" r:id="rId13"/>
-    <p:sldId id="262" r:id="rId14"/>
-    <p:sldId id="263" r:id="rId15"/>
-    <p:sldId id="264" r:id="rId16"/>
-    <p:sldId id="265" r:id="rId17"/>
-    <p:sldId id="266" r:id="rId18"/>
-    <p:sldId id="267" r:id="rId19"/>
-    <p:sldId id="268" r:id="rId20"/>
-    <p:sldId id="269" r:id="rId21"/>
-    <p:sldId id="270" r:id="rId22"/>
-    <p:sldId id="271" r:id="rId23"/>
-    <p:sldId id="272" r:id="rId24"/>
-    <p:sldId id="273" r:id="rId25"/>
-    <p:sldId id="274" r:id="rId26"/>
-    <p:sldId id="275" r:id="rId27"/>
-    <p:sldId id="276" r:id="rId28"/>
-    <p:sldId id="277" r:id="rId29"/>
-    <p:sldId id="278" r:id="rId30"/>
+    <p:sldId id="256" r:id="rId2"/>
+    <p:sldId id="257" r:id="rId3"/>
+    <p:sldId id="258" r:id="rId4"/>
+    <p:sldId id="259" r:id="rId5"/>
+    <p:sldId id="260" r:id="rId6"/>
+    <p:sldId id="261" r:id="rId7"/>
+    <p:sldId id="262" r:id="rId8"/>
+    <p:sldId id="263" r:id="rId9"/>
+    <p:sldId id="264" r:id="rId10"/>
+    <p:sldId id="265" r:id="rId11"/>
+    <p:sldId id="266" r:id="rId12"/>
+    <p:sldId id="267" r:id="rId13"/>
+    <p:sldId id="268" r:id="rId14"/>
+    <p:sldId id="269" r:id="rId15"/>
+    <p:sldId id="270" r:id="rId16"/>
+    <p:sldId id="271" r:id="rId17"/>
+    <p:sldId id="272" r:id="rId18"/>
+    <p:sldId id="273" r:id="rId19"/>
+    <p:sldId id="274" r:id="rId20"/>
+    <p:sldId id="275" r:id="rId21"/>
+    <p:sldId id="276" r:id="rId22"/>
+    <p:sldId id="277" r:id="rId23"/>
+    <p:sldId id="278" r:id="rId24"/>
   </p:sldIdLst>
-  <p:sldSz cx="12191695" cy="6858000" type="screen4x3"/>
+  <p:sldSz cx="12192000" cy="6858000"/>
   <p:notesSz cx="6858000" cy="9144000"/>
   <p:defaultTextStyle>
     <a:defPPr>
@@ -126,11 +129,27 @@
       </a:defRPr>
     </a:lvl9pPr>
   </p:defaultTextStyle>
+  <p:extLst>
+    <p:ext uri="{EFAFB233-063F-42B5-8137-9DF3F51BA10A}">
+      <p15:sldGuideLst xmlns:p15="http://schemas.microsoft.com/office/powerpoint/2012/main">
+        <p15:guide id="1" orient="horz" pos="2160">
+          <p15:clr>
+            <a:srgbClr val="A4A3A4"/>
+          </p15:clr>
+        </p15:guide>
+        <p15:guide id="2" pos="2880">
+          <p15:clr>
+            <a:srgbClr val="A4A3A4"/>
+          </p15:clr>
+        </p15:guide>
+      </p15:sldGuideLst>
+    </p:ext>
+  </p:extLst>
 </p:presentation>
 </file>
 
 <file path=ppt/notesMasters/notesMaster1.xml><?xml version="1.0" encoding="utf-8"?>
-<p:notesMaster xmlns:a="http://schemas.openxmlformats.org/drawingml/2006/main" xmlns:p="http://schemas.openxmlformats.org/presentationml/2006/main" xmlns:r="http://schemas.openxmlformats.org/officeDocument/2006/relationships">
+<p:notesMaster xmlns:a="http://schemas.openxmlformats.org/drawingml/2006/main" xmlns:r="http://schemas.openxmlformats.org/officeDocument/2006/relationships" xmlns:p="http://schemas.openxmlformats.org/presentationml/2006/main">
   <p:cSld>
     <p:bg>
       <p:bgRef idx="1001">
@@ -164,7 +183,7 @@
         <p:spPr>
           <a:xfrm>
             <a:off x="0" y="0"/>
-            <a:ext cx="2971800" cy="457200"/>
+            <a:ext cx="2971800" cy="458788"/>
           </a:xfrm>
           <a:prstGeom prst="rect">
             <a:avLst/>
@@ -195,7 +214,7 @@
         <p:spPr>
           <a:xfrm>
             <a:off x="3884613" y="0"/>
-            <a:ext cx="2971800" cy="457200"/>
+            <a:ext cx="2971800" cy="458788"/>
           </a:xfrm>
           <a:prstGeom prst="rect">
             <a:avLst/>
@@ -209,9 +228,9 @@
             </a:lvl1pPr>
           </a:lstStyle>
           <a:p>
-            <a:fld id="{0F89C1C7-3DCD-1040-A9CF-14679D8B5DDD}" type="datetimeFigureOut">
+            <a:fld id="{576A9CB0-9823-8548-803F-A18C20625C56}" type="datetimeFigureOut">
               <a:rPr lang="en-US" smtClean="0"/>
-              <a:t>10/17/16</a:t>
+              <a:t>7/15/26</a:t>
             </a:fld>
             <a:endParaRPr lang="en-US"/>
           </a:p>
@@ -229,8 +248,8 @@
         </p:nvSpPr>
         <p:spPr>
           <a:xfrm>
-            <a:off x="1143000" y="685800"/>
-            <a:ext cx="4572000" cy="3429000"/>
+            <a:off x="685800" y="1143000"/>
+            <a:ext cx="5486400" cy="3086100"/>
           </a:xfrm>
           <a:prstGeom prst="rect">
             <a:avLst/>
@@ -262,8 +281,8 @@
         </p:nvSpPr>
         <p:spPr>
           <a:xfrm>
-            <a:off x="685800" y="4343400"/>
-            <a:ext cx="5486400" cy="4114800"/>
+            <a:off x="685800" y="4400550"/>
+            <a:ext cx="5486400" cy="3600450"/>
           </a:xfrm>
           <a:prstGeom prst="rect">
             <a:avLst/>
@@ -275,35 +294,35 @@
           <a:p>
             <a:pPr lvl="0"/>
             <a:r>
-              <a:rPr lang="en-US" smtClean="0"/>
+              <a:rPr lang="en-GB"/>
               <a:t>Click to edit Master text styles</a:t>
             </a:r>
           </a:p>
           <a:p>
             <a:pPr lvl="1"/>
             <a:r>
-              <a:rPr lang="en-US" smtClean="0"/>
+              <a:rPr lang="en-GB"/>
               <a:t>Second level</a:t>
             </a:r>
           </a:p>
           <a:p>
             <a:pPr lvl="2"/>
             <a:r>
-              <a:rPr lang="en-US" smtClean="0"/>
+              <a:rPr lang="en-GB"/>
               <a:t>Third level</a:t>
             </a:r>
           </a:p>
           <a:p>
             <a:pPr lvl="3"/>
             <a:r>
-              <a:rPr lang="en-US" smtClean="0"/>
+              <a:rPr lang="en-GB"/>
               <a:t>Fourth level</a:t>
             </a:r>
           </a:p>
           <a:p>
             <a:pPr lvl="4"/>
             <a:r>
-              <a:rPr lang="en-US" smtClean="0"/>
+              <a:rPr lang="en-GB"/>
               <a:t>Fifth level</a:t>
             </a:r>
             <a:endParaRPr lang="en-US"/>
@@ -323,7 +342,7 @@
         <p:spPr>
           <a:xfrm>
             <a:off x="0" y="8685213"/>
-            <a:ext cx="2971800" cy="457200"/>
+            <a:ext cx="2971800" cy="458787"/>
           </a:xfrm>
           <a:prstGeom prst="rect">
             <a:avLst/>
@@ -354,7 +373,7 @@
         <p:spPr>
           <a:xfrm>
             <a:off x="3884613" y="8685213"/>
-            <a:ext cx="2971800" cy="457200"/>
+            <a:ext cx="2971800" cy="458787"/>
           </a:xfrm>
           <a:prstGeom prst="rect">
             <a:avLst/>
@@ -368,7 +387,7 @@
             </a:lvl1pPr>
           </a:lstStyle>
           <a:p>
-            <a:fld id="{BB5E49A5-4136-284D-997B-48E1D791AD67}" type="slidenum">
+            <a:fld id="{EAC5F82F-9142-2245-A565-13693B690C17}" type="slidenum">
               <a:rPr lang="en-US" smtClean="0"/>
               <a:t>‹#›</a:t>
             </a:fld>
@@ -379,13 +398,13 @@
     </p:spTree>
     <p:extLst>
       <p:ext uri="{BB962C8B-B14F-4D97-AF65-F5344CB8AC3E}">
-        <p14:creationId xmlns:p14="http://schemas.microsoft.com/office/powerpoint/2010/main" val="2623252185"/>
+        <p14:creationId xmlns:p14="http://schemas.microsoft.com/office/powerpoint/2010/main" val="2879383561"/>
       </p:ext>
     </p:extLst>
   </p:cSld>
   <p:clrMap bg1="lt1" tx1="dk1" bg2="lt2" tx2="dk2" accent1="accent1" accent2="accent2" accent3="accent3" accent4="accent4" accent5="accent5" accent6="accent6" hlink="hlink" folHlink="folHlink"/>
   <p:notesStyle>
-    <a:lvl1pPr marL="0" algn="l" defTabSz="457200" rtl="0" eaLnBrk="1" latinLnBrk="0" hangingPunct="1">
+    <a:lvl1pPr marL="0" algn="l" defTabSz="914400" rtl="0" eaLnBrk="1" latinLnBrk="0" hangingPunct="1">
       <a:defRPr sz="1200" kern="1200">
         <a:solidFill>
           <a:schemeClr val="tx1"/>
@@ -395,7 +414,7 @@
         <a:cs typeface="+mn-cs"/>
       </a:defRPr>
     </a:lvl1pPr>
-    <a:lvl2pPr marL="457200" algn="l" defTabSz="457200" rtl="0" eaLnBrk="1" latinLnBrk="0" hangingPunct="1">
+    <a:lvl2pPr marL="457200" algn="l" defTabSz="914400" rtl="0" eaLnBrk="1" latinLnBrk="0" hangingPunct="1">
       <a:defRPr sz="1200" kern="1200">
         <a:solidFill>
           <a:schemeClr val="tx1"/>
@@ -405,7 +424,7 @@
         <a:cs typeface="+mn-cs"/>
       </a:defRPr>
     </a:lvl2pPr>
-    <a:lvl3pPr marL="914400" algn="l" defTabSz="457200" rtl="0" eaLnBrk="1" latinLnBrk="0" hangingPunct="1">
+    <a:lvl3pPr marL="914400" algn="l" defTabSz="914400" rtl="0" eaLnBrk="1" latinLnBrk="0" hangingPunct="1">
       <a:defRPr sz="1200" kern="1200">
         <a:solidFill>
           <a:schemeClr val="tx1"/>
@@ -415,7 +434,7 @@
         <a:cs typeface="+mn-cs"/>
       </a:defRPr>
     </a:lvl3pPr>
-    <a:lvl4pPr marL="1371600" algn="l" defTabSz="457200" rtl="0" eaLnBrk="1" latinLnBrk="0" hangingPunct="1">
+    <a:lvl4pPr marL="1371600" algn="l" defTabSz="914400" rtl="0" eaLnBrk="1" latinLnBrk="0" hangingPunct="1">
       <a:defRPr sz="1200" kern="1200">
         <a:solidFill>
           <a:schemeClr val="tx1"/>
@@ -425,7 +444,7 @@
         <a:cs typeface="+mn-cs"/>
       </a:defRPr>
     </a:lvl4pPr>
-    <a:lvl5pPr marL="1828800" algn="l" defTabSz="457200" rtl="0" eaLnBrk="1" latinLnBrk="0" hangingPunct="1">
+    <a:lvl5pPr marL="1828800" algn="l" defTabSz="914400" rtl="0" eaLnBrk="1" latinLnBrk="0" hangingPunct="1">
       <a:defRPr sz="1200" kern="1200">
         <a:solidFill>
           <a:schemeClr val="tx1"/>
@@ -435,7 +454,7 @@
         <a:cs typeface="+mn-cs"/>
       </a:defRPr>
     </a:lvl5pPr>
-    <a:lvl6pPr marL="2286000" algn="l" defTabSz="457200" rtl="0" eaLnBrk="1" latinLnBrk="0" hangingPunct="1">
+    <a:lvl6pPr marL="2286000" algn="l" defTabSz="914400" rtl="0" eaLnBrk="1" latinLnBrk="0" hangingPunct="1">
       <a:defRPr sz="1200" kern="1200">
         <a:solidFill>
           <a:schemeClr val="tx1"/>
@@ -445,7 +464,7 @@
         <a:cs typeface="+mn-cs"/>
       </a:defRPr>
     </a:lvl6pPr>
-    <a:lvl7pPr marL="2743200" algn="l" defTabSz="457200" rtl="0" eaLnBrk="1" latinLnBrk="0" hangingPunct="1">
+    <a:lvl7pPr marL="2743200" algn="l" defTabSz="914400" rtl="0" eaLnBrk="1" latinLnBrk="0" hangingPunct="1">
       <a:defRPr sz="1200" kern="1200">
         <a:solidFill>
           <a:schemeClr val="tx1"/>
@@ -455,7 +474,7 @@
         <a:cs typeface="+mn-cs"/>
       </a:defRPr>
     </a:lvl7pPr>
-    <a:lvl8pPr marL="3200400" algn="l" defTabSz="457200" rtl="0" eaLnBrk="1" latinLnBrk="0" hangingPunct="1">
+    <a:lvl8pPr marL="3200400" algn="l" defTabSz="914400" rtl="0" eaLnBrk="1" latinLnBrk="0" hangingPunct="1">
       <a:defRPr sz="1200" kern="1200">
         <a:solidFill>
           <a:schemeClr val="tx1"/>
@@ -465,7 +484,7 @@
         <a:cs typeface="+mn-cs"/>
       </a:defRPr>
     </a:lvl8pPr>
-    <a:lvl9pPr marL="3657600" algn="l" defTabSz="457200" rtl="0" eaLnBrk="1" latinLnBrk="0" hangingPunct="1">
+    <a:lvl9pPr marL="3657600" algn="l" defTabSz="914400" rtl="0" eaLnBrk="1" latinLnBrk="0" hangingPunct="1">
       <a:defRPr sz="1200" kern="1200">
         <a:solidFill>
           <a:schemeClr val="tx1"/>
@@ -480,7 +499,7 @@
 </file>
 
 <file path=ppt/notesSlides/notesSlide1.xml><?xml version="1.0" encoding="utf-8"?>
-<p:notes xmlns:a="http://schemas.openxmlformats.org/drawingml/2006/main" xmlns:p="http://schemas.openxmlformats.org/presentationml/2006/main" xmlns:r="http://schemas.openxmlformats.org/officeDocument/2006/relationships">
+<p:notes xmlns:a="http://schemas.openxmlformats.org/drawingml/2006/main" xmlns:r="http://schemas.openxmlformats.org/officeDocument/2006/relationships" xmlns:p="http://schemas.openxmlformats.org/presentationml/2006/main">
   <p:cSld>
     <p:spTree>
       <p:nvGrpSpPr>
@@ -500,7 +519,7 @@
         <p:nvSpPr>
           <p:cNvPr id="2" name="Slide Image Placeholder 1"/>
           <p:cNvSpPr>
-            <a:spLocks noGrp="1"/>
+            <a:spLocks noGrp="1" noRot="1" noChangeAspect="1"/>
           </p:cNvSpPr>
           <p:nvPr>
             <p:ph type="sldImg" idx="2"/>
@@ -515,7 +534,7 @@
             <a:spLocks noGrp="1"/>
           </p:cNvSpPr>
           <p:nvPr>
-            <p:ph type="body" idx="3" sz="quarter"/>
+            <p:ph type="body" sz="quarter" idx="3"/>
           </p:nvPr>
         </p:nvSpPr>
         <p:spPr/>
@@ -606,7 +625,7 @@
             <a:spLocks noGrp="1"/>
           </p:cNvSpPr>
           <p:nvPr>
-            <p:ph type="sldNum" idx="5" sz="quarter"/>
+            <p:ph type="sldNum" sz="quarter" idx="5"/>
           </p:nvPr>
         </p:nvSpPr>
         <p:spPr/>
@@ -620,7 +639,7 @@
 </file>
 
 <file path=ppt/notesSlides/notesSlide10.xml><?xml version="1.0" encoding="utf-8"?>
-<p:notes xmlns:a="http://schemas.openxmlformats.org/drawingml/2006/main" xmlns:p="http://schemas.openxmlformats.org/presentationml/2006/main" xmlns:r="http://schemas.openxmlformats.org/officeDocument/2006/relationships">
+<p:notes xmlns:a="http://schemas.openxmlformats.org/drawingml/2006/main" xmlns:r="http://schemas.openxmlformats.org/officeDocument/2006/relationships" xmlns:p="http://schemas.openxmlformats.org/presentationml/2006/main">
   <p:cSld>
     <p:spTree>
       <p:nvGrpSpPr>
@@ -640,7 +659,7 @@
         <p:nvSpPr>
           <p:cNvPr id="2" name="Slide Image Placeholder 1"/>
           <p:cNvSpPr>
-            <a:spLocks noGrp="1"/>
+            <a:spLocks noGrp="1" noRot="1" noChangeAspect="1"/>
           </p:cNvSpPr>
           <p:nvPr>
             <p:ph type="sldImg" idx="2"/>
@@ -655,7 +674,7 @@
             <a:spLocks noGrp="1"/>
           </p:cNvSpPr>
           <p:nvPr>
-            <p:ph type="body" idx="3" sz="quarter"/>
+            <p:ph type="body" sz="quarter" idx="3"/>
           </p:nvPr>
         </p:nvSpPr>
         <p:spPr/>
@@ -664,67 +683,100 @@
           <a:lstStyle/>
           <a:p>
             <a:r>
-              <a:t>The three-step method that turns source docs into a synthesised current state — teach it as a</a:t>
-            </a:r>
-          </a:p>
-          <a:p>
-            <a:r>
+              <a:rPr dirty="0"/>
+              <a:t>The three-step method that turns source docs into a </a:t>
+            </a:r>
+            <a:r>
+              <a:rPr dirty="0" err="1"/>
+              <a:t>synthesised</a:t>
+            </a:r>
+            <a:r>
+              <a:rPr dirty="0"/>
+              <a:t> current state — teach it as a</a:t>
+            </a:r>
+          </a:p>
+          <a:p>
+            <a:r>
+              <a:rPr dirty="0"/>
               <a:t>repeatable procedure they'll run in the activity next.</a:t>
             </a:r>
           </a:p>
           <a:p>
             <a:r>
+              <a:rPr dirty="0"/>
               <a:t>• Step 1: read the source docs — environment overview, server/app specs, consultation notes.</a:t>
             </a:r>
           </a:p>
           <a:p>
             <a:r>
+              <a:rPr dirty="0"/>
               <a:t>• Step 2: for EACH fact ask "does this affect the renew-vs-migrate decision?" If no, cut it (this is</a:t>
             </a:r>
           </a:p>
           <a:p>
             <a:r>
+              <a:rPr dirty="0"/>
               <a:t>the relevance filter applied).</a:t>
             </a:r>
           </a:p>
           <a:p>
             <a:r>
+              <a:rPr dirty="0"/>
               <a:t>• Step 3: re-state what's left in PLAIN LANGUAGE, grouped — platform / workload / dependencies /</a:t>
             </a:r>
           </a:p>
           <a:p>
             <a:r>
+              <a:rPr dirty="0"/>
               <a:t>condition-risk. Grouping is what makes it read as synthesis, not a list.</a:t>
             </a:r>
           </a:p>
           <a:p>
             <a:r>
+              <a:rPr dirty="0"/>
               <a:t>• Aim ~half a page, no copy-paste (bolded).</a:t>
             </a:r>
           </a:p>
           <a:p>
             <a:r>
+              <a:rPr dirty="0"/>
               <a:t>Misconception to pre-empt: "re-state = reword each sentence." No — you regroup and compress across</a:t>
             </a:r>
           </a:p>
           <a:p>
             <a:r>
-              <a:t>documents; the output is shorter and organised by theme, not a paraphrase of every line.</a:t>
-            </a:r>
-          </a:p>
-          <a:p>
-            <a:r>
+              <a:rPr dirty="0"/>
+              <a:t>documents; the output is shorter and </a:t>
+            </a:r>
+            <a:r>
+              <a:rPr dirty="0" err="1"/>
+              <a:t>organised</a:t>
+            </a:r>
+            <a:r>
+              <a:rPr dirty="0"/>
+              <a:t> by theme, not a paraphrase of every line.</a:t>
+            </a:r>
+          </a:p>
+          <a:p>
+            <a:r>
+              <a:rPr dirty="0"/>
               <a:t>Question to pose: "You've got five source docs — what's the first question you ask of every fact in</a:t>
             </a:r>
           </a:p>
           <a:p>
             <a:r>
+              <a:rPr dirty="0"/>
               <a:t>them?" ("does it affect the decision?").</a:t>
             </a:r>
           </a:p>
           <a:p>
             <a:r>
-              <a:t>UoC/AT1 tie: PC 1.2 / PE 2 → AT1 §4; this procedure is exactly how a strong A2 gets written.</a:t>
+              <a:rPr dirty="0" err="1"/>
+              <a:t>UoC</a:t>
+            </a:r>
+            <a:r>
+              <a:rPr dirty="0"/>
+              <a:t>/AT1 tie: PC 1.2 / PE 2 → AT1 §4; this procedure is exactly how a strong A2 gets written.</a:t>
             </a:r>
           </a:p>
         </p:txBody>
@@ -736,7 +788,7 @@
             <a:spLocks noGrp="1"/>
           </p:cNvSpPr>
           <p:nvPr>
-            <p:ph type="sldNum" idx="5" sz="quarter"/>
+            <p:ph type="sldNum" sz="quarter" idx="5"/>
           </p:nvPr>
         </p:nvSpPr>
         <p:spPr/>
@@ -750,7 +802,7 @@
 </file>
 
 <file path=ppt/notesSlides/notesSlide11.xml><?xml version="1.0" encoding="utf-8"?>
-<p:notes xmlns:a="http://schemas.openxmlformats.org/drawingml/2006/main" xmlns:p="http://schemas.openxmlformats.org/presentationml/2006/main" xmlns:r="http://schemas.openxmlformats.org/officeDocument/2006/relationships">
+<p:notes xmlns:a="http://schemas.openxmlformats.org/drawingml/2006/main" xmlns:r="http://schemas.openxmlformats.org/officeDocument/2006/relationships" xmlns:p="http://schemas.openxmlformats.org/presentationml/2006/main">
   <p:cSld>
     <p:spTree>
       <p:nvGrpSpPr>
@@ -770,7 +822,7 @@
         <p:nvSpPr>
           <p:cNvPr id="2" name="Slide Image Placeholder 1"/>
           <p:cNvSpPr>
-            <a:spLocks noGrp="1"/>
+            <a:spLocks noGrp="1" noRot="1" noChangeAspect="1"/>
           </p:cNvSpPr>
           <p:nvPr>
             <p:ph type="sldImg" idx="2"/>
@@ -785,7 +837,7 @@
             <a:spLocks noGrp="1"/>
           </p:cNvSpPr>
           <p:nvPr>
-            <p:ph type="body" idx="3" sz="quarter"/>
+            <p:ph type="body" sz="quarter" idx="3"/>
           </p:nvPr>
         </p:nvSpPr>
         <p:spPr/>
@@ -886,7 +938,7 @@
             <a:spLocks noGrp="1"/>
           </p:cNvSpPr>
           <p:nvPr>
-            <p:ph type="sldNum" idx="5" sz="quarter"/>
+            <p:ph type="sldNum" sz="quarter" idx="5"/>
           </p:nvPr>
         </p:nvSpPr>
         <p:spPr/>
@@ -900,7 +952,7 @@
 </file>
 
 <file path=ppt/notesSlides/notesSlide12.xml><?xml version="1.0" encoding="utf-8"?>
-<p:notes xmlns:a="http://schemas.openxmlformats.org/drawingml/2006/main" xmlns:p="http://schemas.openxmlformats.org/presentationml/2006/main" xmlns:r="http://schemas.openxmlformats.org/officeDocument/2006/relationships">
+<p:notes xmlns:a="http://schemas.openxmlformats.org/drawingml/2006/main" xmlns:r="http://schemas.openxmlformats.org/officeDocument/2006/relationships" xmlns:p="http://schemas.openxmlformats.org/presentationml/2006/main">
   <p:cSld>
     <p:spTree>
       <p:nvGrpSpPr>
@@ -920,7 +972,7 @@
         <p:nvSpPr>
           <p:cNvPr id="2" name="Slide Image Placeholder 1"/>
           <p:cNvSpPr>
-            <a:spLocks noGrp="1"/>
+            <a:spLocks noGrp="1" noRot="1" noChangeAspect="1"/>
           </p:cNvSpPr>
           <p:nvPr>
             <p:ph type="sldImg" idx="2"/>
@@ -935,7 +987,7 @@
             <a:spLocks noGrp="1"/>
           </p:cNvSpPr>
           <p:nvPr>
-            <p:ph type="body" idx="3" sz="quarter"/>
+            <p:ph type="body" sz="quarter" idx="3"/>
           </p:nvPr>
         </p:nvSpPr>
         <p:spPr/>
@@ -1016,7 +1068,7 @@
             <a:spLocks noGrp="1"/>
           </p:cNvSpPr>
           <p:nvPr>
-            <p:ph type="sldNum" idx="5" sz="quarter"/>
+            <p:ph type="sldNum" sz="quarter" idx="5"/>
           </p:nvPr>
         </p:nvSpPr>
         <p:spPr/>
@@ -1030,7 +1082,7 @@
 </file>
 
 <file path=ppt/notesSlides/notesSlide13.xml><?xml version="1.0" encoding="utf-8"?>
-<p:notes xmlns:a="http://schemas.openxmlformats.org/drawingml/2006/main" xmlns:p="http://schemas.openxmlformats.org/presentationml/2006/main" xmlns:r="http://schemas.openxmlformats.org/officeDocument/2006/relationships">
+<p:notes xmlns:a="http://schemas.openxmlformats.org/drawingml/2006/main" xmlns:r="http://schemas.openxmlformats.org/officeDocument/2006/relationships" xmlns:p="http://schemas.openxmlformats.org/presentationml/2006/main">
   <p:cSld>
     <p:spTree>
       <p:nvGrpSpPr>
@@ -1050,7 +1102,7 @@
         <p:nvSpPr>
           <p:cNvPr id="2" name="Slide Image Placeholder 1"/>
           <p:cNvSpPr>
-            <a:spLocks noGrp="1"/>
+            <a:spLocks noGrp="1" noRot="1" noChangeAspect="1"/>
           </p:cNvSpPr>
           <p:nvPr>
             <p:ph type="sldImg" idx="2"/>
@@ -1065,7 +1117,7 @@
             <a:spLocks noGrp="1"/>
           </p:cNvSpPr>
           <p:nvPr>
-            <p:ph type="body" idx="3" sz="quarter"/>
+            <p:ph type="body" sz="quarter" idx="3"/>
           </p:nvPr>
         </p:nvSpPr>
         <p:spPr/>
@@ -1171,7 +1223,7 @@
             <a:spLocks noGrp="1"/>
           </p:cNvSpPr>
           <p:nvPr>
-            <p:ph type="sldNum" idx="5" sz="quarter"/>
+            <p:ph type="sldNum" sz="quarter" idx="5"/>
           </p:nvPr>
         </p:nvSpPr>
         <p:spPr/>
@@ -1185,7 +1237,7 @@
 </file>
 
 <file path=ppt/notesSlides/notesSlide2.xml><?xml version="1.0" encoding="utf-8"?>
-<p:notes xmlns:a="http://schemas.openxmlformats.org/drawingml/2006/main" xmlns:p="http://schemas.openxmlformats.org/presentationml/2006/main" xmlns:r="http://schemas.openxmlformats.org/officeDocument/2006/relationships">
+<p:notes xmlns:a="http://schemas.openxmlformats.org/drawingml/2006/main" xmlns:r="http://schemas.openxmlformats.org/officeDocument/2006/relationships" xmlns:p="http://schemas.openxmlformats.org/presentationml/2006/main">
   <p:cSld>
     <p:spTree>
       <p:nvGrpSpPr>
@@ -1205,7 +1257,7 @@
         <p:nvSpPr>
           <p:cNvPr id="2" name="Slide Image Placeholder 1"/>
           <p:cNvSpPr>
-            <a:spLocks noGrp="1"/>
+            <a:spLocks noGrp="1" noRot="1" noChangeAspect="1"/>
           </p:cNvSpPr>
           <p:nvPr>
             <p:ph type="sldImg" idx="2"/>
@@ -1220,7 +1272,7 @@
             <a:spLocks noGrp="1"/>
           </p:cNvSpPr>
           <p:nvPr>
-            <p:ph type="body" idx="3" sz="quarter"/>
+            <p:ph type="body" sz="quarter" idx="3"/>
           </p:nvPr>
         </p:nvSpPr>
         <p:spPr/>
@@ -1291,7 +1343,7 @@
             <a:spLocks noGrp="1"/>
           </p:cNvSpPr>
           <p:nvPr>
-            <p:ph type="sldNum" idx="5" sz="quarter"/>
+            <p:ph type="sldNum" sz="quarter" idx="5"/>
           </p:nvPr>
         </p:nvSpPr>
         <p:spPr/>
@@ -1305,7 +1357,7 @@
 </file>
 
 <file path=ppt/notesSlides/notesSlide3.xml><?xml version="1.0" encoding="utf-8"?>
-<p:notes xmlns:a="http://schemas.openxmlformats.org/drawingml/2006/main" xmlns:p="http://schemas.openxmlformats.org/presentationml/2006/main" xmlns:r="http://schemas.openxmlformats.org/officeDocument/2006/relationships">
+<p:notes xmlns:a="http://schemas.openxmlformats.org/drawingml/2006/main" xmlns:r="http://schemas.openxmlformats.org/officeDocument/2006/relationships" xmlns:p="http://schemas.openxmlformats.org/presentationml/2006/main">
   <p:cSld>
     <p:spTree>
       <p:nvGrpSpPr>
@@ -1325,7 +1377,7 @@
         <p:nvSpPr>
           <p:cNvPr id="2" name="Slide Image Placeholder 1"/>
           <p:cNvSpPr>
-            <a:spLocks noGrp="1"/>
+            <a:spLocks noGrp="1" noRot="1" noChangeAspect="1"/>
           </p:cNvSpPr>
           <p:nvPr>
             <p:ph type="sldImg" idx="2"/>
@@ -1340,7 +1392,7 @@
             <a:spLocks noGrp="1"/>
           </p:cNvSpPr>
           <p:nvPr>
-            <p:ph type="body" idx="3" sz="quarter"/>
+            <p:ph type="body" sz="quarter" idx="3"/>
           </p:nvPr>
         </p:nvSpPr>
         <p:spPr/>
@@ -1416,7 +1468,7 @@
             <a:spLocks noGrp="1"/>
           </p:cNvSpPr>
           <p:nvPr>
-            <p:ph type="sldNum" idx="5" sz="quarter"/>
+            <p:ph type="sldNum" sz="quarter" idx="5"/>
           </p:nvPr>
         </p:nvSpPr>
         <p:spPr/>
@@ -1430,7 +1482,7 @@
 </file>
 
 <file path=ppt/notesSlides/notesSlide4.xml><?xml version="1.0" encoding="utf-8"?>
-<p:notes xmlns:a="http://schemas.openxmlformats.org/drawingml/2006/main" xmlns:p="http://schemas.openxmlformats.org/presentationml/2006/main" xmlns:r="http://schemas.openxmlformats.org/officeDocument/2006/relationships">
+<p:notes xmlns:a="http://schemas.openxmlformats.org/drawingml/2006/main" xmlns:r="http://schemas.openxmlformats.org/officeDocument/2006/relationships" xmlns:p="http://schemas.openxmlformats.org/presentationml/2006/main">
   <p:cSld>
     <p:spTree>
       <p:nvGrpSpPr>
@@ -1450,7 +1502,7 @@
         <p:nvSpPr>
           <p:cNvPr id="2" name="Slide Image Placeholder 1"/>
           <p:cNvSpPr>
-            <a:spLocks noGrp="1"/>
+            <a:spLocks noGrp="1" noRot="1" noChangeAspect="1"/>
           </p:cNvSpPr>
           <p:nvPr>
             <p:ph type="sldImg" idx="2"/>
@@ -1465,7 +1517,7 @@
             <a:spLocks noGrp="1"/>
           </p:cNvSpPr>
           <p:nvPr>
-            <p:ph type="body" idx="3" sz="quarter"/>
+            <p:ph type="body" sz="quarter" idx="3"/>
           </p:nvPr>
         </p:nvSpPr>
         <p:spPr/>
@@ -1541,7 +1593,7 @@
             <a:spLocks noGrp="1"/>
           </p:cNvSpPr>
           <p:nvPr>
-            <p:ph type="sldNum" idx="5" sz="quarter"/>
+            <p:ph type="sldNum" sz="quarter" idx="5"/>
           </p:nvPr>
         </p:nvSpPr>
         <p:spPr/>
@@ -1555,7 +1607,7 @@
 </file>
 
 <file path=ppt/notesSlides/notesSlide5.xml><?xml version="1.0" encoding="utf-8"?>
-<p:notes xmlns:a="http://schemas.openxmlformats.org/drawingml/2006/main" xmlns:p="http://schemas.openxmlformats.org/presentationml/2006/main" xmlns:r="http://schemas.openxmlformats.org/officeDocument/2006/relationships">
+<p:notes xmlns:a="http://schemas.openxmlformats.org/drawingml/2006/main" xmlns:r="http://schemas.openxmlformats.org/officeDocument/2006/relationships" xmlns:p="http://schemas.openxmlformats.org/presentationml/2006/main">
   <p:cSld>
     <p:spTree>
       <p:nvGrpSpPr>
@@ -1575,7 +1627,7 @@
         <p:nvSpPr>
           <p:cNvPr id="2" name="Slide Image Placeholder 1"/>
           <p:cNvSpPr>
-            <a:spLocks noGrp="1"/>
+            <a:spLocks noGrp="1" noRot="1" noChangeAspect="1"/>
           </p:cNvSpPr>
           <p:nvPr>
             <p:ph type="sldImg" idx="2"/>
@@ -1590,7 +1642,7 @@
             <a:spLocks noGrp="1"/>
           </p:cNvSpPr>
           <p:nvPr>
-            <p:ph type="body" idx="3" sz="quarter"/>
+            <p:ph type="body" sz="quarter" idx="3"/>
           </p:nvPr>
         </p:nvSpPr>
         <p:spPr/>
@@ -1599,66 +1651,83 @@
           <a:lstStyle/>
           <a:p>
             <a:r>
+              <a:rPr dirty="0"/>
               <a:t>Second half of Section 1 — a strategic argument needs the EXTERNAL industry context, not just the</a:t>
             </a:r>
           </a:p>
           <a:p>
             <a:r>
+              <a:rPr dirty="0"/>
               <a:t>client's internal plan.</a:t>
             </a:r>
           </a:p>
           <a:p>
             <a:r>
+              <a:rPr dirty="0"/>
               <a:t>• First bullet: a plan doesn't exist in a vacuum; compare it against where the industry is heading.</a:t>
             </a:r>
           </a:p>
           <a:p>
             <a:r>
+              <a:rPr dirty="0"/>
               <a:t>• Second bullet: name the trends that matter here — cloud adoption, managed services, OPEX over CAPEX,</a:t>
             </a:r>
           </a:p>
           <a:p>
             <a:r>
+              <a:rPr dirty="0"/>
               <a:t>resilience. These are the yardsticks.</a:t>
             </a:r>
           </a:p>
           <a:p>
             <a:r>
+              <a:rPr dirty="0"/>
               <a:t>• Third/fourth bullets: name BOTH directions — alignment (plan matches industry direction →</a:t>
             </a:r>
           </a:p>
           <a:p>
             <a:r>
+              <a:rPr dirty="0"/>
               <a:t>strengthens the case) and divergence (plan lags or differs → a risk, or an opportunity to flag).</a:t>
             </a:r>
           </a:p>
           <a:p>
             <a:r>
+              <a:rPr dirty="0"/>
               <a:t>Misconception to pre-empt: "industry context = cheerlead for cloud." No — a balanced analysis names</a:t>
             </a:r>
           </a:p>
           <a:p>
             <a:r>
+              <a:rPr dirty="0"/>
               <a:t>where the client is behind AND where a trend might not fit them; honesty is the mark of analysis.</a:t>
             </a:r>
           </a:p>
           <a:p>
             <a:r>
+              <a:rPr dirty="0"/>
               <a:t>Question to pose: "The sector is moving to managed cloud services — where does that ALIGN with YAT's</a:t>
             </a:r>
           </a:p>
           <a:p>
             <a:r>
+              <a:rPr dirty="0"/>
               <a:t>plan, and is there anywhere it might DIVERGE for a small RTO?"</a:t>
             </a:r>
           </a:p>
           <a:p>
             <a:r>
-              <a:t>UoC/AT1 tie: KE 4 (current/emerging trends and directions) → AT1 §3; the outside view is what lifts</a:t>
-            </a:r>
-          </a:p>
-          <a:p>
-            <a:r>
+              <a:rPr dirty="0" err="1"/>
+              <a:t>UoC</a:t>
+            </a:r>
+            <a:r>
+              <a:rPr dirty="0"/>
+              <a:t>/AT1 tie: KE 4 (current/emerging trends and directions) → AT1 §3; the outside view is what lifts</a:t>
+            </a:r>
+          </a:p>
+          <a:p>
+            <a:r>
+              <a:rPr dirty="0"/>
               <a:t>A1 from description to analysis.</a:t>
             </a:r>
           </a:p>
@@ -1671,7 +1740,7 @@
             <a:spLocks noGrp="1"/>
           </p:cNvSpPr>
           <p:nvPr>
-            <p:ph type="sldNum" idx="5" sz="quarter"/>
+            <p:ph type="sldNum" sz="quarter" idx="5"/>
           </p:nvPr>
         </p:nvSpPr>
         <p:spPr/>
@@ -1685,7 +1754,7 @@
 </file>
 
 <file path=ppt/notesSlides/notesSlide6.xml><?xml version="1.0" encoding="utf-8"?>
-<p:notes xmlns:a="http://schemas.openxmlformats.org/drawingml/2006/main" xmlns:p="http://schemas.openxmlformats.org/presentationml/2006/main" xmlns:r="http://schemas.openxmlformats.org/officeDocument/2006/relationships">
+<p:notes xmlns:a="http://schemas.openxmlformats.org/drawingml/2006/main" xmlns:r="http://schemas.openxmlformats.org/officeDocument/2006/relationships" xmlns:p="http://schemas.openxmlformats.org/presentationml/2006/main">
   <p:cSld>
     <p:spTree>
       <p:nvGrpSpPr>
@@ -1705,7 +1774,7 @@
         <p:nvSpPr>
           <p:cNvPr id="2" name="Slide Image Placeholder 1"/>
           <p:cNvSpPr>
-            <a:spLocks noGrp="1"/>
+            <a:spLocks noGrp="1" noRot="1" noChangeAspect="1"/>
           </p:cNvSpPr>
           <p:nvPr>
             <p:ph type="sldImg" idx="2"/>
@@ -1720,7 +1789,7 @@
             <a:spLocks noGrp="1"/>
           </p:cNvSpPr>
           <p:nvPr>
-            <p:ph type="body" idx="3" sz="quarter"/>
+            <p:ph type="body" sz="quarter" idx="3"/>
           </p:nvPr>
         </p:nvSpPr>
         <p:spPr/>
@@ -1729,57 +1798,80 @@
           <a:lstStyle/>
           <a:p>
             <a:r>
+              <a:rPr dirty="0"/>
               <a:t>The quality checklist for Section 1 — read it as the marker's-eye view of a strong §3, right before</a:t>
             </a:r>
           </a:p>
           <a:p>
             <a:r>
+              <a:rPr dirty="0"/>
               <a:t>they attempt it. Keep it short; it's a rubric, not new content.</a:t>
             </a:r>
           </a:p>
           <a:p>
             <a:r>
+              <a:rPr dirty="0"/>
               <a:t>• Every claim CITED to the plan (e.g. "ICT Strategic Plan — ICT Goals") — no unsourced assertions.</a:t>
             </a:r>
           </a:p>
           <a:p>
             <a:r>
+              <a:rPr dirty="0"/>
               <a:t>• MATERIAL items only — not the whole plan recited.</a:t>
             </a:r>
           </a:p>
           <a:p>
             <a:r>
-              <a:t>• TRACES the initiative up to a real organisational goal (the three-layer move).</a:t>
-            </a:r>
-          </a:p>
-          <a:p>
-            <a:r>
+              <a:rPr dirty="0"/>
+              <a:t>• TRACES the initiative up to a real </a:t>
+            </a:r>
+            <a:r>
+              <a:rPr dirty="0" err="1"/>
+              <a:t>organisational</a:t>
+            </a:r>
+            <a:r>
+              <a:rPr dirty="0"/>
+              <a:t> goal (the three-layer move).</a:t>
+            </a:r>
+          </a:p>
+          <a:p>
+            <a:r>
+              <a:rPr dirty="0"/>
               <a:t>• ALIGNMENT AND DIVERGENCE both named (magenta line) — balanced, not cheerleading.</a:t>
             </a:r>
           </a:p>
           <a:p>
             <a:r>
+              <a:rPr dirty="0"/>
               <a:t>Misconception to pre-empt: "more is better." No — a padded §3 that recites the plan scores worse than</a:t>
             </a:r>
           </a:p>
           <a:p>
             <a:r>
+              <a:rPr dirty="0"/>
               <a:t>a tight one that cites four material objectives and traces them.</a:t>
             </a:r>
           </a:p>
           <a:p>
             <a:r>
+              <a:rPr dirty="0"/>
               <a:t>Question to pose: "If I marked your §3, what's the single fastest way to lose marks?" (uncited claims /</a:t>
             </a:r>
           </a:p>
           <a:p>
             <a:r>
+              <a:rPr dirty="0"/>
               <a:t>reciting everything / no divergence named).</a:t>
             </a:r>
           </a:p>
           <a:p>
             <a:r>
-              <a:t>UoC/AT1 tie: this is the A1 acceptance standard for AT1 §3 — hand them the bar before the activity.</a:t>
+              <a:rPr dirty="0" err="1"/>
+              <a:t>UoC</a:t>
+            </a:r>
+            <a:r>
+              <a:rPr dirty="0"/>
+              <a:t>/AT1 tie: this is the A1 acceptance standard for AT1 §3 — hand them the bar before the activity.</a:t>
             </a:r>
           </a:p>
         </p:txBody>
@@ -1791,7 +1883,7 @@
             <a:spLocks noGrp="1"/>
           </p:cNvSpPr>
           <p:nvPr>
-            <p:ph type="sldNum" idx="5" sz="quarter"/>
+            <p:ph type="sldNum" sz="quarter" idx="5"/>
           </p:nvPr>
         </p:nvSpPr>
         <p:spPr/>
@@ -1805,7 +1897,7 @@
 </file>
 
 <file path=ppt/notesSlides/notesSlide7.xml><?xml version="1.0" encoding="utf-8"?>
-<p:notes xmlns:a="http://schemas.openxmlformats.org/drawingml/2006/main" xmlns:p="http://schemas.openxmlformats.org/presentationml/2006/main" xmlns:r="http://schemas.openxmlformats.org/officeDocument/2006/relationships">
+<p:notes xmlns:a="http://schemas.openxmlformats.org/drawingml/2006/main" xmlns:r="http://schemas.openxmlformats.org/officeDocument/2006/relationships" xmlns:p="http://schemas.openxmlformats.org/presentationml/2006/main">
   <p:cSld>
     <p:spTree>
       <p:nvGrpSpPr>
@@ -1825,7 +1917,7 @@
         <p:nvSpPr>
           <p:cNvPr id="2" name="Slide Image Placeholder 1"/>
           <p:cNvSpPr>
-            <a:spLocks noGrp="1"/>
+            <a:spLocks noGrp="1" noRot="1" noChangeAspect="1"/>
           </p:cNvSpPr>
           <p:nvPr>
             <p:ph type="sldImg" idx="2"/>
@@ -1840,7 +1932,7 @@
             <a:spLocks noGrp="1"/>
           </p:cNvSpPr>
           <p:nvPr>
-            <p:ph type="body" idx="3" sz="quarter"/>
+            <p:ph type="body" sz="quarter" idx="3"/>
           </p:nvPr>
         </p:nvSpPr>
         <p:spPr/>
@@ -1936,7 +2028,7 @@
             <a:spLocks noGrp="1"/>
           </p:cNvSpPr>
           <p:nvPr>
-            <p:ph type="sldNum" idx="5" sz="quarter"/>
+            <p:ph type="sldNum" sz="quarter" idx="5"/>
           </p:nvPr>
         </p:nvSpPr>
         <p:spPr/>
@@ -1950,7 +2042,7 @@
 </file>
 
 <file path=ppt/notesSlides/notesSlide8.xml><?xml version="1.0" encoding="utf-8"?>
-<p:notes xmlns:a="http://schemas.openxmlformats.org/drawingml/2006/main" xmlns:p="http://schemas.openxmlformats.org/presentationml/2006/main" xmlns:r="http://schemas.openxmlformats.org/officeDocument/2006/relationships">
+<p:notes xmlns:a="http://schemas.openxmlformats.org/drawingml/2006/main" xmlns:r="http://schemas.openxmlformats.org/officeDocument/2006/relationships" xmlns:p="http://schemas.openxmlformats.org/presentationml/2006/main">
   <p:cSld>
     <p:spTree>
       <p:nvGrpSpPr>
@@ -1970,7 +2062,7 @@
         <p:nvSpPr>
           <p:cNvPr id="2" name="Slide Image Placeholder 1"/>
           <p:cNvSpPr>
-            <a:spLocks noGrp="1"/>
+            <a:spLocks noGrp="1" noRot="1" noChangeAspect="1"/>
           </p:cNvSpPr>
           <p:nvPr>
             <p:ph type="sldImg" idx="2"/>
@@ -1985,7 +2077,7 @@
             <a:spLocks noGrp="1"/>
           </p:cNvSpPr>
           <p:nvPr>
-            <p:ph type="body" idx="3" sz="quarter"/>
+            <p:ph type="body" sz="quarter" idx="3"/>
           </p:nvPr>
         </p:nvSpPr>
         <p:spPr/>
@@ -2066,7 +2158,7 @@
             <a:spLocks noGrp="1"/>
           </p:cNvSpPr>
           <p:nvPr>
-            <p:ph type="sldNum" idx="5" sz="quarter"/>
+            <p:ph type="sldNum" sz="quarter" idx="5"/>
           </p:nvPr>
         </p:nvSpPr>
         <p:spPr/>
@@ -2080,7 +2172,7 @@
 </file>
 
 <file path=ppt/notesSlides/notesSlide9.xml><?xml version="1.0" encoding="utf-8"?>
-<p:notes xmlns:a="http://schemas.openxmlformats.org/drawingml/2006/main" xmlns:p="http://schemas.openxmlformats.org/presentationml/2006/main" xmlns:r="http://schemas.openxmlformats.org/officeDocument/2006/relationships">
+<p:notes xmlns:a="http://schemas.openxmlformats.org/drawingml/2006/main" xmlns:r="http://schemas.openxmlformats.org/officeDocument/2006/relationships" xmlns:p="http://schemas.openxmlformats.org/presentationml/2006/main">
   <p:cSld>
     <p:spTree>
       <p:nvGrpSpPr>
@@ -2100,7 +2192,7 @@
         <p:nvSpPr>
           <p:cNvPr id="2" name="Slide Image Placeholder 1"/>
           <p:cNvSpPr>
-            <a:spLocks noGrp="1"/>
+            <a:spLocks noGrp="1" noRot="1" noChangeAspect="1"/>
           </p:cNvSpPr>
           <p:nvPr>
             <p:ph type="sldImg" idx="2"/>
@@ -2115,7 +2207,7 @@
             <a:spLocks noGrp="1"/>
           </p:cNvSpPr>
           <p:nvPr>
-            <p:ph type="body" idx="3" sz="quarter"/>
+            <p:ph type="body" sz="quarter" idx="3"/>
           </p:nvPr>
         </p:nvSpPr>
         <p:spPr/>
@@ -2191,7 +2283,7 @@
             <a:spLocks noGrp="1"/>
           </p:cNvSpPr>
           <p:nvPr>
-            <p:ph type="sldNum" idx="5" sz="quarter"/>
+            <p:ph type="sldNum" sz="quarter" idx="5"/>
           </p:nvPr>
         </p:nvSpPr>
         <p:spPr/>
@@ -2242,10 +2334,9 @@
           <a:lstStyle/>
           <a:p>
             <a:r>
-              <a:rPr lang="en-US" smtClean="0"/>
+              <a:rPr lang="en-US"/>
               <a:t>Click to edit Master title style</a:t>
             </a:r>
-            <a:endParaRPr lang="en-US"/>
           </a:p>
         </p:txBody>
       </p:sp>
@@ -2361,10 +2452,9 @@
           </a:lstStyle>
           <a:p>
             <a:r>
-              <a:rPr lang="en-US" smtClean="0"/>
+              <a:rPr lang="en-US"/>
               <a:t>Click to edit Master subtitle style</a:t>
             </a:r>
-            <a:endParaRPr lang="en-US"/>
           </a:p>
         </p:txBody>
       </p:sp>
@@ -2385,7 +2475,7 @@
           <a:p>
             <a:fld id="{5BCAD085-E8A6-8845-BD4E-CB4CCA059FC4}" type="datetimeFigureOut">
               <a:rPr lang="en-US" smtClean="0"/>
-              <a:t>1/27/13</a:t>
+              <a:t>7/15/26</a:t>
             </a:fld>
             <a:endParaRPr lang="en-US"/>
           </a:p>
@@ -2479,10 +2569,9 @@
           <a:lstStyle/>
           <a:p>
             <a:r>
-              <a:rPr lang="en-US" smtClean="0"/>
+              <a:rPr lang="en-US"/>
               <a:t>Click to edit Master title style</a:t>
             </a:r>
-            <a:endParaRPr lang="en-US"/>
           </a:p>
         </p:txBody>
       </p:sp>
@@ -2503,38 +2592,37 @@
           <a:p>
             <a:pPr lvl="0"/>
             <a:r>
-              <a:rPr lang="en-US" smtClean="0"/>
+              <a:rPr lang="en-US"/>
               <a:t>Click to edit Master text styles</a:t>
             </a:r>
           </a:p>
           <a:p>
             <a:pPr lvl="1"/>
             <a:r>
-              <a:rPr lang="en-US" smtClean="0"/>
+              <a:rPr lang="en-US"/>
               <a:t>Second level</a:t>
             </a:r>
           </a:p>
           <a:p>
             <a:pPr lvl="2"/>
             <a:r>
-              <a:rPr lang="en-US" smtClean="0"/>
+              <a:rPr lang="en-US"/>
               <a:t>Third level</a:t>
             </a:r>
           </a:p>
           <a:p>
             <a:pPr lvl="3"/>
             <a:r>
-              <a:rPr lang="en-US" smtClean="0"/>
+              <a:rPr lang="en-US"/>
               <a:t>Fourth level</a:t>
             </a:r>
           </a:p>
           <a:p>
             <a:pPr lvl="4"/>
             <a:r>
-              <a:rPr lang="en-US" smtClean="0"/>
+              <a:rPr lang="en-US"/>
               <a:t>Fifth level</a:t>
             </a:r>
-            <a:endParaRPr lang="en-US"/>
           </a:p>
         </p:txBody>
       </p:sp>
@@ -2555,7 +2643,7 @@
           <a:p>
             <a:fld id="{5BCAD085-E8A6-8845-BD4E-CB4CCA059FC4}" type="datetimeFigureOut">
               <a:rPr lang="en-US" smtClean="0"/>
-              <a:t>1/27/13</a:t>
+              <a:t>7/15/26</a:t>
             </a:fld>
             <a:endParaRPr lang="en-US"/>
           </a:p>
@@ -2654,10 +2742,9 @@
           <a:lstStyle/>
           <a:p>
             <a:r>
-              <a:rPr lang="en-US" smtClean="0"/>
+              <a:rPr lang="en-US"/>
               <a:t>Click to edit Master title style</a:t>
             </a:r>
-            <a:endParaRPr lang="en-US"/>
           </a:p>
         </p:txBody>
       </p:sp>
@@ -2683,38 +2770,37 @@
           <a:p>
             <a:pPr lvl="0"/>
             <a:r>
-              <a:rPr lang="en-US" smtClean="0"/>
+              <a:rPr lang="en-US"/>
               <a:t>Click to edit Master text styles</a:t>
             </a:r>
           </a:p>
           <a:p>
             <a:pPr lvl="1"/>
             <a:r>
-              <a:rPr lang="en-US" smtClean="0"/>
+              <a:rPr lang="en-US"/>
               <a:t>Second level</a:t>
             </a:r>
           </a:p>
           <a:p>
             <a:pPr lvl="2"/>
             <a:r>
-              <a:rPr lang="en-US" smtClean="0"/>
+              <a:rPr lang="en-US"/>
               <a:t>Third level</a:t>
             </a:r>
           </a:p>
           <a:p>
             <a:pPr lvl="3"/>
             <a:r>
-              <a:rPr lang="en-US" smtClean="0"/>
+              <a:rPr lang="en-US"/>
               <a:t>Fourth level</a:t>
             </a:r>
           </a:p>
           <a:p>
             <a:pPr lvl="4"/>
             <a:r>
-              <a:rPr lang="en-US" smtClean="0"/>
+              <a:rPr lang="en-US"/>
               <a:t>Fifth level</a:t>
             </a:r>
-            <a:endParaRPr lang="en-US"/>
           </a:p>
         </p:txBody>
       </p:sp>
@@ -2735,7 +2821,7 @@
           <a:p>
             <a:fld id="{5BCAD085-E8A6-8845-BD4E-CB4CCA059FC4}" type="datetimeFigureOut">
               <a:rPr lang="en-US" smtClean="0"/>
-              <a:t>1/27/13</a:t>
+              <a:t>7/15/26</a:t>
             </a:fld>
             <a:endParaRPr lang="en-US"/>
           </a:p>
@@ -2829,10 +2915,9 @@
           <a:lstStyle/>
           <a:p>
             <a:r>
-              <a:rPr lang="en-US" smtClean="0"/>
+              <a:rPr lang="en-US"/>
               <a:t>Click to edit Master title style</a:t>
             </a:r>
-            <a:endParaRPr lang="en-US"/>
           </a:p>
         </p:txBody>
       </p:sp>
@@ -2853,38 +2938,37 @@
           <a:p>
             <a:pPr lvl="0"/>
             <a:r>
-              <a:rPr lang="en-US" smtClean="0"/>
+              <a:rPr lang="en-US"/>
               <a:t>Click to edit Master text styles</a:t>
             </a:r>
           </a:p>
           <a:p>
             <a:pPr lvl="1"/>
             <a:r>
-              <a:rPr lang="en-US" smtClean="0"/>
+              <a:rPr lang="en-US"/>
               <a:t>Second level</a:t>
             </a:r>
           </a:p>
           <a:p>
             <a:pPr lvl="2"/>
             <a:r>
-              <a:rPr lang="en-US" smtClean="0"/>
+              <a:rPr lang="en-US"/>
               <a:t>Third level</a:t>
             </a:r>
           </a:p>
           <a:p>
             <a:pPr lvl="3"/>
             <a:r>
-              <a:rPr lang="en-US" smtClean="0"/>
+              <a:rPr lang="en-US"/>
               <a:t>Fourth level</a:t>
             </a:r>
           </a:p>
           <a:p>
             <a:pPr lvl="4"/>
             <a:r>
-              <a:rPr lang="en-US" smtClean="0"/>
+              <a:rPr lang="en-US"/>
               <a:t>Fifth level</a:t>
             </a:r>
-            <a:endParaRPr lang="en-US"/>
           </a:p>
         </p:txBody>
       </p:sp>
@@ -2905,7 +2989,7 @@
           <a:p>
             <a:fld id="{5BCAD085-E8A6-8845-BD4E-CB4CCA059FC4}" type="datetimeFigureOut">
               <a:rPr lang="en-US" smtClean="0"/>
-              <a:t>1/27/13</a:t>
+              <a:t>7/15/26</a:t>
             </a:fld>
             <a:endParaRPr lang="en-US"/>
           </a:p>
@@ -3008,10 +3092,9 @@
           </a:lstStyle>
           <a:p>
             <a:r>
-              <a:rPr lang="en-US" smtClean="0"/>
+              <a:rPr lang="en-US"/>
               <a:t>Click to edit Master title style</a:t>
             </a:r>
-            <a:endParaRPr lang="en-US"/>
           </a:p>
         </p:txBody>
       </p:sp>
@@ -3128,7 +3211,7 @@
           <a:p>
             <a:pPr lvl="0"/>
             <a:r>
-              <a:rPr lang="en-US" smtClean="0"/>
+              <a:rPr lang="en-US"/>
               <a:t>Click to edit Master text styles</a:t>
             </a:r>
           </a:p>
@@ -3151,7 +3234,7 @@
           <a:p>
             <a:fld id="{5BCAD085-E8A6-8845-BD4E-CB4CCA059FC4}" type="datetimeFigureOut">
               <a:rPr lang="en-US" smtClean="0"/>
-              <a:t>1/27/13</a:t>
+              <a:t>7/15/26</a:t>
             </a:fld>
             <a:endParaRPr lang="en-US"/>
           </a:p>
@@ -3245,10 +3328,9 @@
           <a:lstStyle/>
           <a:p>
             <a:r>
-              <a:rPr lang="en-US" smtClean="0"/>
+              <a:rPr lang="en-US"/>
               <a:t>Click to edit Master title style</a:t>
             </a:r>
-            <a:endParaRPr lang="en-US"/>
           </a:p>
         </p:txBody>
       </p:sp>
@@ -3302,38 +3384,37 @@
           <a:p>
             <a:pPr lvl="0"/>
             <a:r>
-              <a:rPr lang="en-US" smtClean="0"/>
+              <a:rPr lang="en-US"/>
               <a:t>Click to edit Master text styles</a:t>
             </a:r>
           </a:p>
           <a:p>
             <a:pPr lvl="1"/>
             <a:r>
-              <a:rPr lang="en-US" smtClean="0"/>
+              <a:rPr lang="en-US"/>
               <a:t>Second level</a:t>
             </a:r>
           </a:p>
           <a:p>
             <a:pPr lvl="2"/>
             <a:r>
-              <a:rPr lang="en-US" smtClean="0"/>
+              <a:rPr lang="en-US"/>
               <a:t>Third level</a:t>
             </a:r>
           </a:p>
           <a:p>
             <a:pPr lvl="3"/>
             <a:r>
-              <a:rPr lang="en-US" smtClean="0"/>
+              <a:rPr lang="en-US"/>
               <a:t>Fourth level</a:t>
             </a:r>
           </a:p>
           <a:p>
             <a:pPr lvl="4"/>
             <a:r>
-              <a:rPr lang="en-US" smtClean="0"/>
+              <a:rPr lang="en-US"/>
               <a:t>Fifth level</a:t>
             </a:r>
-            <a:endParaRPr lang="en-US"/>
           </a:p>
         </p:txBody>
       </p:sp>
@@ -3387,38 +3468,37 @@
           <a:p>
             <a:pPr lvl="0"/>
             <a:r>
-              <a:rPr lang="en-US" smtClean="0"/>
+              <a:rPr lang="en-US"/>
               <a:t>Click to edit Master text styles</a:t>
             </a:r>
           </a:p>
           <a:p>
             <a:pPr lvl="1"/>
             <a:r>
-              <a:rPr lang="en-US" smtClean="0"/>
+              <a:rPr lang="en-US"/>
               <a:t>Second level</a:t>
             </a:r>
           </a:p>
           <a:p>
             <a:pPr lvl="2"/>
             <a:r>
-              <a:rPr lang="en-US" smtClean="0"/>
+              <a:rPr lang="en-US"/>
               <a:t>Third level</a:t>
             </a:r>
           </a:p>
           <a:p>
             <a:pPr lvl="3"/>
             <a:r>
-              <a:rPr lang="en-US" smtClean="0"/>
+              <a:rPr lang="en-US"/>
               <a:t>Fourth level</a:t>
             </a:r>
           </a:p>
           <a:p>
             <a:pPr lvl="4"/>
             <a:r>
-              <a:rPr lang="en-US" smtClean="0"/>
+              <a:rPr lang="en-US"/>
               <a:t>Fifth level</a:t>
             </a:r>
-            <a:endParaRPr lang="en-US"/>
           </a:p>
         </p:txBody>
       </p:sp>
@@ -3439,7 +3519,7 @@
           <a:p>
             <a:fld id="{5BCAD085-E8A6-8845-BD4E-CB4CCA059FC4}" type="datetimeFigureOut">
               <a:rPr lang="en-US" smtClean="0"/>
-              <a:t>1/27/13</a:t>
+              <a:t>7/15/26</a:t>
             </a:fld>
             <a:endParaRPr lang="en-US"/>
           </a:p>
@@ -3537,10 +3617,9 @@
           </a:lstStyle>
           <a:p>
             <a:r>
-              <a:rPr lang="en-US" smtClean="0"/>
+              <a:rPr lang="en-US"/>
               <a:t>Click to edit Master title style</a:t>
             </a:r>
-            <a:endParaRPr lang="en-US"/>
           </a:p>
         </p:txBody>
       </p:sp>
@@ -3603,7 +3682,7 @@
           <a:p>
             <a:pPr lvl="0"/>
             <a:r>
-              <a:rPr lang="en-US" smtClean="0"/>
+              <a:rPr lang="en-US"/>
               <a:t>Click to edit Master text styles</a:t>
             </a:r>
           </a:p>
@@ -3659,38 +3738,37 @@
           <a:p>
             <a:pPr lvl="0"/>
             <a:r>
-              <a:rPr lang="en-US" smtClean="0"/>
+              <a:rPr lang="en-US"/>
               <a:t>Click to edit Master text styles</a:t>
             </a:r>
           </a:p>
           <a:p>
             <a:pPr lvl="1"/>
             <a:r>
-              <a:rPr lang="en-US" smtClean="0"/>
+              <a:rPr lang="en-US"/>
               <a:t>Second level</a:t>
             </a:r>
           </a:p>
           <a:p>
             <a:pPr lvl="2"/>
             <a:r>
-              <a:rPr lang="en-US" smtClean="0"/>
+              <a:rPr lang="en-US"/>
               <a:t>Third level</a:t>
             </a:r>
           </a:p>
           <a:p>
             <a:pPr lvl="3"/>
             <a:r>
-              <a:rPr lang="en-US" smtClean="0"/>
+              <a:rPr lang="en-US"/>
               <a:t>Fourth level</a:t>
             </a:r>
           </a:p>
           <a:p>
             <a:pPr lvl="4"/>
             <a:r>
-              <a:rPr lang="en-US" smtClean="0"/>
+              <a:rPr lang="en-US"/>
               <a:t>Fifth level</a:t>
             </a:r>
-            <a:endParaRPr lang="en-US"/>
           </a:p>
         </p:txBody>
       </p:sp>
@@ -3753,7 +3831,7 @@
           <a:p>
             <a:pPr lvl="0"/>
             <a:r>
-              <a:rPr lang="en-US" smtClean="0"/>
+              <a:rPr lang="en-US"/>
               <a:t>Click to edit Master text styles</a:t>
             </a:r>
           </a:p>
@@ -3809,38 +3887,37 @@
           <a:p>
             <a:pPr lvl="0"/>
             <a:r>
-              <a:rPr lang="en-US" smtClean="0"/>
+              <a:rPr lang="en-US"/>
               <a:t>Click to edit Master text styles</a:t>
             </a:r>
           </a:p>
           <a:p>
             <a:pPr lvl="1"/>
             <a:r>
-              <a:rPr lang="en-US" smtClean="0"/>
+              <a:rPr lang="en-US"/>
               <a:t>Second level</a:t>
             </a:r>
           </a:p>
           <a:p>
             <a:pPr lvl="2"/>
             <a:r>
-              <a:rPr lang="en-US" smtClean="0"/>
+              <a:rPr lang="en-US"/>
               <a:t>Third level</a:t>
             </a:r>
           </a:p>
           <a:p>
             <a:pPr lvl="3"/>
             <a:r>
-              <a:rPr lang="en-US" smtClean="0"/>
+              <a:rPr lang="en-US"/>
               <a:t>Fourth level</a:t>
             </a:r>
           </a:p>
           <a:p>
             <a:pPr lvl="4"/>
             <a:r>
-              <a:rPr lang="en-US" smtClean="0"/>
+              <a:rPr lang="en-US"/>
               <a:t>Fifth level</a:t>
             </a:r>
-            <a:endParaRPr lang="en-US"/>
           </a:p>
         </p:txBody>
       </p:sp>
@@ -3861,7 +3938,7 @@
           <a:p>
             <a:fld id="{5BCAD085-E8A6-8845-BD4E-CB4CCA059FC4}" type="datetimeFigureOut">
               <a:rPr lang="en-US" smtClean="0"/>
-              <a:t>1/27/13</a:t>
+              <a:t>7/15/26</a:t>
             </a:fld>
             <a:endParaRPr lang="en-US"/>
           </a:p>
@@ -3955,10 +4032,9 @@
           <a:lstStyle/>
           <a:p>
             <a:r>
-              <a:rPr lang="en-US" smtClean="0"/>
+              <a:rPr lang="en-US"/>
               <a:t>Click to edit Master title style</a:t>
             </a:r>
-            <a:endParaRPr lang="en-US"/>
           </a:p>
         </p:txBody>
       </p:sp>
@@ -3979,7 +4055,7 @@
           <a:p>
             <a:fld id="{5BCAD085-E8A6-8845-BD4E-CB4CCA059FC4}" type="datetimeFigureOut">
               <a:rPr lang="en-US" smtClean="0"/>
-              <a:t>1/27/13</a:t>
+              <a:t>7/15/26</a:t>
             </a:fld>
             <a:endParaRPr lang="en-US"/>
           </a:p>
@@ -4074,7 +4150,7 @@
           <a:p>
             <a:fld id="{5BCAD085-E8A6-8845-BD4E-CB4CCA059FC4}" type="datetimeFigureOut">
               <a:rPr lang="en-US" smtClean="0"/>
-              <a:t>1/27/13</a:t>
+              <a:t>7/15/26</a:t>
             </a:fld>
             <a:endParaRPr lang="en-US"/>
           </a:p>
@@ -4177,10 +4253,9 @@
           </a:lstStyle>
           <a:p>
             <a:r>
-              <a:rPr lang="en-US" smtClean="0"/>
+              <a:rPr lang="en-US"/>
               <a:t>Click to edit Master title style</a:t>
             </a:r>
-            <a:endParaRPr lang="en-US"/>
           </a:p>
         </p:txBody>
       </p:sp>
@@ -4234,38 +4309,37 @@
           <a:p>
             <a:pPr lvl="0"/>
             <a:r>
-              <a:rPr lang="en-US" smtClean="0"/>
+              <a:rPr lang="en-US"/>
               <a:t>Click to edit Master text styles</a:t>
             </a:r>
           </a:p>
           <a:p>
             <a:pPr lvl="1"/>
             <a:r>
-              <a:rPr lang="en-US" smtClean="0"/>
+              <a:rPr lang="en-US"/>
               <a:t>Second level</a:t>
             </a:r>
           </a:p>
           <a:p>
             <a:pPr lvl="2"/>
             <a:r>
-              <a:rPr lang="en-US" smtClean="0"/>
+              <a:rPr lang="en-US"/>
               <a:t>Third level</a:t>
             </a:r>
           </a:p>
           <a:p>
             <a:pPr lvl="3"/>
             <a:r>
-              <a:rPr lang="en-US" smtClean="0"/>
+              <a:rPr lang="en-US"/>
               <a:t>Fourth level</a:t>
             </a:r>
           </a:p>
           <a:p>
             <a:pPr lvl="4"/>
             <a:r>
-              <a:rPr lang="en-US" smtClean="0"/>
+              <a:rPr lang="en-US"/>
               <a:t>Fifth level</a:t>
             </a:r>
-            <a:endParaRPr lang="en-US"/>
           </a:p>
         </p:txBody>
       </p:sp>
@@ -4328,7 +4402,7 @@
           <a:p>
             <a:pPr lvl="0"/>
             <a:r>
-              <a:rPr lang="en-US" smtClean="0"/>
+              <a:rPr lang="en-US"/>
               <a:t>Click to edit Master text styles</a:t>
             </a:r>
           </a:p>
@@ -4351,7 +4425,7 @@
           <a:p>
             <a:fld id="{5BCAD085-E8A6-8845-BD4E-CB4CCA059FC4}" type="datetimeFigureOut">
               <a:rPr lang="en-US" smtClean="0"/>
-              <a:t>1/27/13</a:t>
+              <a:t>7/15/26</a:t>
             </a:fld>
             <a:endParaRPr lang="en-US"/>
           </a:p>
@@ -4454,10 +4528,9 @@
           </a:lstStyle>
           <a:p>
             <a:r>
-              <a:rPr lang="en-US" smtClean="0"/>
+              <a:rPr lang="en-US"/>
               <a:t>Click to edit Master title style</a:t>
             </a:r>
-            <a:endParaRPr lang="en-US"/>
           </a:p>
         </p:txBody>
       </p:sp>
@@ -4581,7 +4654,7 @@
           <a:p>
             <a:pPr lvl="0"/>
             <a:r>
-              <a:rPr lang="en-US" smtClean="0"/>
+              <a:rPr lang="en-US"/>
               <a:t>Click to edit Master text styles</a:t>
             </a:r>
           </a:p>
@@ -4604,7 +4677,7 @@
           <a:p>
             <a:fld id="{5BCAD085-E8A6-8845-BD4E-CB4CCA059FC4}" type="datetimeFigureOut">
               <a:rPr lang="en-US" smtClean="0"/>
-              <a:t>1/27/13</a:t>
+              <a:t>7/15/26</a:t>
             </a:fld>
             <a:endParaRPr lang="en-US"/>
           </a:p>
@@ -4713,10 +4786,9 @@
           <a:lstStyle/>
           <a:p>
             <a:r>
-              <a:rPr lang="en-US" smtClean="0"/>
+              <a:rPr lang="en-US"/>
               <a:t>Click to edit Master title style</a:t>
             </a:r>
-            <a:endParaRPr lang="en-US"/>
           </a:p>
         </p:txBody>
       </p:sp>
@@ -4747,38 +4819,37 @@
           <a:p>
             <a:pPr lvl="0"/>
             <a:r>
-              <a:rPr lang="en-US" smtClean="0"/>
+              <a:rPr lang="en-US"/>
               <a:t>Click to edit Master text styles</a:t>
             </a:r>
           </a:p>
           <a:p>
             <a:pPr lvl="1"/>
             <a:r>
-              <a:rPr lang="en-US" smtClean="0"/>
+              <a:rPr lang="en-US"/>
               <a:t>Second level</a:t>
             </a:r>
           </a:p>
           <a:p>
             <a:pPr lvl="2"/>
             <a:r>
-              <a:rPr lang="en-US" smtClean="0"/>
+              <a:rPr lang="en-US"/>
               <a:t>Third level</a:t>
             </a:r>
           </a:p>
           <a:p>
             <a:pPr lvl="3"/>
             <a:r>
-              <a:rPr lang="en-US" smtClean="0"/>
+              <a:rPr lang="en-US"/>
               <a:t>Fourth level</a:t>
             </a:r>
           </a:p>
           <a:p>
             <a:pPr lvl="4"/>
             <a:r>
-              <a:rPr lang="en-US" smtClean="0"/>
+              <a:rPr lang="en-US"/>
               <a:t>Fifth level</a:t>
             </a:r>
-            <a:endParaRPr lang="en-US"/>
           </a:p>
         </p:txBody>
       </p:sp>
@@ -4817,7 +4888,7 @@
           <a:p>
             <a:fld id="{5BCAD085-E8A6-8845-BD4E-CB4CCA059FC4}" type="datetimeFigureOut">
               <a:rPr lang="en-US" smtClean="0"/>
-              <a:t>1/27/13</a:t>
+              <a:t>7/15/26</a:t>
             </a:fld>
             <a:endParaRPr lang="en-US"/>
           </a:p>
@@ -5176,7 +5247,7 @@
 </file>
 
 <file path=ppt/slides/slide1.xml><?xml version="1.0" encoding="utf-8"?>
-<p:sld xmlns:a="http://schemas.openxmlformats.org/drawingml/2006/main" xmlns:p="http://schemas.openxmlformats.org/presentationml/2006/main" xmlns:r="http://schemas.openxmlformats.org/officeDocument/2006/relationships">
+<p:sld xmlns:a="http://schemas.openxmlformats.org/drawingml/2006/main" xmlns:r="http://schemas.openxmlformats.org/officeDocument/2006/relationships" xmlns:p="http://schemas.openxmlformats.org/presentationml/2006/main">
   <p:cSld>
     <p:bg>
       <p:bgPr>
@@ -5192,7 +5263,14 @@
         <p:cNvGrpSpPr/>
         <p:nvPr/>
       </p:nvGrpSpPr>
-      <p:grpSpPr/>
+      <p:grpSpPr>
+        <a:xfrm>
+          <a:off x="0" y="0"/>
+          <a:ext cx="0" cy="0"/>
+          <a:chOff x="0" y="0"/>
+          <a:chExt cx="0" cy="0"/>
+        </a:xfrm>
+      </p:grpSpPr>
       <p:sp>
         <p:nvSpPr>
           <p:cNvPr id="2" name="Rectangle 1"/>
@@ -5234,6 +5312,7 @@
           <a:lstStyle/>
           <a:p>
             <a:pPr algn="ctr"/>
+            <a:endParaRPr/>
           </a:p>
         </p:txBody>
       </p:sp>
@@ -5254,7 +5333,7 @@
           <a:noFill/>
         </p:spPr>
         <p:txBody>
-          <a:bodyPr wrap="square" anchor="t" lIns="0" rIns="0" tIns="0" bIns="0">
+          <a:bodyPr wrap="square" lIns="0" tIns="0" rIns="0" bIns="0" anchor="t">
             <a:spAutoFit/>
           </a:bodyPr>
           <a:lstStyle/>
@@ -5320,7 +5399,7 @@
           <a:noFill/>
         </p:spPr>
         <p:txBody>
-          <a:bodyPr wrap="square" anchor="t" lIns="0" rIns="0" tIns="0" bIns="0">
+          <a:bodyPr wrap="square" lIns="0" tIns="0" rIns="0" bIns="0" anchor="t">
             <a:spAutoFit/>
           </a:bodyPr>
           <a:lstStyle/>
@@ -5355,7 +5434,7 @@
 </file>
 
 <file path=ppt/slides/slide10.xml><?xml version="1.0" encoding="utf-8"?>
-<p:sld xmlns:a="http://schemas.openxmlformats.org/drawingml/2006/main" xmlns:p="http://schemas.openxmlformats.org/presentationml/2006/main" xmlns:r="http://schemas.openxmlformats.org/officeDocument/2006/relationships">
+<p:sld xmlns:a="http://schemas.openxmlformats.org/drawingml/2006/main" xmlns:r="http://schemas.openxmlformats.org/officeDocument/2006/relationships" xmlns:p="http://schemas.openxmlformats.org/presentationml/2006/main">
   <p:cSld>
     <p:bg>
       <p:bgPr>
@@ -5371,7 +5450,14 @@
         <p:cNvGrpSpPr/>
         <p:nvPr/>
       </p:nvGrpSpPr>
-      <p:grpSpPr/>
+      <p:grpSpPr>
+        <a:xfrm>
+          <a:off x="0" y="0"/>
+          <a:ext cx="0" cy="0"/>
+          <a:chOff x="0" y="0"/>
+          <a:chExt cx="0" cy="0"/>
+        </a:xfrm>
+      </p:grpSpPr>
       <p:sp>
         <p:nvSpPr>
           <p:cNvPr id="2" name="TextBox 1"/>
@@ -5389,7 +5475,7 @@
           <a:noFill/>
         </p:spPr>
         <p:txBody>
-          <a:bodyPr wrap="square" anchor="t" lIns="0" rIns="0" tIns="0" bIns="0">
+          <a:bodyPr wrap="square" lIns="0" tIns="0" rIns="0" bIns="0" anchor="t">
             <a:spAutoFit/>
           </a:bodyPr>
           <a:lstStyle/>
@@ -5463,6 +5549,7 @@
           <a:lstStyle/>
           <a:p>
             <a:pPr algn="ctr"/>
+            <a:endParaRPr/>
           </a:p>
         </p:txBody>
       </p:sp>
@@ -5509,6 +5596,7 @@
           <a:lstStyle/>
           <a:p>
             <a:pPr algn="ctr"/>
+            <a:endParaRPr/>
           </a:p>
         </p:txBody>
       </p:sp>
@@ -5553,6 +5641,7 @@
           <a:lstStyle/>
           <a:p>
             <a:pPr algn="ctr"/>
+            <a:endParaRPr/>
           </a:p>
         </p:txBody>
       </p:sp>
@@ -5573,7 +5662,7 @@
           <a:noFill/>
         </p:spPr>
         <p:txBody>
-          <a:bodyPr wrap="square" anchor="ctr" lIns="0" rIns="0" tIns="0" bIns="0">
+          <a:bodyPr wrap="square" lIns="0" tIns="0" rIns="0" bIns="0" anchor="ctr">
             <a:spAutoFit/>
           </a:bodyPr>
           <a:lstStyle/>
@@ -5638,6 +5727,7 @@
           <a:lstStyle/>
           <a:p>
             <a:pPr algn="ctr"/>
+            <a:endParaRPr/>
           </a:p>
         </p:txBody>
       </p:sp>
@@ -5682,6 +5772,7 @@
           <a:lstStyle/>
           <a:p>
             <a:pPr algn="ctr"/>
+            <a:endParaRPr/>
           </a:p>
         </p:txBody>
       </p:sp>
@@ -5702,7 +5793,7 @@
           <a:noFill/>
         </p:spPr>
         <p:txBody>
-          <a:bodyPr wrap="square" anchor="ctr" lIns="0" rIns="0" tIns="0" bIns="0">
+          <a:bodyPr wrap="square" lIns="0" tIns="0" rIns="0" bIns="0" anchor="ctr">
             <a:spAutoFit/>
           </a:bodyPr>
           <a:lstStyle/>
@@ -5767,6 +5858,7 @@
           <a:lstStyle/>
           <a:p>
             <a:pPr algn="ctr"/>
+            <a:endParaRPr/>
           </a:p>
         </p:txBody>
       </p:sp>
@@ -5811,6 +5903,7 @@
           <a:lstStyle/>
           <a:p>
             <a:pPr algn="ctr"/>
+            <a:endParaRPr/>
           </a:p>
         </p:txBody>
       </p:sp>
@@ -5831,7 +5924,7 @@
           <a:noFill/>
         </p:spPr>
         <p:txBody>
-          <a:bodyPr wrap="square" anchor="ctr" lIns="0" rIns="0" tIns="0" bIns="0">
+          <a:bodyPr wrap="square" lIns="0" tIns="0" rIns="0" bIns="0" anchor="ctr">
             <a:spAutoFit/>
           </a:bodyPr>
           <a:lstStyle/>
@@ -5896,6 +5989,7 @@
           <a:lstStyle/>
           <a:p>
             <a:pPr algn="ctr"/>
+            <a:endParaRPr/>
           </a:p>
         </p:txBody>
       </p:sp>
@@ -5940,6 +6034,7 @@
           <a:lstStyle/>
           <a:p>
             <a:pPr algn="ctr"/>
+            <a:endParaRPr/>
           </a:p>
         </p:txBody>
       </p:sp>
@@ -5960,7 +6055,7 @@
           <a:noFill/>
         </p:spPr>
         <p:txBody>
-          <a:bodyPr wrap="square" anchor="ctr" lIns="0" rIns="0" tIns="0" bIns="0">
+          <a:bodyPr wrap="square" lIns="0" tIns="0" rIns="0" bIns="0" anchor="ctr">
             <a:spAutoFit/>
           </a:bodyPr>
           <a:lstStyle/>
@@ -6023,6 +6118,7 @@
           <a:lstStyle/>
           <a:p>
             <a:pPr algn="ctr"/>
+            <a:endParaRPr/>
           </a:p>
         </p:txBody>
       </p:sp>
@@ -6043,7 +6139,7 @@
           <a:noFill/>
         </p:spPr>
         <p:txBody>
-          <a:bodyPr wrap="square" anchor="t" lIns="0" rIns="0" tIns="0" bIns="0">
+          <a:bodyPr wrap="square" lIns="0" tIns="0" rIns="0" bIns="0" anchor="t">
             <a:spAutoFit/>
           </a:bodyPr>
           <a:lstStyle/>
@@ -6086,7 +6182,7 @@
           <a:noFill/>
         </p:spPr>
         <p:txBody>
-          <a:bodyPr wrap="square" anchor="t" lIns="0" rIns="0" tIns="0" bIns="0">
+          <a:bodyPr wrap="square" lIns="0" tIns="0" rIns="0" bIns="0" anchor="t">
             <a:spAutoFit/>
           </a:bodyPr>
           <a:lstStyle/>
@@ -6113,7 +6209,7 @@
 </file>
 
 <file path=ppt/slides/slide11.xml><?xml version="1.0" encoding="utf-8"?>
-<p:sld xmlns:a="http://schemas.openxmlformats.org/drawingml/2006/main" xmlns:p="http://schemas.openxmlformats.org/presentationml/2006/main" xmlns:r="http://schemas.openxmlformats.org/officeDocument/2006/relationships">
+<p:sld xmlns:a="http://schemas.openxmlformats.org/drawingml/2006/main" xmlns:r="http://schemas.openxmlformats.org/officeDocument/2006/relationships" xmlns:p="http://schemas.openxmlformats.org/presentationml/2006/main">
   <p:cSld>
     <p:bg>
       <p:bgPr>
@@ -6129,7 +6225,14 @@
         <p:cNvGrpSpPr/>
         <p:nvPr/>
       </p:nvGrpSpPr>
-      <p:grpSpPr/>
+      <p:grpSpPr>
+        <a:xfrm>
+          <a:off x="0" y="0"/>
+          <a:ext cx="0" cy="0"/>
+          <a:chOff x="0" y="0"/>
+          <a:chExt cx="0" cy="0"/>
+        </a:xfrm>
+      </p:grpSpPr>
       <p:sp>
         <p:nvSpPr>
           <p:cNvPr id="2" name="Rectangle 1"/>
@@ -6171,6 +6274,7 @@
           <a:lstStyle/>
           <a:p>
             <a:pPr algn="ctr"/>
+            <a:endParaRPr/>
           </a:p>
         </p:txBody>
       </p:sp>
@@ -6191,7 +6295,7 @@
           <a:noFill/>
         </p:spPr>
         <p:txBody>
-          <a:bodyPr wrap="square" anchor="t" lIns="0" rIns="0" tIns="0" bIns="0">
+          <a:bodyPr wrap="square" lIns="0" tIns="0" rIns="0" bIns="0" anchor="t">
             <a:spAutoFit/>
           </a:bodyPr>
           <a:lstStyle/>
@@ -6225,7 +6329,7 @@
           <a:noFill/>
         </p:spPr>
         <p:txBody>
-          <a:bodyPr wrap="square" anchor="t" lIns="0" rIns="0" tIns="0" bIns="0">
+          <a:bodyPr wrap="square" lIns="0" tIns="0" rIns="0" bIns="0" anchor="t">
             <a:spAutoFit/>
           </a:bodyPr>
           <a:lstStyle/>
@@ -6315,6 +6419,7 @@
           <a:lstStyle/>
           <a:p>
             <a:pPr algn="ctr"/>
+            <a:endParaRPr/>
           </a:p>
         </p:txBody>
       </p:sp>
@@ -6335,7 +6440,7 @@
           <a:noFill/>
         </p:spPr>
         <p:txBody>
-          <a:bodyPr wrap="square" anchor="t" lIns="0" rIns="0" tIns="0" bIns="0">
+          <a:bodyPr wrap="square" lIns="0" tIns="0" rIns="0" bIns="0" anchor="t">
             <a:spAutoFit/>
           </a:bodyPr>
           <a:lstStyle/>
@@ -6378,21 +6483,13 @@
           <a:noFill/>
         </p:spPr>
         <p:txBody>
-          <a:bodyPr wrap="square" anchor="t" lIns="0" rIns="0" tIns="0" bIns="0">
+          <a:bodyPr wrap="square" lIns="0" tIns="0" rIns="0" bIns="0" anchor="t">
             <a:spAutoFit/>
           </a:bodyPr>
           <a:lstStyle/>
           <a:p>
             <a:pPr algn="r"/>
-            <a:r>
-              <a:rPr sz="1100" b="0" i="0">
-                <a:solidFill>
-                  <a:srgbClr val="7A7A7A"/>
-                </a:solidFill>
-                <a:latin typeface="Roboto"/>
-              </a:rPr>
-              <a:t/>
-            </a:r>
+            <a:endParaRPr/>
           </a:p>
         </p:txBody>
       </p:sp>
@@ -6405,7 +6502,7 @@
 </file>
 
 <file path=ppt/slides/slide12.xml><?xml version="1.0" encoding="utf-8"?>
-<p:sld xmlns:a="http://schemas.openxmlformats.org/drawingml/2006/main" xmlns:p="http://schemas.openxmlformats.org/presentationml/2006/main" xmlns:r="http://schemas.openxmlformats.org/officeDocument/2006/relationships">
+<p:sld xmlns:a="http://schemas.openxmlformats.org/drawingml/2006/main" xmlns:r="http://schemas.openxmlformats.org/officeDocument/2006/relationships" xmlns:p="http://schemas.openxmlformats.org/presentationml/2006/main">
   <p:cSld>
     <p:bg>
       <p:bgPr>
@@ -6421,7 +6518,14 @@
         <p:cNvGrpSpPr/>
         <p:nvPr/>
       </p:nvGrpSpPr>
-      <p:grpSpPr/>
+      <p:grpSpPr>
+        <a:xfrm>
+          <a:off x="0" y="0"/>
+          <a:ext cx="0" cy="0"/>
+          <a:chOff x="0" y="0"/>
+          <a:chExt cx="0" cy="0"/>
+        </a:xfrm>
+      </p:grpSpPr>
       <p:sp>
         <p:nvSpPr>
           <p:cNvPr id="2" name="TextBox 1"/>
@@ -6439,7 +6543,7 @@
           <a:noFill/>
         </p:spPr>
         <p:txBody>
-          <a:bodyPr wrap="square" anchor="t" lIns="0" rIns="0" tIns="0" bIns="0">
+          <a:bodyPr wrap="square" lIns="0" tIns="0" rIns="0" bIns="0" anchor="t">
             <a:spAutoFit/>
           </a:bodyPr>
           <a:lstStyle/>
@@ -6497,6 +6601,7 @@
           <a:lstStyle/>
           <a:p>
             <a:pPr algn="ctr"/>
+            <a:endParaRPr/>
           </a:p>
         </p:txBody>
       </p:sp>
@@ -6508,8 +6613,8 @@
         </p:nvSpPr>
         <p:spPr>
           <a:xfrm>
-            <a:off x="658368" y="1691640"/>
-            <a:ext cx="10881360" cy="4480560"/>
+            <a:off x="658368" y="2684848"/>
+            <a:ext cx="10881360" cy="2494144"/>
           </a:xfrm>
           <a:prstGeom prst="rect">
             <a:avLst/>
@@ -6517,7 +6622,7 @@
           <a:noFill/>
         </p:spPr>
         <p:txBody>
-          <a:bodyPr wrap="square" anchor="ctr" lIns="0" rIns="0" tIns="0" bIns="0">
+          <a:bodyPr wrap="square" lIns="0" tIns="0" rIns="0" bIns="0" anchor="ctr">
             <a:spAutoFit/>
           </a:bodyPr>
           <a:lstStyle/>
@@ -6534,7 +6639,7 @@
               </a:spcAft>
             </a:pPr>
             <a:r>
-              <a:rPr sz="2400" b="1" i="0">
+              <a:rPr sz="2800" b="1" i="0" dirty="0">
                 <a:solidFill>
                   <a:srgbClr val="EDAB0C"/>
                 </a:solidFill>
@@ -6543,13 +6648,22 @@
               <a:t>■  </a:t>
             </a:r>
             <a:r>
-              <a:rPr sz="2400" b="0" i="0">
+              <a:rPr sz="2800" b="0" i="0" dirty="0" err="1">
                 <a:solidFill>
                   <a:srgbClr val="2A2929"/>
                 </a:solidFill>
                 <a:latin typeface="Roboto"/>
               </a:rPr>
-              <a:t>Summarise the current environment in your own words, focused on what's material to this decision.</a:t>
+              <a:t>Summarise</a:t>
+            </a:r>
+            <a:r>
+              <a:rPr sz="2800" b="0" i="0" dirty="0">
+                <a:solidFill>
+                  <a:srgbClr val="2A2929"/>
+                </a:solidFill>
+                <a:latin typeface="Roboto"/>
+              </a:rPr>
+              <a:t> the current environment in your own words, focused on what's material to this decision.</a:t>
             </a:r>
           </a:p>
           <a:p>
@@ -6565,7 +6679,7 @@
               </a:spcAft>
             </a:pPr>
             <a:r>
-              <a:rPr sz="2400" b="1" i="0">
+              <a:rPr sz="2800" b="1" i="0" dirty="0">
                 <a:solidFill>
                   <a:srgbClr val="EDAB0C"/>
                 </a:solidFill>
@@ -6574,7 +6688,7 @@
               <a:t>■  </a:t>
             </a:r>
             <a:r>
-              <a:rPr sz="2400" b="0" i="0">
+              <a:rPr sz="2800" b="0" i="0" dirty="0">
                 <a:solidFill>
                   <a:srgbClr val="2A2929"/>
                 </a:solidFill>
@@ -6596,7 +6710,7 @@
               </a:spcAft>
             </a:pPr>
             <a:r>
-              <a:rPr sz="2400" b="1" i="0">
+              <a:rPr sz="2800" b="1" i="0" dirty="0">
                 <a:solidFill>
                   <a:srgbClr val="EDAB0C"/>
                 </a:solidFill>
@@ -6605,7 +6719,7 @@
               <a:t>■  </a:t>
             </a:r>
             <a:r>
-              <a:rPr sz="2400" b="0" i="0">
+              <a:rPr sz="2800" b="0" i="0" dirty="0">
                 <a:solidFill>
                   <a:srgbClr val="2A2929"/>
                 </a:solidFill>
@@ -6657,6 +6771,7 @@
           <a:lstStyle/>
           <a:p>
             <a:pPr algn="ctr"/>
+            <a:endParaRPr/>
           </a:p>
         </p:txBody>
       </p:sp>
@@ -6677,7 +6792,7 @@
           <a:noFill/>
         </p:spPr>
         <p:txBody>
-          <a:bodyPr wrap="square" anchor="t" lIns="0" rIns="0" tIns="0" bIns="0">
+          <a:bodyPr wrap="square" lIns="0" tIns="0" rIns="0" bIns="0" anchor="t">
             <a:spAutoFit/>
           </a:bodyPr>
           <a:lstStyle/>
@@ -6720,7 +6835,7 @@
           <a:noFill/>
         </p:spPr>
         <p:txBody>
-          <a:bodyPr wrap="square" anchor="t" lIns="0" rIns="0" tIns="0" bIns="0">
+          <a:bodyPr wrap="square" lIns="0" tIns="0" rIns="0" bIns="0" anchor="t">
             <a:spAutoFit/>
           </a:bodyPr>
           <a:lstStyle/>
@@ -6747,7 +6862,7 @@
 </file>
 
 <file path=ppt/slides/slide13.xml><?xml version="1.0" encoding="utf-8"?>
-<p:sld xmlns:a="http://schemas.openxmlformats.org/drawingml/2006/main" xmlns:p="http://schemas.openxmlformats.org/presentationml/2006/main" xmlns:r="http://schemas.openxmlformats.org/officeDocument/2006/relationships">
+<p:sld xmlns:a="http://schemas.openxmlformats.org/drawingml/2006/main" xmlns:r="http://schemas.openxmlformats.org/officeDocument/2006/relationships" xmlns:p="http://schemas.openxmlformats.org/presentationml/2006/main">
   <p:cSld>
     <p:bg>
       <p:bgPr>
@@ -6763,7 +6878,14 @@
         <p:cNvGrpSpPr/>
         <p:nvPr/>
       </p:nvGrpSpPr>
-      <p:grpSpPr/>
+      <p:grpSpPr>
+        <a:xfrm>
+          <a:off x="0" y="0"/>
+          <a:ext cx="0" cy="0"/>
+          <a:chOff x="0" y="0"/>
+          <a:chExt cx="0" cy="0"/>
+        </a:xfrm>
+      </p:grpSpPr>
       <p:sp>
         <p:nvSpPr>
           <p:cNvPr id="2" name="TextBox 1"/>
@@ -6781,7 +6903,7 @@
           <a:noFill/>
         </p:spPr>
         <p:txBody>
-          <a:bodyPr wrap="square" anchor="t" lIns="0" rIns="0" tIns="0" bIns="0">
+          <a:bodyPr wrap="square" lIns="0" tIns="0" rIns="0" bIns="0" anchor="t">
             <a:spAutoFit/>
           </a:bodyPr>
           <a:lstStyle/>
@@ -6855,6 +6977,7 @@
           <a:lstStyle/>
           <a:p>
             <a:pPr algn="ctr"/>
+            <a:endParaRPr/>
           </a:p>
         </p:txBody>
       </p:sp>
@@ -6866,8 +6989,8 @@
         </p:nvSpPr>
         <p:spPr>
           <a:xfrm>
-            <a:off x="658368" y="1691640"/>
-            <a:ext cx="10881360" cy="4480560"/>
+            <a:off x="658368" y="2264669"/>
+            <a:ext cx="10881360" cy="3334503"/>
           </a:xfrm>
           <a:prstGeom prst="rect">
             <a:avLst/>
@@ -6875,7 +6998,7 @@
           <a:noFill/>
         </p:spPr>
         <p:txBody>
-          <a:bodyPr wrap="square" anchor="ctr" lIns="0" rIns="0" tIns="0" bIns="0">
+          <a:bodyPr wrap="square" lIns="0" tIns="0" rIns="0" bIns="0" anchor="ctr">
             <a:spAutoFit/>
           </a:bodyPr>
           <a:lstStyle/>
@@ -6892,7 +7015,7 @@
               </a:spcAft>
             </a:pPr>
             <a:r>
-              <a:rPr sz="2400" b="1" i="0">
+              <a:rPr sz="2800" b="1" i="0" dirty="0">
                 <a:solidFill>
                   <a:srgbClr val="EDAB0C"/>
                 </a:solidFill>
@@ -6901,7 +7024,7 @@
               <a:t>■  </a:t>
             </a:r>
             <a:r>
-              <a:rPr sz="2400" b="0" i="0">
+              <a:rPr sz="2800" b="0" i="0" dirty="0">
                 <a:solidFill>
                   <a:srgbClr val="2A2929"/>
                 </a:solidFill>
@@ -6923,7 +7046,7 @@
               </a:spcAft>
             </a:pPr>
             <a:r>
-              <a:rPr sz="2100" b="0" i="0">
+              <a:rPr sz="2400" b="0" i="0" dirty="0">
                 <a:solidFill>
                   <a:srgbClr val="7A7A7A"/>
                 </a:solidFill>
@@ -6932,7 +7055,7 @@
               <a:t>–  </a:t>
             </a:r>
             <a:r>
-              <a:rPr sz="2100" b="0" i="0">
+              <a:rPr sz="2400" b="0" i="0" dirty="0">
                 <a:solidFill>
                   <a:srgbClr val="2A2929"/>
                 </a:solidFill>
@@ -6954,7 +7077,7 @@
               </a:spcAft>
             </a:pPr>
             <a:r>
-              <a:rPr sz="2400" b="1" i="0">
+              <a:rPr sz="2800" b="1" i="0" dirty="0">
                 <a:solidFill>
                   <a:srgbClr val="EDAB0C"/>
                 </a:solidFill>
@@ -6963,7 +7086,7 @@
               <a:t>■  </a:t>
             </a:r>
             <a:r>
-              <a:rPr sz="2400" b="0" i="0">
+              <a:rPr sz="2800" b="0" i="0" dirty="0">
                 <a:solidFill>
                   <a:srgbClr val="2A2929"/>
                 </a:solidFill>
@@ -6985,7 +7108,7 @@
               </a:spcAft>
             </a:pPr>
             <a:r>
-              <a:rPr sz="2100" b="0" i="0">
+              <a:rPr sz="2400" b="0" i="0" dirty="0">
                 <a:solidFill>
                   <a:srgbClr val="7A7A7A"/>
                 </a:solidFill>
@@ -6994,7 +7117,7 @@
               <a:t>–  </a:t>
             </a:r>
             <a:r>
-              <a:rPr sz="2100" b="0" i="0">
+              <a:rPr sz="2400" b="0" i="0" dirty="0">
                 <a:solidFill>
                   <a:srgbClr val="2A2929"/>
                 </a:solidFill>
@@ -7016,7 +7139,7 @@
               </a:spcAft>
             </a:pPr>
             <a:r>
-              <a:rPr sz="2400" b="1" i="0">
+              <a:rPr sz="2800" b="1" i="0" dirty="0">
                 <a:solidFill>
                   <a:srgbClr val="EDAB0C"/>
                 </a:solidFill>
@@ -7025,7 +7148,7 @@
               <a:t>■  </a:t>
             </a:r>
             <a:r>
-              <a:rPr sz="2400" b="0" i="0">
+              <a:rPr sz="2800" b="0" i="0" dirty="0">
                 <a:solidFill>
                   <a:srgbClr val="2A2929"/>
                 </a:solidFill>
@@ -7077,6 +7200,7 @@
           <a:lstStyle/>
           <a:p>
             <a:pPr algn="ctr"/>
+            <a:endParaRPr/>
           </a:p>
         </p:txBody>
       </p:sp>
@@ -7097,7 +7221,7 @@
           <a:noFill/>
         </p:spPr>
         <p:txBody>
-          <a:bodyPr wrap="square" anchor="t" lIns="0" rIns="0" tIns="0" bIns="0">
+          <a:bodyPr wrap="square" lIns="0" tIns="0" rIns="0" bIns="0" anchor="t">
             <a:spAutoFit/>
           </a:bodyPr>
           <a:lstStyle/>
@@ -7140,7 +7264,7 @@
           <a:noFill/>
         </p:spPr>
         <p:txBody>
-          <a:bodyPr wrap="square" anchor="t" lIns="0" rIns="0" tIns="0" bIns="0">
+          <a:bodyPr wrap="square" lIns="0" tIns="0" rIns="0" bIns="0" anchor="t">
             <a:spAutoFit/>
           </a:bodyPr>
           <a:lstStyle/>
@@ -7167,7 +7291,7 @@
 </file>
 
 <file path=ppt/slides/slide14.xml><?xml version="1.0" encoding="utf-8"?>
-<p:sld xmlns:a="http://schemas.openxmlformats.org/drawingml/2006/main" xmlns:p="http://schemas.openxmlformats.org/presentationml/2006/main" xmlns:r="http://schemas.openxmlformats.org/officeDocument/2006/relationships">
+<p:sld xmlns:a="http://schemas.openxmlformats.org/drawingml/2006/main" xmlns:r="http://schemas.openxmlformats.org/officeDocument/2006/relationships" xmlns:p="http://schemas.openxmlformats.org/presentationml/2006/main">
   <p:cSld>
     <p:bg>
       <p:bgPr>
@@ -7183,7 +7307,14 @@
         <p:cNvGrpSpPr/>
         <p:nvPr/>
       </p:nvGrpSpPr>
-      <p:grpSpPr/>
+      <p:grpSpPr>
+        <a:xfrm>
+          <a:off x="0" y="0"/>
+          <a:ext cx="0" cy="0"/>
+          <a:chOff x="0" y="0"/>
+          <a:chExt cx="0" cy="0"/>
+        </a:xfrm>
+      </p:grpSpPr>
       <p:sp>
         <p:nvSpPr>
           <p:cNvPr id="2" name="TextBox 1"/>
@@ -7201,7 +7332,7 @@
           <a:noFill/>
         </p:spPr>
         <p:txBody>
-          <a:bodyPr wrap="square" anchor="t" lIns="0" rIns="0" tIns="0" bIns="0">
+          <a:bodyPr wrap="square" lIns="0" tIns="0" rIns="0" bIns="0" anchor="t">
             <a:spAutoFit/>
           </a:bodyPr>
           <a:lstStyle/>
@@ -7259,6 +7390,7 @@
           <a:lstStyle/>
           <a:p>
             <a:pPr algn="ctr"/>
+            <a:endParaRPr/>
           </a:p>
         </p:txBody>
       </p:sp>
@@ -7270,8 +7402,8 @@
         </p:nvSpPr>
         <p:spPr>
           <a:xfrm>
-            <a:off x="658368" y="1691640"/>
-            <a:ext cx="10881360" cy="4480560"/>
+            <a:off x="658368" y="2168296"/>
+            <a:ext cx="10881360" cy="3527248"/>
           </a:xfrm>
           <a:prstGeom prst="rect">
             <a:avLst/>
@@ -7279,7 +7411,7 @@
           <a:noFill/>
         </p:spPr>
         <p:txBody>
-          <a:bodyPr wrap="square" anchor="ctr" lIns="0" rIns="0" tIns="0" bIns="0">
+          <a:bodyPr wrap="square" lIns="0" tIns="0" rIns="0" bIns="0" anchor="ctr">
             <a:spAutoFit/>
           </a:bodyPr>
           <a:lstStyle/>
@@ -7296,7 +7428,7 @@
               </a:spcAft>
             </a:pPr>
             <a:r>
-              <a:rPr sz="2400" b="1" i="0">
+              <a:rPr sz="2800" b="1" i="0" dirty="0">
                 <a:solidFill>
                   <a:srgbClr val="EDAB0C"/>
                 </a:solidFill>
@@ -7305,7 +7437,7 @@
               <a:t>■  </a:t>
             </a:r>
             <a:r>
-              <a:rPr sz="2400" b="0" i="0">
+              <a:rPr sz="2800" b="0" i="0" dirty="0">
                 <a:solidFill>
                   <a:srgbClr val="2A2929"/>
                 </a:solidFill>
@@ -7327,7 +7459,7 @@
               </a:spcAft>
             </a:pPr>
             <a:r>
-              <a:rPr sz="2400" b="1" i="0">
+              <a:rPr sz="2800" b="1" i="0" dirty="0">
                 <a:solidFill>
                   <a:srgbClr val="EDAB0C"/>
                 </a:solidFill>
@@ -7336,7 +7468,7 @@
               <a:t>■  </a:t>
             </a:r>
             <a:r>
-              <a:rPr sz="2400" b="0" i="0">
+              <a:rPr sz="2800" b="0" i="0" dirty="0">
                 <a:solidFill>
                   <a:srgbClr val="2A2929"/>
                 </a:solidFill>
@@ -7358,7 +7490,7 @@
               </a:spcAft>
             </a:pPr>
             <a:r>
-              <a:rPr sz="2400" b="1" i="0">
+              <a:rPr sz="2800" b="1" i="0" dirty="0">
                 <a:solidFill>
                   <a:srgbClr val="EDAB0C"/>
                 </a:solidFill>
@@ -7367,7 +7499,7 @@
               <a:t>■  </a:t>
             </a:r>
             <a:r>
-              <a:rPr sz="2400" b="0" i="0">
+              <a:rPr sz="2800" b="0" i="0" dirty="0">
                 <a:solidFill>
                   <a:srgbClr val="2A2929"/>
                 </a:solidFill>
@@ -7389,7 +7521,7 @@
               </a:spcAft>
             </a:pPr>
             <a:r>
-              <a:rPr sz="2400" b="1" i="0">
+              <a:rPr sz="2800" b="1" i="0" dirty="0">
                 <a:solidFill>
                   <a:srgbClr val="EDAB0C"/>
                 </a:solidFill>
@@ -7398,7 +7530,7 @@
               <a:t>■  </a:t>
             </a:r>
             <a:r>
-              <a:rPr sz="2400" b="0" i="0">
+              <a:rPr sz="2800" b="0" i="0" dirty="0">
                 <a:solidFill>
                   <a:srgbClr val="2A2929"/>
                 </a:solidFill>
@@ -7450,6 +7582,7 @@
           <a:lstStyle/>
           <a:p>
             <a:pPr algn="ctr"/>
+            <a:endParaRPr/>
           </a:p>
         </p:txBody>
       </p:sp>
@@ -7470,7 +7603,7 @@
           <a:noFill/>
         </p:spPr>
         <p:txBody>
-          <a:bodyPr wrap="square" anchor="t" lIns="0" rIns="0" tIns="0" bIns="0">
+          <a:bodyPr wrap="square" lIns="0" tIns="0" rIns="0" bIns="0" anchor="t">
             <a:spAutoFit/>
           </a:bodyPr>
           <a:lstStyle/>
@@ -7513,7 +7646,7 @@
           <a:noFill/>
         </p:spPr>
         <p:txBody>
-          <a:bodyPr wrap="square" anchor="t" lIns="0" rIns="0" tIns="0" bIns="0">
+          <a:bodyPr wrap="square" lIns="0" tIns="0" rIns="0" bIns="0" anchor="t">
             <a:spAutoFit/>
           </a:bodyPr>
           <a:lstStyle/>
@@ -7540,7 +7673,7 @@
 </file>
 
 <file path=ppt/slides/slide15.xml><?xml version="1.0" encoding="utf-8"?>
-<p:sld xmlns:a="http://schemas.openxmlformats.org/drawingml/2006/main" xmlns:p="http://schemas.openxmlformats.org/presentationml/2006/main" xmlns:r="http://schemas.openxmlformats.org/officeDocument/2006/relationships">
+<p:sld xmlns:a="http://schemas.openxmlformats.org/drawingml/2006/main" xmlns:r="http://schemas.openxmlformats.org/officeDocument/2006/relationships" xmlns:p="http://schemas.openxmlformats.org/presentationml/2006/main">
   <p:cSld>
     <p:bg>
       <p:bgPr>
@@ -7556,7 +7689,14 @@
         <p:cNvGrpSpPr/>
         <p:nvPr/>
       </p:nvGrpSpPr>
-      <p:grpSpPr/>
+      <p:grpSpPr>
+        <a:xfrm>
+          <a:off x="0" y="0"/>
+          <a:ext cx="0" cy="0"/>
+          <a:chOff x="0" y="0"/>
+          <a:chExt cx="0" cy="0"/>
+        </a:xfrm>
+      </p:grpSpPr>
       <p:sp>
         <p:nvSpPr>
           <p:cNvPr id="2" name="Rectangle 1"/>
@@ -7598,6 +7738,7 @@
           <a:lstStyle/>
           <a:p>
             <a:pPr algn="ctr"/>
+            <a:endParaRPr/>
           </a:p>
         </p:txBody>
       </p:sp>
@@ -7671,7 +7812,7 @@
           <a:noFill/>
         </p:spPr>
         <p:txBody>
-          <a:bodyPr wrap="square" anchor="ctr" lIns="0" rIns="0" tIns="0" bIns="0">
+          <a:bodyPr wrap="square" lIns="0" tIns="0" rIns="0" bIns="0" anchor="ctr">
             <a:spAutoFit/>
           </a:bodyPr>
           <a:lstStyle/>
@@ -7697,7 +7838,7 @@
         <p:spPr>
           <a:xfrm>
             <a:off x="658368" y="1554480"/>
-            <a:ext cx="10881360" cy="4297680"/>
+            <a:ext cx="10881360" cy="2991909"/>
           </a:xfrm>
           <a:prstGeom prst="rect">
             <a:avLst/>
@@ -7705,7 +7846,7 @@
           <a:noFill/>
         </p:spPr>
         <p:txBody>
-          <a:bodyPr wrap="square" anchor="t" lIns="0" rIns="0" tIns="0" bIns="0">
+          <a:bodyPr wrap="square" lIns="0" tIns="0" rIns="0" bIns="0" anchor="t">
             <a:spAutoFit/>
           </a:bodyPr>
           <a:lstStyle/>
@@ -7722,7 +7863,7 @@
               </a:spcAft>
             </a:pPr>
             <a:r>
-              <a:rPr sz="1700" b="1" i="0">
+              <a:rPr b="1" i="0" dirty="0">
                 <a:solidFill>
                   <a:srgbClr val="EDAB0C"/>
                 </a:solidFill>
@@ -7731,7 +7872,7 @@
               <a:t>■  </a:t>
             </a:r>
             <a:r>
-              <a:rPr sz="1700" b="0" i="0">
+              <a:rPr b="0" i="0" dirty="0">
                 <a:solidFill>
                   <a:srgbClr val="2A2929"/>
                 </a:solidFill>
@@ -7753,7 +7894,7 @@
               </a:spcAft>
             </a:pPr>
             <a:r>
-              <a:rPr sz="1700" b="1" i="0">
+              <a:rPr b="1" i="0" dirty="0">
                 <a:solidFill>
                   <a:srgbClr val="EDAB0C"/>
                 </a:solidFill>
@@ -7762,7 +7903,7 @@
               <a:t>■  </a:t>
             </a:r>
             <a:r>
-              <a:rPr sz="1700" b="0" i="0">
+              <a:rPr b="0" i="0" dirty="0">
                 <a:solidFill>
                   <a:srgbClr val="2A2929"/>
                 </a:solidFill>
@@ -7784,7 +7925,7 @@
               </a:spcAft>
             </a:pPr>
             <a:r>
-              <a:rPr sz="1400" b="0" i="0">
+              <a:rPr sz="1600" b="0" i="0" dirty="0">
                 <a:solidFill>
                   <a:srgbClr val="7A7A7A"/>
                 </a:solidFill>
@@ -7793,7 +7934,7 @@
               <a:t>–  </a:t>
             </a:r>
             <a:r>
-              <a:rPr sz="1400" b="0" i="0">
+              <a:rPr sz="1600" b="0" i="0" dirty="0">
                 <a:solidFill>
                   <a:srgbClr val="2A2929"/>
                 </a:solidFill>
@@ -7815,7 +7956,7 @@
               </a:spcAft>
             </a:pPr>
             <a:r>
-              <a:rPr sz="1400" b="0" i="0">
+              <a:rPr sz="1600" b="0" i="0" dirty="0">
                 <a:solidFill>
                   <a:srgbClr val="7A7A7A"/>
                 </a:solidFill>
@@ -7824,7 +7965,7 @@
               <a:t>–  </a:t>
             </a:r>
             <a:r>
-              <a:rPr sz="1400" b="0" i="0">
+              <a:rPr sz="1600" b="0" i="0" dirty="0">
                 <a:solidFill>
                   <a:srgbClr val="2A2929"/>
                 </a:solidFill>
@@ -7846,7 +7987,7 @@
               </a:spcAft>
             </a:pPr>
             <a:r>
-              <a:rPr sz="1700" b="1" i="0">
+              <a:rPr b="1" i="0" dirty="0">
                 <a:solidFill>
                   <a:srgbClr val="EDAB0C"/>
                 </a:solidFill>
@@ -7855,7 +7996,7 @@
               <a:t>■  </a:t>
             </a:r>
             <a:r>
-              <a:rPr sz="1700" b="0" i="0">
+              <a:rPr b="0" i="0" dirty="0">
                 <a:solidFill>
                   <a:srgbClr val="2A2929"/>
                 </a:solidFill>
@@ -7877,7 +8018,7 @@
               </a:spcAft>
             </a:pPr>
             <a:r>
-              <a:rPr sz="1700" b="1" i="0">
+              <a:rPr b="1" i="0" dirty="0">
                 <a:solidFill>
                   <a:srgbClr val="EDAB0C"/>
                 </a:solidFill>
@@ -7886,13 +8027,31 @@
               <a:t>■  </a:t>
             </a:r>
             <a:r>
-              <a:rPr sz="1700" b="0" i="0">
+              <a:rPr b="0" i="0" dirty="0">
                 <a:solidFill>
                   <a:srgbClr val="2A2929"/>
                 </a:solidFill>
                 <a:latin typeface="Roboto"/>
               </a:rPr>
-              <a:t>⚠  Material only — synthesise in your own words, no verbatim copying.</a:t>
+              <a:t>⚠  Material only — </a:t>
+            </a:r>
+            <a:r>
+              <a:rPr b="0" i="0" dirty="0" err="1">
+                <a:solidFill>
+                  <a:srgbClr val="2A2929"/>
+                </a:solidFill>
+                <a:latin typeface="Roboto"/>
+              </a:rPr>
+              <a:t>synthesise</a:t>
+            </a:r>
+            <a:r>
+              <a:rPr b="0" i="0" dirty="0">
+                <a:solidFill>
+                  <a:srgbClr val="2A2929"/>
+                </a:solidFill>
+                <a:latin typeface="Roboto"/>
+              </a:rPr>
+              <a:t> in your own words, no verbatim copying.</a:t>
             </a:r>
           </a:p>
         </p:txBody>
@@ -7940,6 +8099,7 @@
           <a:lstStyle/>
           <a:p>
             <a:pPr algn="ctr"/>
+            <a:endParaRPr/>
           </a:p>
         </p:txBody>
       </p:sp>
@@ -7960,7 +8120,7 @@
           <a:noFill/>
         </p:spPr>
         <p:txBody>
-          <a:bodyPr wrap="square" anchor="ctr" lIns="0" rIns="0" tIns="0" bIns="0">
+          <a:bodyPr wrap="square" lIns="0" tIns="0" rIns="0" bIns="0" anchor="ctr">
             <a:spAutoFit/>
           </a:bodyPr>
           <a:lstStyle/>
@@ -8018,6 +8178,7 @@
           <a:lstStyle/>
           <a:p>
             <a:pPr algn="ctr"/>
+            <a:endParaRPr/>
           </a:p>
         </p:txBody>
       </p:sp>
@@ -8038,7 +8199,7 @@
           <a:noFill/>
         </p:spPr>
         <p:txBody>
-          <a:bodyPr wrap="square" anchor="t" lIns="0" rIns="0" tIns="0" bIns="0">
+          <a:bodyPr wrap="square" lIns="0" tIns="0" rIns="0" bIns="0" anchor="t">
             <a:spAutoFit/>
           </a:bodyPr>
           <a:lstStyle/>
@@ -8081,7 +8242,7 @@
           <a:noFill/>
         </p:spPr>
         <p:txBody>
-          <a:bodyPr wrap="square" anchor="t" lIns="0" rIns="0" tIns="0" bIns="0">
+          <a:bodyPr wrap="square" lIns="0" tIns="0" rIns="0" bIns="0" anchor="t">
             <a:spAutoFit/>
           </a:bodyPr>
           <a:lstStyle/>
@@ -8108,7 +8269,7 @@
 </file>
 
 <file path=ppt/slides/slide16.xml><?xml version="1.0" encoding="utf-8"?>
-<p:sld xmlns:a="http://schemas.openxmlformats.org/drawingml/2006/main" xmlns:p="http://schemas.openxmlformats.org/presentationml/2006/main" xmlns:r="http://schemas.openxmlformats.org/officeDocument/2006/relationships">
+<p:sld xmlns:a="http://schemas.openxmlformats.org/drawingml/2006/main" xmlns:r="http://schemas.openxmlformats.org/officeDocument/2006/relationships" xmlns:p="http://schemas.openxmlformats.org/presentationml/2006/main">
   <p:cSld>
     <p:bg>
       <p:bgPr>
@@ -8124,7 +8285,14 @@
         <p:cNvGrpSpPr/>
         <p:nvPr/>
       </p:nvGrpSpPr>
-      <p:grpSpPr/>
+      <p:grpSpPr>
+        <a:xfrm>
+          <a:off x="0" y="0"/>
+          <a:ext cx="0" cy="0"/>
+          <a:chOff x="0" y="0"/>
+          <a:chExt cx="0" cy="0"/>
+        </a:xfrm>
+      </p:grpSpPr>
       <p:sp>
         <p:nvSpPr>
           <p:cNvPr id="2" name="TextBox 1"/>
@@ -8142,7 +8310,7 @@
           <a:noFill/>
         </p:spPr>
         <p:txBody>
-          <a:bodyPr wrap="square" anchor="t" lIns="0" rIns="0" tIns="0" bIns="0">
+          <a:bodyPr wrap="square" lIns="0" tIns="0" rIns="0" bIns="0" anchor="t">
             <a:spAutoFit/>
           </a:bodyPr>
           <a:lstStyle/>
@@ -8216,6 +8384,7 @@
           <a:lstStyle/>
           <a:p>
             <a:pPr algn="ctr"/>
+            <a:endParaRPr/>
           </a:p>
         </p:txBody>
       </p:sp>
@@ -8262,6 +8431,7 @@
           <a:lstStyle/>
           <a:p>
             <a:pPr algn="ctr"/>
+            <a:endParaRPr/>
           </a:p>
         </p:txBody>
       </p:sp>
@@ -8306,6 +8476,7 @@
           <a:lstStyle/>
           <a:p>
             <a:pPr algn="ctr"/>
+            <a:endParaRPr/>
           </a:p>
         </p:txBody>
       </p:sp>
@@ -8326,7 +8497,7 @@
           <a:noFill/>
         </p:spPr>
         <p:txBody>
-          <a:bodyPr wrap="square" anchor="ctr" lIns="0" rIns="0" tIns="0" bIns="0">
+          <a:bodyPr wrap="square" lIns="0" tIns="0" rIns="0" bIns="0" anchor="ctr">
             <a:spAutoFit/>
           </a:bodyPr>
           <a:lstStyle/>
@@ -8391,6 +8562,7 @@
           <a:lstStyle/>
           <a:p>
             <a:pPr algn="ctr"/>
+            <a:endParaRPr/>
           </a:p>
         </p:txBody>
       </p:sp>
@@ -8435,6 +8607,7 @@
           <a:lstStyle/>
           <a:p>
             <a:pPr algn="ctr"/>
+            <a:endParaRPr/>
           </a:p>
         </p:txBody>
       </p:sp>
@@ -8455,7 +8628,7 @@
           <a:noFill/>
         </p:spPr>
         <p:txBody>
-          <a:bodyPr wrap="square" anchor="ctr" lIns="0" rIns="0" tIns="0" bIns="0">
+          <a:bodyPr wrap="square" lIns="0" tIns="0" rIns="0" bIns="0" anchor="ctr">
             <a:spAutoFit/>
           </a:bodyPr>
           <a:lstStyle/>
@@ -8520,6 +8693,7 @@
           <a:lstStyle/>
           <a:p>
             <a:pPr algn="ctr"/>
+            <a:endParaRPr/>
           </a:p>
         </p:txBody>
       </p:sp>
@@ -8564,6 +8738,7 @@
           <a:lstStyle/>
           <a:p>
             <a:pPr algn="ctr"/>
+            <a:endParaRPr/>
           </a:p>
         </p:txBody>
       </p:sp>
@@ -8584,7 +8759,7 @@
           <a:noFill/>
         </p:spPr>
         <p:txBody>
-          <a:bodyPr wrap="square" anchor="ctr" lIns="0" rIns="0" tIns="0" bIns="0">
+          <a:bodyPr wrap="square" lIns="0" tIns="0" rIns="0" bIns="0" anchor="ctr">
             <a:spAutoFit/>
           </a:bodyPr>
           <a:lstStyle/>
@@ -8647,6 +8822,7 @@
           <a:lstStyle/>
           <a:p>
             <a:pPr algn="ctr"/>
+            <a:endParaRPr/>
           </a:p>
         </p:txBody>
       </p:sp>
@@ -8667,7 +8843,7 @@
           <a:noFill/>
         </p:spPr>
         <p:txBody>
-          <a:bodyPr wrap="square" anchor="t" lIns="0" rIns="0" tIns="0" bIns="0">
+          <a:bodyPr wrap="square" lIns="0" tIns="0" rIns="0" bIns="0" anchor="t">
             <a:spAutoFit/>
           </a:bodyPr>
           <a:lstStyle/>
@@ -8710,7 +8886,7 @@
           <a:noFill/>
         </p:spPr>
         <p:txBody>
-          <a:bodyPr wrap="square" anchor="t" lIns="0" rIns="0" tIns="0" bIns="0">
+          <a:bodyPr wrap="square" lIns="0" tIns="0" rIns="0" bIns="0" anchor="t">
             <a:spAutoFit/>
           </a:bodyPr>
           <a:lstStyle/>
@@ -8737,7 +8913,7 @@
 </file>
 
 <file path=ppt/slides/slide17.xml><?xml version="1.0" encoding="utf-8"?>
-<p:sld xmlns:a="http://schemas.openxmlformats.org/drawingml/2006/main" xmlns:p="http://schemas.openxmlformats.org/presentationml/2006/main" xmlns:r="http://schemas.openxmlformats.org/officeDocument/2006/relationships">
+<p:sld xmlns:a="http://schemas.openxmlformats.org/drawingml/2006/main" xmlns:r="http://schemas.openxmlformats.org/officeDocument/2006/relationships" xmlns:p="http://schemas.openxmlformats.org/presentationml/2006/main">
   <p:cSld>
     <p:bg>
       <p:bgPr>
@@ -8753,7 +8929,14 @@
         <p:cNvGrpSpPr/>
         <p:nvPr/>
       </p:nvGrpSpPr>
-      <p:grpSpPr/>
+      <p:grpSpPr>
+        <a:xfrm>
+          <a:off x="0" y="0"/>
+          <a:ext cx="0" cy="0"/>
+          <a:chOff x="0" y="0"/>
+          <a:chExt cx="0" cy="0"/>
+        </a:xfrm>
+      </p:grpSpPr>
       <p:sp>
         <p:nvSpPr>
           <p:cNvPr id="2" name="Rectangle 1"/>
@@ -8795,6 +8978,7 @@
           <a:lstStyle/>
           <a:p>
             <a:pPr algn="ctr"/>
+            <a:endParaRPr/>
           </a:p>
         </p:txBody>
       </p:sp>
@@ -8815,7 +8999,7 @@
           <a:noFill/>
         </p:spPr>
         <p:txBody>
-          <a:bodyPr wrap="square" anchor="t" lIns="0" rIns="0" tIns="0" bIns="0">
+          <a:bodyPr wrap="square" lIns="0" tIns="0" rIns="0" bIns="0" anchor="t">
             <a:spAutoFit/>
           </a:bodyPr>
           <a:lstStyle/>
@@ -8849,7 +9033,7 @@
           <a:noFill/>
         </p:spPr>
         <p:txBody>
-          <a:bodyPr wrap="square" anchor="t" lIns="0" rIns="0" tIns="0" bIns="0">
+          <a:bodyPr wrap="square" lIns="0" tIns="0" rIns="0" bIns="0" anchor="t">
             <a:spAutoFit/>
           </a:bodyPr>
           <a:lstStyle/>
@@ -8939,6 +9123,7 @@
           <a:lstStyle/>
           <a:p>
             <a:pPr algn="ctr"/>
+            <a:endParaRPr/>
           </a:p>
         </p:txBody>
       </p:sp>
@@ -8959,7 +9144,7 @@
           <a:noFill/>
         </p:spPr>
         <p:txBody>
-          <a:bodyPr wrap="square" anchor="t" lIns="0" rIns="0" tIns="0" bIns="0">
+          <a:bodyPr wrap="square" lIns="0" tIns="0" rIns="0" bIns="0" anchor="t">
             <a:spAutoFit/>
           </a:bodyPr>
           <a:lstStyle/>
@@ -9002,21 +9187,13 @@
           <a:noFill/>
         </p:spPr>
         <p:txBody>
-          <a:bodyPr wrap="square" anchor="t" lIns="0" rIns="0" tIns="0" bIns="0">
+          <a:bodyPr wrap="square" lIns="0" tIns="0" rIns="0" bIns="0" anchor="t">
             <a:spAutoFit/>
           </a:bodyPr>
           <a:lstStyle/>
           <a:p>
             <a:pPr algn="r"/>
-            <a:r>
-              <a:rPr sz="1100" b="0" i="0">
-                <a:solidFill>
-                  <a:srgbClr val="7A7A7A"/>
-                </a:solidFill>
-                <a:latin typeface="Roboto"/>
-              </a:rPr>
-              <a:t/>
-            </a:r>
+            <a:endParaRPr/>
           </a:p>
         </p:txBody>
       </p:sp>
@@ -9029,7 +9206,7 @@
 </file>
 
 <file path=ppt/slides/slide18.xml><?xml version="1.0" encoding="utf-8"?>
-<p:sld xmlns:a="http://schemas.openxmlformats.org/drawingml/2006/main" xmlns:p="http://schemas.openxmlformats.org/presentationml/2006/main" xmlns:r="http://schemas.openxmlformats.org/officeDocument/2006/relationships">
+<p:sld xmlns:a="http://schemas.openxmlformats.org/drawingml/2006/main" xmlns:r="http://schemas.openxmlformats.org/officeDocument/2006/relationships" xmlns:p="http://schemas.openxmlformats.org/presentationml/2006/main">
   <p:cSld>
     <p:bg>
       <p:bgPr>
@@ -9045,7 +9222,14 @@
         <p:cNvGrpSpPr/>
         <p:nvPr/>
       </p:nvGrpSpPr>
-      <p:grpSpPr/>
+      <p:grpSpPr>
+        <a:xfrm>
+          <a:off x="0" y="0"/>
+          <a:ext cx="0" cy="0"/>
+          <a:chOff x="0" y="0"/>
+          <a:chExt cx="0" cy="0"/>
+        </a:xfrm>
+      </p:grpSpPr>
       <p:sp>
         <p:nvSpPr>
           <p:cNvPr id="2" name="TextBox 1"/>
@@ -9063,7 +9247,7 @@
           <a:noFill/>
         </p:spPr>
         <p:txBody>
-          <a:bodyPr wrap="square" anchor="t" lIns="0" rIns="0" tIns="0" bIns="0">
+          <a:bodyPr wrap="square" lIns="0" tIns="0" rIns="0" bIns="0" anchor="t">
             <a:spAutoFit/>
           </a:bodyPr>
           <a:lstStyle/>
@@ -9121,6 +9305,7 @@
           <a:lstStyle/>
           <a:p>
             <a:pPr algn="ctr"/>
+            <a:endParaRPr/>
           </a:p>
         </p:txBody>
       </p:sp>
@@ -9132,8 +9317,8 @@
         </p:nvSpPr>
         <p:spPr>
           <a:xfrm>
-            <a:off x="658368" y="1691640"/>
-            <a:ext cx="10881360" cy="4480560"/>
+            <a:off x="658368" y="2620727"/>
+            <a:ext cx="10881360" cy="2622385"/>
           </a:xfrm>
           <a:prstGeom prst="rect">
             <a:avLst/>
@@ -9141,7 +9326,7 @@
           <a:noFill/>
         </p:spPr>
         <p:txBody>
-          <a:bodyPr wrap="square" anchor="ctr" lIns="0" rIns="0" tIns="0" bIns="0">
+          <a:bodyPr wrap="square" lIns="0" tIns="0" rIns="0" bIns="0" anchor="ctr">
             <a:spAutoFit/>
           </a:bodyPr>
           <a:lstStyle/>
@@ -9158,7 +9343,7 @@
               </a:spcAft>
             </a:pPr>
             <a:r>
-              <a:rPr sz="2400" b="1" i="0">
+              <a:rPr sz="2800" b="1" i="0" dirty="0">
                 <a:solidFill>
                   <a:srgbClr val="EDAB0C"/>
                 </a:solidFill>
@@ -9167,7 +9352,7 @@
               <a:t>■  </a:t>
             </a:r>
             <a:r>
-              <a:rPr sz="2400" b="0" i="0">
+              <a:rPr sz="2800" b="0" i="0" dirty="0">
                 <a:solidFill>
                   <a:srgbClr val="2A2929"/>
                 </a:solidFill>
@@ -9189,7 +9374,7 @@
               </a:spcAft>
             </a:pPr>
             <a:r>
-              <a:rPr sz="2400" b="1" i="0">
+              <a:rPr sz="2800" b="1" i="0" dirty="0">
                 <a:solidFill>
                   <a:srgbClr val="EDAB0C"/>
                 </a:solidFill>
@@ -9198,7 +9383,7 @@
               <a:t>■  </a:t>
             </a:r>
             <a:r>
-              <a:rPr sz="2400" b="0" i="0">
+              <a:rPr sz="2800" b="0" i="0" dirty="0">
                 <a:solidFill>
                   <a:srgbClr val="2A2929"/>
                 </a:solidFill>
@@ -9220,7 +9405,7 @@
               </a:spcAft>
             </a:pPr>
             <a:r>
-              <a:rPr sz="2400" b="1" i="0">
+              <a:rPr sz="2800" b="1" i="0" dirty="0">
                 <a:solidFill>
                   <a:srgbClr val="EDAB0C"/>
                 </a:solidFill>
@@ -9229,7 +9414,7 @@
               <a:t>■  </a:t>
             </a:r>
             <a:r>
-              <a:rPr sz="2400" b="0" i="0">
+              <a:rPr sz="2800" b="0" i="0" dirty="0">
                 <a:solidFill>
                   <a:srgbClr val="2A2929"/>
                 </a:solidFill>
@@ -9251,7 +9436,7 @@
               </a:spcAft>
             </a:pPr>
             <a:r>
-              <a:rPr sz="2400" b="1" i="0">
+              <a:rPr sz="2800" b="1" i="0" dirty="0">
                 <a:solidFill>
                   <a:srgbClr val="EDAB0C"/>
                 </a:solidFill>
@@ -9260,7 +9445,7 @@
               <a:t>■  </a:t>
             </a:r>
             <a:r>
-              <a:rPr sz="2400" b="0" i="0">
+              <a:rPr sz="2800" b="0" i="0" dirty="0">
                 <a:solidFill>
                   <a:srgbClr val="2A2929"/>
                 </a:solidFill>
@@ -9312,6 +9497,7 @@
           <a:lstStyle/>
           <a:p>
             <a:pPr algn="ctr"/>
+            <a:endParaRPr/>
           </a:p>
         </p:txBody>
       </p:sp>
@@ -9332,7 +9518,7 @@
           <a:noFill/>
         </p:spPr>
         <p:txBody>
-          <a:bodyPr wrap="square" anchor="t" lIns="0" rIns="0" tIns="0" bIns="0">
+          <a:bodyPr wrap="square" lIns="0" tIns="0" rIns="0" bIns="0" anchor="t">
             <a:spAutoFit/>
           </a:bodyPr>
           <a:lstStyle/>
@@ -9375,7 +9561,7 @@
           <a:noFill/>
         </p:spPr>
         <p:txBody>
-          <a:bodyPr wrap="square" anchor="t" lIns="0" rIns="0" tIns="0" bIns="0">
+          <a:bodyPr wrap="square" lIns="0" tIns="0" rIns="0" bIns="0" anchor="t">
             <a:spAutoFit/>
           </a:bodyPr>
           <a:lstStyle/>
@@ -9402,7 +9588,7 @@
 </file>
 
 <file path=ppt/slides/slide19.xml><?xml version="1.0" encoding="utf-8"?>
-<p:sld xmlns:a="http://schemas.openxmlformats.org/drawingml/2006/main" xmlns:p="http://schemas.openxmlformats.org/presentationml/2006/main" xmlns:r="http://schemas.openxmlformats.org/officeDocument/2006/relationships">
+<p:sld xmlns:a="http://schemas.openxmlformats.org/drawingml/2006/main" xmlns:r="http://schemas.openxmlformats.org/officeDocument/2006/relationships" xmlns:p="http://schemas.openxmlformats.org/presentationml/2006/main">
   <p:cSld>
     <p:bg>
       <p:bgPr>
@@ -9418,7 +9604,14 @@
         <p:cNvGrpSpPr/>
         <p:nvPr/>
       </p:nvGrpSpPr>
-      <p:grpSpPr/>
+      <p:grpSpPr>
+        <a:xfrm>
+          <a:off x="0" y="0"/>
+          <a:ext cx="0" cy="0"/>
+          <a:chOff x="0" y="0"/>
+          <a:chExt cx="0" cy="0"/>
+        </a:xfrm>
+      </p:grpSpPr>
       <p:sp>
         <p:nvSpPr>
           <p:cNvPr id="2" name="TextBox 1"/>
@@ -9436,7 +9629,7 @@
           <a:noFill/>
         </p:spPr>
         <p:txBody>
-          <a:bodyPr wrap="square" anchor="t" lIns="0" rIns="0" tIns="0" bIns="0">
+          <a:bodyPr wrap="square" lIns="0" tIns="0" rIns="0" bIns="0" anchor="t">
             <a:spAutoFit/>
           </a:bodyPr>
           <a:lstStyle/>
@@ -9510,6 +9703,7 @@
           <a:lstStyle/>
           <a:p>
             <a:pPr algn="ctr"/>
+            <a:endParaRPr/>
           </a:p>
         </p:txBody>
       </p:sp>
@@ -9532,12 +9726,48 @@
                 <a:tableStyleId>{5C22544A-7EE6-4342-B048-85BDC9FD1C3A}</a:tableStyleId>
               </a:tblPr>
               <a:tblGrid>
-                <a:gridCol w="1813560"/>
-                <a:gridCol w="1813560"/>
-                <a:gridCol w="1813560"/>
-                <a:gridCol w="1813560"/>
-                <a:gridCol w="1813560"/>
-                <a:gridCol w="1813560"/>
+                <a:gridCol w="1813560">
+                  <a:extLst>
+                    <a:ext uri="{9D8B030D-6E8A-4147-A177-3AD203B41FA5}">
+                      <a16:colId xmlns:a16="http://schemas.microsoft.com/office/drawing/2014/main" val="20000"/>
+                    </a:ext>
+                  </a:extLst>
+                </a:gridCol>
+                <a:gridCol w="1813560">
+                  <a:extLst>
+                    <a:ext uri="{9D8B030D-6E8A-4147-A177-3AD203B41FA5}">
+                      <a16:colId xmlns:a16="http://schemas.microsoft.com/office/drawing/2014/main" val="20001"/>
+                    </a:ext>
+                  </a:extLst>
+                </a:gridCol>
+                <a:gridCol w="1813560">
+                  <a:extLst>
+                    <a:ext uri="{9D8B030D-6E8A-4147-A177-3AD203B41FA5}">
+                      <a16:colId xmlns:a16="http://schemas.microsoft.com/office/drawing/2014/main" val="20002"/>
+                    </a:ext>
+                  </a:extLst>
+                </a:gridCol>
+                <a:gridCol w="1813560">
+                  <a:extLst>
+                    <a:ext uri="{9D8B030D-6E8A-4147-A177-3AD203B41FA5}">
+                      <a16:colId xmlns:a16="http://schemas.microsoft.com/office/drawing/2014/main" val="20003"/>
+                    </a:ext>
+                  </a:extLst>
+                </a:gridCol>
+                <a:gridCol w="1813560">
+                  <a:extLst>
+                    <a:ext uri="{9D8B030D-6E8A-4147-A177-3AD203B41FA5}">
+                      <a16:colId xmlns:a16="http://schemas.microsoft.com/office/drawing/2014/main" val="20004"/>
+                    </a:ext>
+                  </a:extLst>
+                </a:gridCol>
+                <a:gridCol w="1813560">
+                  <a:extLst>
+                    <a:ext uri="{9D8B030D-6E8A-4147-A177-3AD203B41FA5}">
+                      <a16:colId xmlns:a16="http://schemas.microsoft.com/office/drawing/2014/main" val="20005"/>
+                    </a:ext>
+                  </a:extLst>
+                </a:gridCol>
               </a:tblGrid>
               <a:tr h="457200">
                 <a:tc>
@@ -9672,6 +9902,11 @@
                     </a:solidFill>
                   </a:tcPr>
                 </a:tc>
+                <a:extLst>
+                  <a:ext uri="{0D108BD9-81ED-4DB2-BD59-A6C34878D82A}">
+                    <a16:rowId xmlns:a16="http://schemas.microsoft.com/office/drawing/2014/main" val="10000"/>
+                  </a:ext>
+                </a:extLst>
               </a:tr>
             </a:tbl>
           </a:graphicData>
@@ -9694,7 +9929,7 @@
           <a:noFill/>
         </p:spPr>
         <p:txBody>
-          <a:bodyPr wrap="square" anchor="t" lIns="0" rIns="0" tIns="0" bIns="0">
+          <a:bodyPr wrap="square" lIns="0" tIns="0" rIns="0" bIns="0" anchor="t">
             <a:spAutoFit/>
           </a:bodyPr>
           <a:lstStyle/>
@@ -9752,6 +9987,7 @@
           <a:lstStyle/>
           <a:p>
             <a:pPr algn="ctr"/>
+            <a:endParaRPr/>
           </a:p>
         </p:txBody>
       </p:sp>
@@ -9772,7 +10008,7 @@
           <a:noFill/>
         </p:spPr>
         <p:txBody>
-          <a:bodyPr wrap="square" anchor="t" lIns="0" rIns="0" tIns="0" bIns="0">
+          <a:bodyPr wrap="square" lIns="0" tIns="0" rIns="0" bIns="0" anchor="t">
             <a:spAutoFit/>
           </a:bodyPr>
           <a:lstStyle/>
@@ -9815,7 +10051,7 @@
           <a:noFill/>
         </p:spPr>
         <p:txBody>
-          <a:bodyPr wrap="square" anchor="t" lIns="0" rIns="0" tIns="0" bIns="0">
+          <a:bodyPr wrap="square" lIns="0" tIns="0" rIns="0" bIns="0" anchor="t">
             <a:spAutoFit/>
           </a:bodyPr>
           <a:lstStyle/>
@@ -9842,7 +10078,7 @@
 </file>
 
 <file path=ppt/slides/slide2.xml><?xml version="1.0" encoding="utf-8"?>
-<p:sld xmlns:a="http://schemas.openxmlformats.org/drawingml/2006/main" xmlns:p="http://schemas.openxmlformats.org/presentationml/2006/main" xmlns:r="http://schemas.openxmlformats.org/officeDocument/2006/relationships">
+<p:sld xmlns:a="http://schemas.openxmlformats.org/drawingml/2006/main" xmlns:r="http://schemas.openxmlformats.org/officeDocument/2006/relationships" xmlns:p="http://schemas.openxmlformats.org/presentationml/2006/main">
   <p:cSld>
     <p:bg>
       <p:bgPr>
@@ -9858,7 +10094,14 @@
         <p:cNvGrpSpPr/>
         <p:nvPr/>
       </p:nvGrpSpPr>
-      <p:grpSpPr/>
+      <p:grpSpPr>
+        <a:xfrm>
+          <a:off x="0" y="0"/>
+          <a:ext cx="0" cy="0"/>
+          <a:chOff x="0" y="0"/>
+          <a:chExt cx="0" cy="0"/>
+        </a:xfrm>
+      </p:grpSpPr>
       <p:sp>
         <p:nvSpPr>
           <p:cNvPr id="2" name="TextBox 1"/>
@@ -9876,7 +10119,7 @@
           <a:noFill/>
         </p:spPr>
         <p:txBody>
-          <a:bodyPr wrap="square" anchor="t" lIns="0" rIns="0" tIns="0" bIns="0">
+          <a:bodyPr wrap="square" lIns="0" tIns="0" rIns="0" bIns="0" anchor="t">
             <a:spAutoFit/>
           </a:bodyPr>
           <a:lstStyle/>
@@ -9950,6 +10193,7 @@
           <a:lstStyle/>
           <a:p>
             <a:pPr algn="ctr"/>
+            <a:endParaRPr/>
           </a:p>
         </p:txBody>
       </p:sp>
@@ -9970,7 +10214,7 @@
           <a:noFill/>
         </p:spPr>
         <p:txBody>
-          <a:bodyPr wrap="square" anchor="ctr" lIns="0" rIns="0" tIns="0" bIns="0">
+          <a:bodyPr wrap="square" lIns="0" tIns="0" rIns="0" bIns="0" anchor="ctr">
             <a:spAutoFit/>
           </a:bodyPr>
           <a:lstStyle/>
@@ -10141,6 +10385,7 @@
           <a:lstStyle/>
           <a:p>
             <a:pPr algn="ctr"/>
+            <a:endParaRPr/>
           </a:p>
         </p:txBody>
       </p:sp>
@@ -10161,7 +10406,7 @@
           <a:noFill/>
         </p:spPr>
         <p:txBody>
-          <a:bodyPr wrap="square" anchor="t" lIns="0" rIns="0" tIns="0" bIns="0">
+          <a:bodyPr wrap="square" lIns="0" tIns="0" rIns="0" bIns="0" anchor="t">
             <a:spAutoFit/>
           </a:bodyPr>
           <a:lstStyle/>
@@ -10204,7 +10449,7 @@
           <a:noFill/>
         </p:spPr>
         <p:txBody>
-          <a:bodyPr wrap="square" anchor="t" lIns="0" rIns="0" tIns="0" bIns="0">
+          <a:bodyPr wrap="square" lIns="0" tIns="0" rIns="0" bIns="0" anchor="t">
             <a:spAutoFit/>
           </a:bodyPr>
           <a:lstStyle/>
@@ -10231,7 +10476,7 @@
 </file>
 
 <file path=ppt/slides/slide20.xml><?xml version="1.0" encoding="utf-8"?>
-<p:sld xmlns:a="http://schemas.openxmlformats.org/drawingml/2006/main" xmlns:p="http://schemas.openxmlformats.org/presentationml/2006/main" xmlns:r="http://schemas.openxmlformats.org/officeDocument/2006/relationships">
+<p:sld xmlns:a="http://schemas.openxmlformats.org/drawingml/2006/main" xmlns:r="http://schemas.openxmlformats.org/officeDocument/2006/relationships" xmlns:p="http://schemas.openxmlformats.org/presentationml/2006/main">
   <p:cSld>
     <p:bg>
       <p:bgPr>
@@ -10247,7 +10492,14 @@
         <p:cNvGrpSpPr/>
         <p:nvPr/>
       </p:nvGrpSpPr>
-      <p:grpSpPr/>
+      <p:grpSpPr>
+        <a:xfrm>
+          <a:off x="0" y="0"/>
+          <a:ext cx="0" cy="0"/>
+          <a:chOff x="0" y="0"/>
+          <a:chExt cx="0" cy="0"/>
+        </a:xfrm>
+      </p:grpSpPr>
       <p:sp>
         <p:nvSpPr>
           <p:cNvPr id="2" name="TextBox 1"/>
@@ -10265,7 +10517,7 @@
           <a:noFill/>
         </p:spPr>
         <p:txBody>
-          <a:bodyPr wrap="square" anchor="t" lIns="0" rIns="0" tIns="0" bIns="0">
+          <a:bodyPr wrap="square" lIns="0" tIns="0" rIns="0" bIns="0" anchor="t">
             <a:spAutoFit/>
           </a:bodyPr>
           <a:lstStyle/>
@@ -10339,6 +10591,7 @@
           <a:lstStyle/>
           <a:p>
             <a:pPr algn="ctr"/>
+            <a:endParaRPr/>
           </a:p>
         </p:txBody>
       </p:sp>
@@ -10361,8 +10614,20 @@
                 <a:tableStyleId>{5C22544A-7EE6-4342-B048-85BDC9FD1C3A}</a:tableStyleId>
               </a:tblPr>
               <a:tblGrid>
-                <a:gridCol w="5440680"/>
-                <a:gridCol w="5440680"/>
+                <a:gridCol w="5440680">
+                  <a:extLst>
+                    <a:ext uri="{9D8B030D-6E8A-4147-A177-3AD203B41FA5}">
+                      <a16:colId xmlns:a16="http://schemas.microsoft.com/office/drawing/2014/main" val="20000"/>
+                    </a:ext>
+                  </a:extLst>
+                </a:gridCol>
+                <a:gridCol w="5440680">
+                  <a:extLst>
+                    <a:ext uri="{9D8B030D-6E8A-4147-A177-3AD203B41FA5}">
+                      <a16:colId xmlns:a16="http://schemas.microsoft.com/office/drawing/2014/main" val="20001"/>
+                    </a:ext>
+                  </a:extLst>
+                </a:gridCol>
               </a:tblGrid>
               <a:tr h="457200">
                 <a:tc>
@@ -10409,6 +10674,11 @@
                     </a:solidFill>
                   </a:tcPr>
                 </a:tc>
+                <a:extLst>
+                  <a:ext uri="{0D108BD9-81ED-4DB2-BD59-A6C34878D82A}">
+                    <a16:rowId xmlns:a16="http://schemas.microsoft.com/office/drawing/2014/main" val="10000"/>
+                  </a:ext>
+                </a:extLst>
               </a:tr>
               <a:tr h="457200">
                 <a:tc>
@@ -10455,6 +10725,11 @@
                     </a:solidFill>
                   </a:tcPr>
                 </a:tc>
+                <a:extLst>
+                  <a:ext uri="{0D108BD9-81ED-4DB2-BD59-A6C34878D82A}">
+                    <a16:rowId xmlns:a16="http://schemas.microsoft.com/office/drawing/2014/main" val="10001"/>
+                  </a:ext>
+                </a:extLst>
               </a:tr>
               <a:tr h="457200">
                 <a:tc>
@@ -10501,6 +10776,11 @@
                     </a:solidFill>
                   </a:tcPr>
                 </a:tc>
+                <a:extLst>
+                  <a:ext uri="{0D108BD9-81ED-4DB2-BD59-A6C34878D82A}">
+                    <a16:rowId xmlns:a16="http://schemas.microsoft.com/office/drawing/2014/main" val="10002"/>
+                  </a:ext>
+                </a:extLst>
               </a:tr>
               <a:tr h="457200">
                 <a:tc>
@@ -10547,6 +10827,11 @@
                     </a:solidFill>
                   </a:tcPr>
                 </a:tc>
+                <a:extLst>
+                  <a:ext uri="{0D108BD9-81ED-4DB2-BD59-A6C34878D82A}">
+                    <a16:rowId xmlns:a16="http://schemas.microsoft.com/office/drawing/2014/main" val="10003"/>
+                  </a:ext>
+                </a:extLst>
               </a:tr>
               <a:tr h="457200">
                 <a:tc>
@@ -10593,6 +10878,11 @@
                     </a:solidFill>
                   </a:tcPr>
                 </a:tc>
+                <a:extLst>
+                  <a:ext uri="{0D108BD9-81ED-4DB2-BD59-A6C34878D82A}">
+                    <a16:rowId xmlns:a16="http://schemas.microsoft.com/office/drawing/2014/main" val="10004"/>
+                  </a:ext>
+                </a:extLst>
               </a:tr>
               <a:tr h="457200">
                 <a:tc>
@@ -10639,6 +10929,11 @@
                     </a:solidFill>
                   </a:tcPr>
                 </a:tc>
+                <a:extLst>
+                  <a:ext uri="{0D108BD9-81ED-4DB2-BD59-A6C34878D82A}">
+                    <a16:rowId xmlns:a16="http://schemas.microsoft.com/office/drawing/2014/main" val="10005"/>
+                  </a:ext>
+                </a:extLst>
               </a:tr>
               <a:tr h="457200">
                 <a:tc>
@@ -10685,6 +10980,11 @@
                     </a:solidFill>
                   </a:tcPr>
                 </a:tc>
+                <a:extLst>
+                  <a:ext uri="{0D108BD9-81ED-4DB2-BD59-A6C34878D82A}">
+                    <a16:rowId xmlns:a16="http://schemas.microsoft.com/office/drawing/2014/main" val="10006"/>
+                  </a:ext>
+                </a:extLst>
               </a:tr>
             </a:tbl>
           </a:graphicData>
@@ -10707,7 +11007,7 @@
           <a:noFill/>
         </p:spPr>
         <p:txBody>
-          <a:bodyPr wrap="square" anchor="t" lIns="0" rIns="0" tIns="0" bIns="0">
+          <a:bodyPr wrap="square" lIns="0" tIns="0" rIns="0" bIns="0" anchor="t">
             <a:spAutoFit/>
           </a:bodyPr>
           <a:lstStyle/>
@@ -10765,6 +11065,7 @@
           <a:lstStyle/>
           <a:p>
             <a:pPr algn="ctr"/>
+            <a:endParaRPr/>
           </a:p>
         </p:txBody>
       </p:sp>
@@ -10785,7 +11086,7 @@
           <a:noFill/>
         </p:spPr>
         <p:txBody>
-          <a:bodyPr wrap="square" anchor="t" lIns="0" rIns="0" tIns="0" bIns="0">
+          <a:bodyPr wrap="square" lIns="0" tIns="0" rIns="0" bIns="0" anchor="t">
             <a:spAutoFit/>
           </a:bodyPr>
           <a:lstStyle/>
@@ -10828,7 +11129,7 @@
           <a:noFill/>
         </p:spPr>
         <p:txBody>
-          <a:bodyPr wrap="square" anchor="t" lIns="0" rIns="0" tIns="0" bIns="0">
+          <a:bodyPr wrap="square" lIns="0" tIns="0" rIns="0" bIns="0" anchor="t">
             <a:spAutoFit/>
           </a:bodyPr>
           <a:lstStyle/>
@@ -10855,7 +11156,7 @@
 </file>
 
 <file path=ppt/slides/slide21.xml><?xml version="1.0" encoding="utf-8"?>
-<p:sld xmlns:a="http://schemas.openxmlformats.org/drawingml/2006/main" xmlns:p="http://schemas.openxmlformats.org/presentationml/2006/main" xmlns:r="http://schemas.openxmlformats.org/officeDocument/2006/relationships">
+<p:sld xmlns:a="http://schemas.openxmlformats.org/drawingml/2006/main" xmlns:r="http://schemas.openxmlformats.org/officeDocument/2006/relationships" xmlns:p="http://schemas.openxmlformats.org/presentationml/2006/main">
   <p:cSld>
     <p:bg>
       <p:bgPr>
@@ -10871,7 +11172,14 @@
         <p:cNvGrpSpPr/>
         <p:nvPr/>
       </p:nvGrpSpPr>
-      <p:grpSpPr/>
+      <p:grpSpPr>
+        <a:xfrm>
+          <a:off x="0" y="0"/>
+          <a:ext cx="0" cy="0"/>
+          <a:chOff x="0" y="0"/>
+          <a:chExt cx="0" cy="0"/>
+        </a:xfrm>
+      </p:grpSpPr>
       <p:sp>
         <p:nvSpPr>
           <p:cNvPr id="2" name="Rectangle 1"/>
@@ -10913,6 +11221,7 @@
           <a:lstStyle/>
           <a:p>
             <a:pPr algn="ctr"/>
+            <a:endParaRPr/>
           </a:p>
         </p:txBody>
       </p:sp>
@@ -10986,7 +11295,7 @@
           <a:noFill/>
         </p:spPr>
         <p:txBody>
-          <a:bodyPr wrap="square" anchor="ctr" lIns="0" rIns="0" tIns="0" bIns="0">
+          <a:bodyPr wrap="square" lIns="0" tIns="0" rIns="0" bIns="0" anchor="ctr">
             <a:spAutoFit/>
           </a:bodyPr>
           <a:lstStyle/>
@@ -11012,7 +11321,7 @@
         <p:spPr>
           <a:xfrm>
             <a:off x="658368" y="1554480"/>
-            <a:ext cx="10881360" cy="4297680"/>
+            <a:ext cx="10881360" cy="3120150"/>
           </a:xfrm>
           <a:prstGeom prst="rect">
             <a:avLst/>
@@ -11020,7 +11329,7 @@
           <a:noFill/>
         </p:spPr>
         <p:txBody>
-          <a:bodyPr wrap="square" anchor="t" lIns="0" rIns="0" tIns="0" bIns="0">
+          <a:bodyPr wrap="square" lIns="0" tIns="0" rIns="0" bIns="0" anchor="t">
             <a:spAutoFit/>
           </a:bodyPr>
           <a:lstStyle/>
@@ -11037,7 +11346,7 @@
               </a:spcAft>
             </a:pPr>
             <a:r>
-              <a:rPr sz="1700" b="1" i="0">
+              <a:rPr b="1" i="0" dirty="0">
                 <a:solidFill>
                   <a:srgbClr val="EDAB0C"/>
                 </a:solidFill>
@@ -11046,7 +11355,7 @@
               <a:t>■  </a:t>
             </a:r>
             <a:r>
-              <a:rPr sz="1700" b="0" i="0">
+              <a:rPr b="0" i="0" dirty="0">
                 <a:solidFill>
                   <a:srgbClr val="2A2929"/>
                 </a:solidFill>
@@ -11068,7 +11377,7 @@
               </a:spcAft>
             </a:pPr>
             <a:r>
-              <a:rPr sz="1700" b="1" i="0">
+              <a:rPr b="1" i="0" dirty="0">
                 <a:solidFill>
                   <a:srgbClr val="EDAB0C"/>
                 </a:solidFill>
@@ -11077,7 +11386,7 @@
               <a:t>■  </a:t>
             </a:r>
             <a:r>
-              <a:rPr sz="1700" b="0" i="0">
+              <a:rPr b="0" i="0" dirty="0">
                 <a:solidFill>
                   <a:srgbClr val="2A2929"/>
                 </a:solidFill>
@@ -11099,7 +11408,7 @@
               </a:spcAft>
             </a:pPr>
             <a:r>
-              <a:rPr sz="1400" b="0" i="0">
+              <a:rPr sz="1600" b="0" i="0" dirty="0">
                 <a:solidFill>
                   <a:srgbClr val="7A7A7A"/>
                 </a:solidFill>
@@ -11108,7 +11417,7 @@
               <a:t>–  </a:t>
             </a:r>
             <a:r>
-              <a:rPr sz="1400" b="0" i="0">
+              <a:rPr sz="1600" b="0" i="0" dirty="0">
                 <a:solidFill>
                   <a:srgbClr val="2A2929"/>
                 </a:solidFill>
@@ -11130,7 +11439,7 @@
               </a:spcAft>
             </a:pPr>
             <a:r>
-              <a:rPr sz="1400" b="0" i="0">
+              <a:rPr sz="1600" b="0" i="0" dirty="0">
                 <a:solidFill>
                   <a:srgbClr val="7A7A7A"/>
                 </a:solidFill>
@@ -11139,7 +11448,7 @@
               <a:t>–  </a:t>
             </a:r>
             <a:r>
-              <a:rPr sz="1400" b="0" i="0">
+              <a:rPr sz="1600" b="0" i="0" dirty="0">
                 <a:solidFill>
                   <a:srgbClr val="2A2929"/>
                 </a:solidFill>
@@ -11161,7 +11470,7 @@
               </a:spcAft>
             </a:pPr>
             <a:r>
-              <a:rPr sz="1400" b="0" i="0">
+              <a:rPr sz="1600" b="0" i="0" dirty="0">
                 <a:solidFill>
                   <a:srgbClr val="7A7A7A"/>
                 </a:solidFill>
@@ -11170,7 +11479,7 @@
               <a:t>–  </a:t>
             </a:r>
             <a:r>
-              <a:rPr sz="1400" b="0" i="0">
+              <a:rPr sz="1600" b="0" i="0" dirty="0">
                 <a:solidFill>
                   <a:srgbClr val="2A2929"/>
                 </a:solidFill>
@@ -11192,7 +11501,7 @@
               </a:spcAft>
             </a:pPr>
             <a:r>
-              <a:rPr sz="1400" b="0" i="0">
+              <a:rPr sz="1600" b="0" i="0" dirty="0">
                 <a:solidFill>
                   <a:srgbClr val="7A7A7A"/>
                 </a:solidFill>
@@ -11201,7 +11510,7 @@
               <a:t>–  </a:t>
             </a:r>
             <a:r>
-              <a:rPr sz="1400" b="0" i="0">
+              <a:rPr sz="1600" b="0" i="0" dirty="0">
                 <a:solidFill>
                   <a:srgbClr val="2A2929"/>
                 </a:solidFill>
@@ -11223,7 +11532,7 @@
               </a:spcAft>
             </a:pPr>
             <a:r>
-              <a:rPr sz="1700" b="1" i="0">
+              <a:rPr b="1" i="0" dirty="0">
                 <a:solidFill>
                   <a:srgbClr val="EDAB0C"/>
                 </a:solidFill>
@@ -11232,7 +11541,7 @@
               <a:t>■  </a:t>
             </a:r>
             <a:r>
-              <a:rPr sz="1700" b="0" i="0">
+              <a:rPr b="0" i="0" dirty="0">
                 <a:solidFill>
                   <a:srgbClr val="2A2929"/>
                 </a:solidFill>
@@ -11254,7 +11563,7 @@
               </a:spcAft>
             </a:pPr>
             <a:r>
-              <a:rPr sz="1700" b="1" i="0">
+              <a:rPr b="1" i="0" dirty="0">
                 <a:solidFill>
                   <a:srgbClr val="EDAB0C"/>
                 </a:solidFill>
@@ -11263,7 +11572,7 @@
               <a:t>■  </a:t>
             </a:r>
             <a:r>
-              <a:rPr sz="1700" b="0" i="0">
+              <a:rPr b="0" i="0" dirty="0">
                 <a:solidFill>
                   <a:srgbClr val="2A2929"/>
                 </a:solidFill>
@@ -11317,6 +11626,7 @@
           <a:lstStyle/>
           <a:p>
             <a:pPr algn="ctr"/>
+            <a:endParaRPr/>
           </a:p>
         </p:txBody>
       </p:sp>
@@ -11337,7 +11647,7 @@
           <a:noFill/>
         </p:spPr>
         <p:txBody>
-          <a:bodyPr wrap="square" anchor="ctr" lIns="0" rIns="0" tIns="0" bIns="0">
+          <a:bodyPr wrap="square" lIns="0" tIns="0" rIns="0" bIns="0" anchor="ctr">
             <a:spAutoFit/>
           </a:bodyPr>
           <a:lstStyle/>
@@ -11395,6 +11705,7 @@
           <a:lstStyle/>
           <a:p>
             <a:pPr algn="ctr"/>
+            <a:endParaRPr/>
           </a:p>
         </p:txBody>
       </p:sp>
@@ -11415,7 +11726,7 @@
           <a:noFill/>
         </p:spPr>
         <p:txBody>
-          <a:bodyPr wrap="square" anchor="t" lIns="0" rIns="0" tIns="0" bIns="0">
+          <a:bodyPr wrap="square" lIns="0" tIns="0" rIns="0" bIns="0" anchor="t">
             <a:spAutoFit/>
           </a:bodyPr>
           <a:lstStyle/>
@@ -11458,7 +11769,7 @@
           <a:noFill/>
         </p:spPr>
         <p:txBody>
-          <a:bodyPr wrap="square" anchor="t" lIns="0" rIns="0" tIns="0" bIns="0">
+          <a:bodyPr wrap="square" lIns="0" tIns="0" rIns="0" bIns="0" anchor="t">
             <a:spAutoFit/>
           </a:bodyPr>
           <a:lstStyle/>
@@ -11485,7 +11796,7 @@
 </file>
 
 <file path=ppt/slides/slide22.xml><?xml version="1.0" encoding="utf-8"?>
-<p:sld xmlns:a="http://schemas.openxmlformats.org/drawingml/2006/main" xmlns:p="http://schemas.openxmlformats.org/presentationml/2006/main" xmlns:r="http://schemas.openxmlformats.org/officeDocument/2006/relationships">
+<p:sld xmlns:a="http://schemas.openxmlformats.org/drawingml/2006/main" xmlns:r="http://schemas.openxmlformats.org/officeDocument/2006/relationships" xmlns:p="http://schemas.openxmlformats.org/presentationml/2006/main">
   <p:cSld>
     <p:bg>
       <p:bgPr>
@@ -11501,7 +11812,14 @@
         <p:cNvGrpSpPr/>
         <p:nvPr/>
       </p:nvGrpSpPr>
-      <p:grpSpPr/>
+      <p:grpSpPr>
+        <a:xfrm>
+          <a:off x="0" y="0"/>
+          <a:ext cx="0" cy="0"/>
+          <a:chOff x="0" y="0"/>
+          <a:chExt cx="0" cy="0"/>
+        </a:xfrm>
+      </p:grpSpPr>
       <p:sp>
         <p:nvSpPr>
           <p:cNvPr id="2" name="TextBox 1"/>
@@ -11519,7 +11837,7 @@
           <a:noFill/>
         </p:spPr>
         <p:txBody>
-          <a:bodyPr wrap="square" anchor="t" lIns="0" rIns="0" tIns="0" bIns="0">
+          <a:bodyPr wrap="square" lIns="0" tIns="0" rIns="0" bIns="0" anchor="t">
             <a:spAutoFit/>
           </a:bodyPr>
           <a:lstStyle/>
@@ -11593,6 +11911,7 @@
           <a:lstStyle/>
           <a:p>
             <a:pPr algn="ctr"/>
+            <a:endParaRPr/>
           </a:p>
         </p:txBody>
       </p:sp>
@@ -11639,6 +11958,7 @@
           <a:lstStyle/>
           <a:p>
             <a:pPr algn="ctr"/>
+            <a:endParaRPr/>
           </a:p>
         </p:txBody>
       </p:sp>
@@ -11683,6 +12003,7 @@
           <a:lstStyle/>
           <a:p>
             <a:pPr algn="ctr"/>
+            <a:endParaRPr/>
           </a:p>
         </p:txBody>
       </p:sp>
@@ -11703,7 +12024,7 @@
           <a:noFill/>
         </p:spPr>
         <p:txBody>
-          <a:bodyPr wrap="square" anchor="ctr" lIns="0" rIns="0" tIns="0" bIns="0">
+          <a:bodyPr wrap="square" lIns="0" tIns="0" rIns="0" bIns="0" anchor="ctr">
             <a:spAutoFit/>
           </a:bodyPr>
           <a:lstStyle/>
@@ -11768,6 +12089,7 @@
           <a:lstStyle/>
           <a:p>
             <a:pPr algn="ctr"/>
+            <a:endParaRPr/>
           </a:p>
         </p:txBody>
       </p:sp>
@@ -11812,6 +12134,7 @@
           <a:lstStyle/>
           <a:p>
             <a:pPr algn="ctr"/>
+            <a:endParaRPr/>
           </a:p>
         </p:txBody>
       </p:sp>
@@ -11832,7 +12155,7 @@
           <a:noFill/>
         </p:spPr>
         <p:txBody>
-          <a:bodyPr wrap="square" anchor="ctr" lIns="0" rIns="0" tIns="0" bIns="0">
+          <a:bodyPr wrap="square" lIns="0" tIns="0" rIns="0" bIns="0" anchor="ctr">
             <a:spAutoFit/>
           </a:bodyPr>
           <a:lstStyle/>
@@ -11897,6 +12220,7 @@
           <a:lstStyle/>
           <a:p>
             <a:pPr algn="ctr"/>
+            <a:endParaRPr/>
           </a:p>
         </p:txBody>
       </p:sp>
@@ -11941,6 +12265,7 @@
           <a:lstStyle/>
           <a:p>
             <a:pPr algn="ctr"/>
+            <a:endParaRPr/>
           </a:p>
         </p:txBody>
       </p:sp>
@@ -11961,7 +12286,7 @@
           <a:noFill/>
         </p:spPr>
         <p:txBody>
-          <a:bodyPr wrap="square" anchor="ctr" lIns="0" rIns="0" tIns="0" bIns="0">
+          <a:bodyPr wrap="square" lIns="0" tIns="0" rIns="0" bIns="0" anchor="ctr">
             <a:spAutoFit/>
           </a:bodyPr>
           <a:lstStyle/>
@@ -12024,6 +12349,7 @@
           <a:lstStyle/>
           <a:p>
             <a:pPr algn="ctr"/>
+            <a:endParaRPr/>
           </a:p>
         </p:txBody>
       </p:sp>
@@ -12044,7 +12370,7 @@
           <a:noFill/>
         </p:spPr>
         <p:txBody>
-          <a:bodyPr wrap="square" anchor="t" lIns="0" rIns="0" tIns="0" bIns="0">
+          <a:bodyPr wrap="square" lIns="0" tIns="0" rIns="0" bIns="0" anchor="t">
             <a:spAutoFit/>
           </a:bodyPr>
           <a:lstStyle/>
@@ -12087,7 +12413,7 @@
           <a:noFill/>
         </p:spPr>
         <p:txBody>
-          <a:bodyPr wrap="square" anchor="t" lIns="0" rIns="0" tIns="0" bIns="0">
+          <a:bodyPr wrap="square" lIns="0" tIns="0" rIns="0" bIns="0" anchor="t">
             <a:spAutoFit/>
           </a:bodyPr>
           <a:lstStyle/>
@@ -12114,7 +12440,7 @@
 </file>
 
 <file path=ppt/slides/slide23.xml><?xml version="1.0" encoding="utf-8"?>
-<p:sld xmlns:a="http://schemas.openxmlformats.org/drawingml/2006/main" xmlns:p="http://schemas.openxmlformats.org/presentationml/2006/main" xmlns:r="http://schemas.openxmlformats.org/officeDocument/2006/relationships">
+<p:sld xmlns:a="http://schemas.openxmlformats.org/drawingml/2006/main" xmlns:r="http://schemas.openxmlformats.org/officeDocument/2006/relationships" xmlns:p="http://schemas.openxmlformats.org/presentationml/2006/main">
   <p:cSld>
     <p:bg>
       <p:bgPr>
@@ -12130,7 +12456,14 @@
         <p:cNvGrpSpPr/>
         <p:nvPr/>
       </p:nvGrpSpPr>
-      <p:grpSpPr/>
+      <p:grpSpPr>
+        <a:xfrm>
+          <a:off x="0" y="0"/>
+          <a:ext cx="0" cy="0"/>
+          <a:chOff x="0" y="0"/>
+          <a:chExt cx="0" cy="0"/>
+        </a:xfrm>
+      </p:grpSpPr>
       <p:sp>
         <p:nvSpPr>
           <p:cNvPr id="2" name="Rectangle 1"/>
@@ -12172,6 +12505,7 @@
           <a:lstStyle/>
           <a:p>
             <a:pPr algn="ctr"/>
+            <a:endParaRPr/>
           </a:p>
         </p:txBody>
       </p:sp>
@@ -12192,7 +12526,7 @@
           <a:noFill/>
         </p:spPr>
         <p:txBody>
-          <a:bodyPr wrap="square" anchor="t" lIns="0" rIns="0" tIns="0" bIns="0">
+          <a:bodyPr wrap="square" lIns="0" tIns="0" rIns="0" bIns="0" anchor="t">
             <a:spAutoFit/>
           </a:bodyPr>
           <a:lstStyle/>
@@ -12313,7 +12647,7 @@
 </file>
 
 <file path=ppt/slides/slide3.xml><?xml version="1.0" encoding="utf-8"?>
-<p:sld xmlns:a="http://schemas.openxmlformats.org/drawingml/2006/main" xmlns:p="http://schemas.openxmlformats.org/presentationml/2006/main" xmlns:r="http://schemas.openxmlformats.org/officeDocument/2006/relationships">
+<p:sld xmlns:a="http://schemas.openxmlformats.org/drawingml/2006/main" xmlns:r="http://schemas.openxmlformats.org/officeDocument/2006/relationships" xmlns:p="http://schemas.openxmlformats.org/presentationml/2006/main">
   <p:cSld>
     <p:bg>
       <p:bgPr>
@@ -12329,7 +12663,14 @@
         <p:cNvGrpSpPr/>
         <p:nvPr/>
       </p:nvGrpSpPr>
-      <p:grpSpPr/>
+      <p:grpSpPr>
+        <a:xfrm>
+          <a:off x="0" y="0"/>
+          <a:ext cx="0" cy="0"/>
+          <a:chOff x="0" y="0"/>
+          <a:chExt cx="0" cy="0"/>
+        </a:xfrm>
+      </p:grpSpPr>
       <p:sp>
         <p:nvSpPr>
           <p:cNvPr id="2" name="TextBox 1"/>
@@ -12347,7 +12688,7 @@
           <a:noFill/>
         </p:spPr>
         <p:txBody>
-          <a:bodyPr wrap="square" anchor="t" lIns="0" rIns="0" tIns="0" bIns="0">
+          <a:bodyPr wrap="square" lIns="0" tIns="0" rIns="0" bIns="0" anchor="t">
             <a:spAutoFit/>
           </a:bodyPr>
           <a:lstStyle/>
@@ -12405,6 +12746,7 @@
           <a:lstStyle/>
           <a:p>
             <a:pPr algn="ctr"/>
+            <a:endParaRPr/>
           </a:p>
         </p:txBody>
       </p:sp>
@@ -12425,7 +12767,7 @@
           <a:noFill/>
         </p:spPr>
         <p:txBody>
-          <a:bodyPr wrap="square" anchor="ctr" lIns="0" rIns="0" tIns="0" bIns="0">
+          <a:bodyPr wrap="square" lIns="0" tIns="0" rIns="0" bIns="0" anchor="ctr">
             <a:spAutoFit/>
           </a:bodyPr>
           <a:lstStyle/>
@@ -12442,7 +12784,7 @@
               </a:spcAft>
             </a:pPr>
             <a:r>
-              <a:rPr sz="2400" b="1" i="0">
+              <a:rPr sz="2400" b="1" i="0" dirty="0">
                 <a:solidFill>
                   <a:srgbClr val="EDAB0C"/>
                 </a:solidFill>
@@ -12451,7 +12793,7 @@
               <a:t>■  </a:t>
             </a:r>
             <a:r>
-              <a:rPr sz="2400" b="0" i="0">
+              <a:rPr sz="2400" b="0" i="0" dirty="0">
                 <a:solidFill>
                   <a:srgbClr val="2A2929"/>
                 </a:solidFill>
@@ -12473,7 +12815,7 @@
               </a:spcAft>
             </a:pPr>
             <a:r>
-              <a:rPr sz="2100" b="0" i="0">
+              <a:rPr sz="2100" b="0" i="0" dirty="0">
                 <a:solidFill>
                   <a:srgbClr val="7A7A7A"/>
                 </a:solidFill>
@@ -12482,13 +12824,31 @@
               <a:t>–  </a:t>
             </a:r>
             <a:r>
-              <a:rPr sz="2100" b="0" i="0">
+              <a:rPr sz="2100" b="0" i="0" dirty="0">
                 <a:solidFill>
                   <a:srgbClr val="2A2929"/>
                 </a:solidFill>
                 <a:latin typeface="Roboto"/>
               </a:rPr>
-              <a:t>Where does the organisation want to go?   — strategy</a:t>
+              <a:t>Where does the </a:t>
+            </a:r>
+            <a:r>
+              <a:rPr sz="2100" b="0" i="0" dirty="0" err="1">
+                <a:solidFill>
+                  <a:srgbClr val="2A2929"/>
+                </a:solidFill>
+                <a:latin typeface="Roboto"/>
+              </a:rPr>
+              <a:t>organisation</a:t>
+            </a:r>
+            <a:r>
+              <a:rPr sz="2100" b="0" i="0" dirty="0">
+                <a:solidFill>
+                  <a:srgbClr val="2A2929"/>
+                </a:solidFill>
+                <a:latin typeface="Roboto"/>
+              </a:rPr>
+              <a:t> want to go?   — strategy</a:t>
             </a:r>
           </a:p>
           <a:p>
@@ -12504,7 +12864,7 @@
               </a:spcAft>
             </a:pPr>
             <a:r>
-              <a:rPr sz="2100" b="0" i="0">
+              <a:rPr sz="2100" b="0" i="0" dirty="0">
                 <a:solidFill>
                   <a:srgbClr val="7A7A7A"/>
                 </a:solidFill>
@@ -12513,7 +12873,7 @@
               <a:t>–  </a:t>
             </a:r>
             <a:r>
-              <a:rPr sz="2100" b="0" i="0">
+              <a:rPr sz="2100" b="0" i="0" dirty="0">
                 <a:solidFill>
                   <a:srgbClr val="2A2929"/>
                 </a:solidFill>
@@ -12535,7 +12895,7 @@
               </a:spcAft>
             </a:pPr>
             <a:r>
-              <a:rPr sz="2100" b="0" i="0">
+              <a:rPr sz="2100" b="0" i="0" dirty="0">
                 <a:solidFill>
                   <a:srgbClr val="7A7A7A"/>
                 </a:solidFill>
@@ -12544,7 +12904,7 @@
               <a:t>–  </a:t>
             </a:r>
             <a:r>
-              <a:rPr sz="2100" b="0" i="0">
+              <a:rPr sz="2100" b="0" i="0" dirty="0">
                 <a:solidFill>
                   <a:srgbClr val="2A2929"/>
                 </a:solidFill>
@@ -12566,7 +12926,7 @@
               </a:spcAft>
             </a:pPr>
             <a:r>
-              <a:rPr sz="2400" b="1" i="0">
+              <a:rPr sz="2400" b="1" i="0" dirty="0">
                 <a:solidFill>
                   <a:srgbClr val="EDAB0C"/>
                 </a:solidFill>
@@ -12575,7 +12935,7 @@
               <a:t>■  </a:t>
             </a:r>
             <a:r>
-              <a:rPr sz="2400" b="0" i="0">
+              <a:rPr sz="2400" b="0" i="0" dirty="0">
                 <a:solidFill>
                   <a:srgbClr val="2A2929"/>
                 </a:solidFill>
@@ -12597,7 +12957,7 @@
               </a:spcAft>
             </a:pPr>
             <a:r>
-              <a:rPr sz="2400" b="1" i="0">
+              <a:rPr sz="2400" b="1" i="0" dirty="0">
                 <a:solidFill>
                   <a:srgbClr val="EDAB0C"/>
                 </a:solidFill>
@@ -12606,7 +12966,7 @@
               <a:t>■  </a:t>
             </a:r>
             <a:r>
-              <a:rPr sz="2400" b="0" i="0">
+              <a:rPr sz="2400" b="0" i="0" dirty="0">
                 <a:solidFill>
                   <a:srgbClr val="2A2929"/>
                 </a:solidFill>
@@ -12658,6 +13018,7 @@
           <a:lstStyle/>
           <a:p>
             <a:pPr algn="ctr"/>
+            <a:endParaRPr/>
           </a:p>
         </p:txBody>
       </p:sp>
@@ -12678,7 +13039,7 @@
           <a:noFill/>
         </p:spPr>
         <p:txBody>
-          <a:bodyPr wrap="square" anchor="t" lIns="0" rIns="0" tIns="0" bIns="0">
+          <a:bodyPr wrap="square" lIns="0" tIns="0" rIns="0" bIns="0" anchor="t">
             <a:spAutoFit/>
           </a:bodyPr>
           <a:lstStyle/>
@@ -12721,7 +13082,7 @@
           <a:noFill/>
         </p:spPr>
         <p:txBody>
-          <a:bodyPr wrap="square" anchor="t" lIns="0" rIns="0" tIns="0" bIns="0">
+          <a:bodyPr wrap="square" lIns="0" tIns="0" rIns="0" bIns="0" anchor="t">
             <a:spAutoFit/>
           </a:bodyPr>
           <a:lstStyle/>
@@ -12748,7 +13109,7 @@
 </file>
 
 <file path=ppt/slides/slide4.xml><?xml version="1.0" encoding="utf-8"?>
-<p:sld xmlns:a="http://schemas.openxmlformats.org/drawingml/2006/main" xmlns:p="http://schemas.openxmlformats.org/presentationml/2006/main" xmlns:r="http://schemas.openxmlformats.org/officeDocument/2006/relationships">
+<p:sld xmlns:a="http://schemas.openxmlformats.org/drawingml/2006/main" xmlns:r="http://schemas.openxmlformats.org/officeDocument/2006/relationships" xmlns:p="http://schemas.openxmlformats.org/presentationml/2006/main">
   <p:cSld>
     <p:bg>
       <p:bgPr>
@@ -12764,7 +13125,14 @@
         <p:cNvGrpSpPr/>
         <p:nvPr/>
       </p:nvGrpSpPr>
-      <p:grpSpPr/>
+      <p:grpSpPr>
+        <a:xfrm>
+          <a:off x="0" y="0"/>
+          <a:ext cx="0" cy="0"/>
+          <a:chOff x="0" y="0"/>
+          <a:chExt cx="0" cy="0"/>
+        </a:xfrm>
+      </p:grpSpPr>
       <p:sp>
         <p:nvSpPr>
           <p:cNvPr id="2" name="Rectangle 1"/>
@@ -12806,6 +13174,7 @@
           <a:lstStyle/>
           <a:p>
             <a:pPr algn="ctr"/>
+            <a:endParaRPr/>
           </a:p>
         </p:txBody>
       </p:sp>
@@ -12826,7 +13195,7 @@
           <a:noFill/>
         </p:spPr>
         <p:txBody>
-          <a:bodyPr wrap="square" anchor="t" lIns="0" rIns="0" tIns="0" bIns="0">
+          <a:bodyPr wrap="square" lIns="0" tIns="0" rIns="0" bIns="0" anchor="t">
             <a:spAutoFit/>
           </a:bodyPr>
           <a:lstStyle/>
@@ -12860,7 +13229,7 @@
           <a:noFill/>
         </p:spPr>
         <p:txBody>
-          <a:bodyPr wrap="square" anchor="t" lIns="0" rIns="0" tIns="0" bIns="0">
+          <a:bodyPr wrap="square" lIns="0" tIns="0" rIns="0" bIns="0" anchor="t">
             <a:spAutoFit/>
           </a:bodyPr>
           <a:lstStyle/>
@@ -12950,6 +13319,7 @@
           <a:lstStyle/>
           <a:p>
             <a:pPr algn="ctr"/>
+            <a:endParaRPr/>
           </a:p>
         </p:txBody>
       </p:sp>
@@ -12970,7 +13340,7 @@
           <a:noFill/>
         </p:spPr>
         <p:txBody>
-          <a:bodyPr wrap="square" anchor="t" lIns="0" rIns="0" tIns="0" bIns="0">
+          <a:bodyPr wrap="square" lIns="0" tIns="0" rIns="0" bIns="0" anchor="t">
             <a:spAutoFit/>
           </a:bodyPr>
           <a:lstStyle/>
@@ -13013,21 +13383,13 @@
           <a:noFill/>
         </p:spPr>
         <p:txBody>
-          <a:bodyPr wrap="square" anchor="t" lIns="0" rIns="0" tIns="0" bIns="0">
+          <a:bodyPr wrap="square" lIns="0" tIns="0" rIns="0" bIns="0" anchor="t">
             <a:spAutoFit/>
           </a:bodyPr>
           <a:lstStyle/>
           <a:p>
             <a:pPr algn="r"/>
-            <a:r>
-              <a:rPr sz="1100" b="0" i="0">
-                <a:solidFill>
-                  <a:srgbClr val="7A7A7A"/>
-                </a:solidFill>
-                <a:latin typeface="Roboto"/>
-              </a:rPr>
-              <a:t/>
-            </a:r>
+            <a:endParaRPr/>
           </a:p>
         </p:txBody>
       </p:sp>
@@ -13040,7 +13402,7 @@
 </file>
 
 <file path=ppt/slides/slide5.xml><?xml version="1.0" encoding="utf-8"?>
-<p:sld xmlns:a="http://schemas.openxmlformats.org/drawingml/2006/main" xmlns:p="http://schemas.openxmlformats.org/presentationml/2006/main" xmlns:r="http://schemas.openxmlformats.org/officeDocument/2006/relationships">
+<p:sld xmlns:a="http://schemas.openxmlformats.org/drawingml/2006/main" xmlns:r="http://schemas.openxmlformats.org/officeDocument/2006/relationships" xmlns:p="http://schemas.openxmlformats.org/presentationml/2006/main">
   <p:cSld>
     <p:bg>
       <p:bgPr>
@@ -13056,7 +13418,14 @@
         <p:cNvGrpSpPr/>
         <p:nvPr/>
       </p:nvGrpSpPr>
-      <p:grpSpPr/>
+      <p:grpSpPr>
+        <a:xfrm>
+          <a:off x="0" y="0"/>
+          <a:ext cx="0" cy="0"/>
+          <a:chOff x="0" y="0"/>
+          <a:chExt cx="0" cy="0"/>
+        </a:xfrm>
+      </p:grpSpPr>
       <p:sp>
         <p:nvSpPr>
           <p:cNvPr id="2" name="TextBox 1"/>
@@ -13074,7 +13443,7 @@
           <a:noFill/>
         </p:spPr>
         <p:txBody>
-          <a:bodyPr wrap="square" anchor="t" lIns="0" rIns="0" tIns="0" bIns="0">
+          <a:bodyPr wrap="square" lIns="0" tIns="0" rIns="0" bIns="0" anchor="t">
             <a:spAutoFit/>
           </a:bodyPr>
           <a:lstStyle/>
@@ -13148,6 +13517,7 @@
           <a:lstStyle/>
           <a:p>
             <a:pPr algn="ctr"/>
+            <a:endParaRPr/>
           </a:p>
         </p:txBody>
       </p:sp>
@@ -13168,7 +13538,7 @@
           <a:noFill/>
         </p:spPr>
         <p:txBody>
-          <a:bodyPr wrap="square" anchor="ctr" lIns="0" rIns="0" tIns="0" bIns="0">
+          <a:bodyPr wrap="square" lIns="0" tIns="0" rIns="0" bIns="0" anchor="ctr">
             <a:spAutoFit/>
           </a:bodyPr>
           <a:lstStyle/>
@@ -13339,6 +13709,7 @@
           <a:lstStyle/>
           <a:p>
             <a:pPr algn="ctr"/>
+            <a:endParaRPr/>
           </a:p>
         </p:txBody>
       </p:sp>
@@ -13359,7 +13730,7 @@
           <a:noFill/>
         </p:spPr>
         <p:txBody>
-          <a:bodyPr wrap="square" anchor="t" lIns="0" rIns="0" tIns="0" bIns="0">
+          <a:bodyPr wrap="square" lIns="0" tIns="0" rIns="0" bIns="0" anchor="t">
             <a:spAutoFit/>
           </a:bodyPr>
           <a:lstStyle/>
@@ -13402,7 +13773,7 @@
           <a:noFill/>
         </p:spPr>
         <p:txBody>
-          <a:bodyPr wrap="square" anchor="t" lIns="0" rIns="0" tIns="0" bIns="0">
+          <a:bodyPr wrap="square" lIns="0" tIns="0" rIns="0" bIns="0" anchor="t">
             <a:spAutoFit/>
           </a:bodyPr>
           <a:lstStyle/>
@@ -13429,7 +13800,7 @@
 </file>
 
 <file path=ppt/slides/slide6.xml><?xml version="1.0" encoding="utf-8"?>
-<p:sld xmlns:a="http://schemas.openxmlformats.org/drawingml/2006/main" xmlns:p="http://schemas.openxmlformats.org/presentationml/2006/main" xmlns:r="http://schemas.openxmlformats.org/officeDocument/2006/relationships">
+<p:sld xmlns:a="http://schemas.openxmlformats.org/drawingml/2006/main" xmlns:r="http://schemas.openxmlformats.org/officeDocument/2006/relationships" xmlns:p="http://schemas.openxmlformats.org/presentationml/2006/main">
   <p:cSld>
     <p:bg>
       <p:bgPr>
@@ -13445,7 +13816,14 @@
         <p:cNvGrpSpPr/>
         <p:nvPr/>
       </p:nvGrpSpPr>
-      <p:grpSpPr/>
+      <p:grpSpPr>
+        <a:xfrm>
+          <a:off x="0" y="0"/>
+          <a:ext cx="0" cy="0"/>
+          <a:chOff x="0" y="0"/>
+          <a:chExt cx="0" cy="0"/>
+        </a:xfrm>
+      </p:grpSpPr>
       <p:sp>
         <p:nvSpPr>
           <p:cNvPr id="2" name="TextBox 1"/>
@@ -13463,7 +13841,7 @@
           <a:noFill/>
         </p:spPr>
         <p:txBody>
-          <a:bodyPr wrap="square" anchor="t" lIns="0" rIns="0" tIns="0" bIns="0">
+          <a:bodyPr wrap="square" lIns="0" tIns="0" rIns="0" bIns="0" anchor="t">
             <a:spAutoFit/>
           </a:bodyPr>
           <a:lstStyle/>
@@ -13521,6 +13899,7 @@
           <a:lstStyle/>
           <a:p>
             <a:pPr algn="ctr"/>
+            <a:endParaRPr/>
           </a:p>
         </p:txBody>
       </p:sp>
@@ -13541,7 +13920,7 @@
           <a:noFill/>
         </p:spPr>
         <p:txBody>
-          <a:bodyPr wrap="square" anchor="ctr" lIns="0" rIns="0" tIns="0" bIns="0">
+          <a:bodyPr wrap="square" lIns="0" tIns="0" rIns="0" bIns="0" anchor="ctr">
             <a:spAutoFit/>
           </a:bodyPr>
           <a:lstStyle/>
@@ -13805,6 +14184,7 @@
           <a:lstStyle/>
           <a:p>
             <a:pPr algn="ctr"/>
+            <a:endParaRPr/>
           </a:p>
         </p:txBody>
       </p:sp>
@@ -13825,7 +14205,7 @@
           <a:noFill/>
         </p:spPr>
         <p:txBody>
-          <a:bodyPr wrap="square" anchor="t" lIns="0" rIns="0" tIns="0" bIns="0">
+          <a:bodyPr wrap="square" lIns="0" tIns="0" rIns="0" bIns="0" anchor="t">
             <a:spAutoFit/>
           </a:bodyPr>
           <a:lstStyle/>
@@ -13868,7 +14248,7 @@
           <a:noFill/>
         </p:spPr>
         <p:txBody>
-          <a:bodyPr wrap="square" anchor="t" lIns="0" rIns="0" tIns="0" bIns="0">
+          <a:bodyPr wrap="square" lIns="0" tIns="0" rIns="0" bIns="0" anchor="t">
             <a:spAutoFit/>
           </a:bodyPr>
           <a:lstStyle/>
@@ -13895,7 +14275,7 @@
 </file>
 
 <file path=ppt/slides/slide7.xml><?xml version="1.0" encoding="utf-8"?>
-<p:sld xmlns:a="http://schemas.openxmlformats.org/drawingml/2006/main" xmlns:p="http://schemas.openxmlformats.org/presentationml/2006/main" xmlns:r="http://schemas.openxmlformats.org/officeDocument/2006/relationships">
+<p:sld xmlns:a="http://schemas.openxmlformats.org/drawingml/2006/main" xmlns:r="http://schemas.openxmlformats.org/officeDocument/2006/relationships" xmlns:p="http://schemas.openxmlformats.org/presentationml/2006/main">
   <p:cSld>
     <p:bg>
       <p:bgPr>
@@ -13911,7 +14291,14 @@
         <p:cNvGrpSpPr/>
         <p:nvPr/>
       </p:nvGrpSpPr>
-      <p:grpSpPr/>
+      <p:grpSpPr>
+        <a:xfrm>
+          <a:off x="0" y="0"/>
+          <a:ext cx="0" cy="0"/>
+          <a:chOff x="0" y="0"/>
+          <a:chExt cx="0" cy="0"/>
+        </a:xfrm>
+      </p:grpSpPr>
       <p:sp>
         <p:nvSpPr>
           <p:cNvPr id="2" name="TextBox 1"/>
@@ -13929,7 +14316,7 @@
           <a:noFill/>
         </p:spPr>
         <p:txBody>
-          <a:bodyPr wrap="square" anchor="t" lIns="0" rIns="0" tIns="0" bIns="0">
+          <a:bodyPr wrap="square" lIns="0" tIns="0" rIns="0" bIns="0" anchor="t">
             <a:spAutoFit/>
           </a:bodyPr>
           <a:lstStyle/>
@@ -14003,6 +14390,7 @@
           <a:lstStyle/>
           <a:p>
             <a:pPr algn="ctr"/>
+            <a:endParaRPr/>
           </a:p>
         </p:txBody>
       </p:sp>
@@ -14023,7 +14411,7 @@
           <a:noFill/>
         </p:spPr>
         <p:txBody>
-          <a:bodyPr wrap="square" anchor="ctr" lIns="0" rIns="0" tIns="0" bIns="0">
+          <a:bodyPr wrap="square" lIns="0" tIns="0" rIns="0" bIns="0" anchor="ctr">
             <a:spAutoFit/>
           </a:bodyPr>
           <a:lstStyle/>
@@ -14225,6 +14613,7 @@
           <a:lstStyle/>
           <a:p>
             <a:pPr algn="ctr"/>
+            <a:endParaRPr/>
           </a:p>
         </p:txBody>
       </p:sp>
@@ -14245,7 +14634,7 @@
           <a:noFill/>
         </p:spPr>
         <p:txBody>
-          <a:bodyPr wrap="square" anchor="t" lIns="0" rIns="0" tIns="0" bIns="0">
+          <a:bodyPr wrap="square" lIns="0" tIns="0" rIns="0" bIns="0" anchor="t">
             <a:spAutoFit/>
           </a:bodyPr>
           <a:lstStyle/>
@@ -14288,7 +14677,7 @@
           <a:noFill/>
         </p:spPr>
         <p:txBody>
-          <a:bodyPr wrap="square" anchor="t" lIns="0" rIns="0" tIns="0" bIns="0">
+          <a:bodyPr wrap="square" lIns="0" tIns="0" rIns="0" bIns="0" anchor="t">
             <a:spAutoFit/>
           </a:bodyPr>
           <a:lstStyle/>
@@ -14315,7 +14704,7 @@
 </file>
 
 <file path=ppt/slides/slide8.xml><?xml version="1.0" encoding="utf-8"?>
-<p:sld xmlns:a="http://schemas.openxmlformats.org/drawingml/2006/main" xmlns:p="http://schemas.openxmlformats.org/presentationml/2006/main" xmlns:r="http://schemas.openxmlformats.org/officeDocument/2006/relationships">
+<p:sld xmlns:a="http://schemas.openxmlformats.org/drawingml/2006/main" xmlns:r="http://schemas.openxmlformats.org/officeDocument/2006/relationships" xmlns:p="http://schemas.openxmlformats.org/presentationml/2006/main">
   <p:cSld>
     <p:bg>
       <p:bgPr>
@@ -14331,7 +14720,14 @@
         <p:cNvGrpSpPr/>
         <p:nvPr/>
       </p:nvGrpSpPr>
-      <p:grpSpPr/>
+      <p:grpSpPr>
+        <a:xfrm>
+          <a:off x="0" y="0"/>
+          <a:ext cx="0" cy="0"/>
+          <a:chOff x="0" y="0"/>
+          <a:chExt cx="0" cy="0"/>
+        </a:xfrm>
+      </p:grpSpPr>
       <p:sp>
         <p:nvSpPr>
           <p:cNvPr id="2" name="TextBox 1"/>
@@ -14349,7 +14745,7 @@
           <a:noFill/>
         </p:spPr>
         <p:txBody>
-          <a:bodyPr wrap="square" anchor="t" lIns="0" rIns="0" tIns="0" bIns="0">
+          <a:bodyPr wrap="square" lIns="0" tIns="0" rIns="0" bIns="0" anchor="t">
             <a:spAutoFit/>
           </a:bodyPr>
           <a:lstStyle/>
@@ -14407,6 +14803,7 @@
           <a:lstStyle/>
           <a:p>
             <a:pPr algn="ctr"/>
+            <a:endParaRPr/>
           </a:p>
         </p:txBody>
       </p:sp>
@@ -14427,7 +14824,7 @@
           <a:noFill/>
         </p:spPr>
         <p:txBody>
-          <a:bodyPr wrap="square" anchor="ctr" lIns="0" rIns="0" tIns="0" bIns="0">
+          <a:bodyPr wrap="square" lIns="0" tIns="0" rIns="0" bIns="0" anchor="ctr">
             <a:spAutoFit/>
           </a:bodyPr>
           <a:lstStyle/>
@@ -14598,6 +14995,7 @@
           <a:lstStyle/>
           <a:p>
             <a:pPr algn="ctr"/>
+            <a:endParaRPr/>
           </a:p>
         </p:txBody>
       </p:sp>
@@ -14618,7 +15016,7 @@
           <a:noFill/>
         </p:spPr>
         <p:txBody>
-          <a:bodyPr wrap="square" anchor="t" lIns="0" rIns="0" tIns="0" bIns="0">
+          <a:bodyPr wrap="square" lIns="0" tIns="0" rIns="0" bIns="0" anchor="t">
             <a:spAutoFit/>
           </a:bodyPr>
           <a:lstStyle/>
@@ -14661,7 +15059,7 @@
           <a:noFill/>
         </p:spPr>
         <p:txBody>
-          <a:bodyPr wrap="square" anchor="t" lIns="0" rIns="0" tIns="0" bIns="0">
+          <a:bodyPr wrap="square" lIns="0" tIns="0" rIns="0" bIns="0" anchor="t">
             <a:spAutoFit/>
           </a:bodyPr>
           <a:lstStyle/>
@@ -14688,7 +15086,7 @@
 </file>
 
 <file path=ppt/slides/slide9.xml><?xml version="1.0" encoding="utf-8"?>
-<p:sld xmlns:a="http://schemas.openxmlformats.org/drawingml/2006/main" xmlns:p="http://schemas.openxmlformats.org/presentationml/2006/main" xmlns:r="http://schemas.openxmlformats.org/officeDocument/2006/relationships">
+<p:sld xmlns:a="http://schemas.openxmlformats.org/drawingml/2006/main" xmlns:r="http://schemas.openxmlformats.org/officeDocument/2006/relationships" xmlns:p="http://schemas.openxmlformats.org/presentationml/2006/main">
   <p:cSld>
     <p:bg>
       <p:bgPr>
@@ -14704,7 +15102,14 @@
         <p:cNvGrpSpPr/>
         <p:nvPr/>
       </p:nvGrpSpPr>
-      <p:grpSpPr/>
+      <p:grpSpPr>
+        <a:xfrm>
+          <a:off x="0" y="0"/>
+          <a:ext cx="0" cy="0"/>
+          <a:chOff x="0" y="0"/>
+          <a:chExt cx="0" cy="0"/>
+        </a:xfrm>
+      </p:grpSpPr>
       <p:sp>
         <p:nvSpPr>
           <p:cNvPr id="2" name="Rectangle 1"/>
@@ -14746,6 +15151,7 @@
           <a:lstStyle/>
           <a:p>
             <a:pPr algn="ctr"/>
+            <a:endParaRPr/>
           </a:p>
         </p:txBody>
       </p:sp>
@@ -14819,7 +15225,7 @@
           <a:noFill/>
         </p:spPr>
         <p:txBody>
-          <a:bodyPr wrap="square" anchor="ctr" lIns="0" rIns="0" tIns="0" bIns="0">
+          <a:bodyPr wrap="square" lIns="0" tIns="0" rIns="0" bIns="0" anchor="ctr">
             <a:spAutoFit/>
           </a:bodyPr>
           <a:lstStyle/>
@@ -14845,7 +15251,7 @@
         <p:spPr>
           <a:xfrm>
             <a:off x="658368" y="1554480"/>
-            <a:ext cx="10881360" cy="4297680"/>
+            <a:ext cx="10881360" cy="3726918"/>
           </a:xfrm>
           <a:prstGeom prst="rect">
             <a:avLst/>
@@ -14853,7 +15259,7 @@
           <a:noFill/>
         </p:spPr>
         <p:txBody>
-          <a:bodyPr wrap="square" anchor="t" lIns="0" rIns="0" tIns="0" bIns="0">
+          <a:bodyPr wrap="square" lIns="0" tIns="0" rIns="0" bIns="0" anchor="t">
             <a:spAutoFit/>
           </a:bodyPr>
           <a:lstStyle/>
@@ -14870,7 +15276,7 @@
               </a:spcAft>
             </a:pPr>
             <a:r>
-              <a:rPr sz="1700" b="1" i="0">
+              <a:rPr sz="2000" b="1" i="0" dirty="0">
                 <a:solidFill>
                   <a:srgbClr val="EDAB0C"/>
                 </a:solidFill>
@@ -14879,7 +15285,7 @@
               <a:t>■  </a:t>
             </a:r>
             <a:r>
-              <a:rPr sz="1700" b="0" i="0">
+              <a:rPr sz="2000" b="0" i="0" dirty="0">
                 <a:solidFill>
                   <a:srgbClr val="2A2929"/>
                 </a:solidFill>
@@ -14901,7 +15307,7 @@
               </a:spcAft>
             </a:pPr>
             <a:r>
-              <a:rPr sz="1700" b="1" i="0">
+              <a:rPr sz="2000" b="1" i="0" dirty="0">
                 <a:solidFill>
                   <a:srgbClr val="EDAB0C"/>
                 </a:solidFill>
@@ -14910,7 +15316,7 @@
               <a:t>■  </a:t>
             </a:r>
             <a:r>
-              <a:rPr sz="1700" b="0" i="0">
+              <a:rPr sz="2000" b="0" i="0" dirty="0">
                 <a:solidFill>
                   <a:srgbClr val="2A2929"/>
                 </a:solidFill>
@@ -14932,7 +15338,7 @@
               </a:spcAft>
             </a:pPr>
             <a:r>
-              <a:rPr sz="1400" b="0" i="0">
+              <a:rPr b="0" i="0" dirty="0">
                 <a:solidFill>
                   <a:srgbClr val="7A7A7A"/>
                 </a:solidFill>
@@ -14941,7 +15347,7 @@
               <a:t>–  </a:t>
             </a:r>
             <a:r>
-              <a:rPr sz="1400" b="0" i="0">
+              <a:rPr b="0" i="0" dirty="0">
                 <a:solidFill>
                   <a:srgbClr val="2A2929"/>
                 </a:solidFill>
@@ -14963,7 +15369,7 @@
               </a:spcAft>
             </a:pPr>
             <a:r>
-              <a:rPr sz="1400" b="0" i="0">
+              <a:rPr b="0" i="0" dirty="0">
                 <a:solidFill>
                   <a:srgbClr val="7A7A7A"/>
                 </a:solidFill>
@@ -14972,7 +15378,7 @@
               <a:t>–  </a:t>
             </a:r>
             <a:r>
-              <a:rPr sz="1400" b="0" i="0">
+              <a:rPr b="0" i="0" dirty="0">
                 <a:solidFill>
                   <a:srgbClr val="2A2929"/>
                 </a:solidFill>
@@ -14994,7 +15400,7 @@
               </a:spcAft>
             </a:pPr>
             <a:r>
-              <a:rPr sz="1400" b="0" i="0">
+              <a:rPr b="0" i="0" dirty="0">
                 <a:solidFill>
                   <a:srgbClr val="7A7A7A"/>
                 </a:solidFill>
@@ -15003,7 +15409,7 @@
               <a:t>–  </a:t>
             </a:r>
             <a:r>
-              <a:rPr sz="1400" b="0" i="0">
+              <a:rPr b="0" i="0" dirty="0">
                 <a:solidFill>
                   <a:srgbClr val="2A2929"/>
                 </a:solidFill>
@@ -15025,7 +15431,7 @@
               </a:spcAft>
             </a:pPr>
             <a:r>
-              <a:rPr sz="1400" b="0" i="0">
+              <a:rPr b="0" i="0" dirty="0">
                 <a:solidFill>
                   <a:srgbClr val="7A7A7A"/>
                 </a:solidFill>
@@ -15034,7 +15440,7 @@
               <a:t>–  </a:t>
             </a:r>
             <a:r>
-              <a:rPr sz="1400" b="0" i="0">
+              <a:rPr b="0" i="0" dirty="0">
                 <a:solidFill>
                   <a:srgbClr val="2A2929"/>
                 </a:solidFill>
@@ -15056,7 +15462,7 @@
               </a:spcAft>
             </a:pPr>
             <a:r>
-              <a:rPr sz="1700" b="1" i="0">
+              <a:rPr sz="2000" b="1" i="0" dirty="0">
                 <a:solidFill>
                   <a:srgbClr val="EDAB0C"/>
                 </a:solidFill>
@@ -15065,7 +15471,7 @@
               <a:t>■  </a:t>
             </a:r>
             <a:r>
-              <a:rPr sz="1700" b="0" i="0">
+              <a:rPr sz="2000" b="0" i="0" dirty="0">
                 <a:solidFill>
                   <a:srgbClr val="2A2929"/>
                 </a:solidFill>
@@ -15087,7 +15493,7 @@
               </a:spcAft>
             </a:pPr>
             <a:r>
-              <a:rPr sz="1700" b="1" i="0">
+              <a:rPr sz="2000" b="1" i="0" dirty="0">
                 <a:solidFill>
                   <a:srgbClr val="EDAB0C"/>
                 </a:solidFill>
@@ -15096,7 +15502,7 @@
               <a:t>■  </a:t>
             </a:r>
             <a:r>
-              <a:rPr sz="1700" b="0" i="0">
+              <a:rPr sz="2000" b="0" i="0" dirty="0">
                 <a:solidFill>
                   <a:srgbClr val="2A2929"/>
                 </a:solidFill>
@@ -15150,6 +15556,7 @@
           <a:lstStyle/>
           <a:p>
             <a:pPr algn="ctr"/>
+            <a:endParaRPr/>
           </a:p>
         </p:txBody>
       </p:sp>
@@ -15170,7 +15577,7 @@
           <a:noFill/>
         </p:spPr>
         <p:txBody>
-          <a:bodyPr wrap="square" anchor="ctr" lIns="0" rIns="0" tIns="0" bIns="0">
+          <a:bodyPr wrap="square" lIns="0" tIns="0" rIns="0" bIns="0" anchor="ctr">
             <a:spAutoFit/>
           </a:bodyPr>
           <a:lstStyle/>
@@ -15228,6 +15635,7 @@
           <a:lstStyle/>
           <a:p>
             <a:pPr algn="ctr"/>
+            <a:endParaRPr/>
           </a:p>
         </p:txBody>
       </p:sp>
@@ -15248,7 +15656,7 @@
           <a:noFill/>
         </p:spPr>
         <p:txBody>
-          <a:bodyPr wrap="square" anchor="t" lIns="0" rIns="0" tIns="0" bIns="0">
+          <a:bodyPr wrap="square" lIns="0" tIns="0" rIns="0" bIns="0" anchor="t">
             <a:spAutoFit/>
           </a:bodyPr>
           <a:lstStyle/>
@@ -15291,7 +15699,7 @@
           <a:noFill/>
         </p:spPr>
         <p:txBody>
-          <a:bodyPr wrap="square" anchor="t" lIns="0" rIns="0" tIns="0" bIns="0">
+          <a:bodyPr wrap="square" lIns="0" tIns="0" rIns="0" bIns="0" anchor="t">
             <a:spAutoFit/>
           </a:bodyPr>
           <a:lstStyle/>
@@ -15648,44 +16056,44 @@
         <a:sysClr val="window" lastClr="FFFFFF"/>
       </a:lt1>
       <a:dk2>
-        <a:srgbClr val="1F497D"/>
+        <a:srgbClr val="0E2841"/>
       </a:dk2>
       <a:lt2>
-        <a:srgbClr val="EEECE1"/>
+        <a:srgbClr val="E8E8E8"/>
       </a:lt2>
       <a:accent1>
-        <a:srgbClr val="4F81BD"/>
+        <a:srgbClr val="156082"/>
       </a:accent1>
       <a:accent2>
-        <a:srgbClr val="C0504D"/>
+        <a:srgbClr val="E97132"/>
       </a:accent2>
       <a:accent3>
-        <a:srgbClr val="9BBB59"/>
+        <a:srgbClr val="196B24"/>
       </a:accent3>
       <a:accent4>
-        <a:srgbClr val="8064A2"/>
+        <a:srgbClr val="0F9ED5"/>
       </a:accent4>
       <a:accent5>
-        <a:srgbClr val="4BACC6"/>
+        <a:srgbClr val="A02B93"/>
       </a:accent5>
       <a:accent6>
-        <a:srgbClr val="F79646"/>
+        <a:srgbClr val="4EA72E"/>
       </a:accent6>
       <a:hlink>
-        <a:srgbClr val="0000FF"/>
+        <a:srgbClr val="467886"/>
       </a:hlink>
       <a:folHlink>
-        <a:srgbClr val="800080"/>
+        <a:srgbClr val="96607D"/>
       </a:folHlink>
     </a:clrScheme>
     <a:fontScheme name="Office">
       <a:majorFont>
-        <a:latin typeface="Calibri"/>
+        <a:latin typeface="Aptos Display" panose="02110004020202020204"/>
         <a:ea typeface=""/>
         <a:cs typeface=""/>
-        <a:font script="Jpan" typeface="ＭＳ Ｐゴシック"/>
+        <a:font script="Jpan" typeface="游ゴシック Light"/>
         <a:font script="Hang" typeface="맑은 고딕"/>
-        <a:font script="Hans" typeface="宋体"/>
+        <a:font script="Hans" typeface="等线 Light"/>
         <a:font script="Hant" typeface="新細明體"/>
         <a:font script="Arab" typeface="Times New Roman"/>
         <a:font script="Hebr" typeface="Times New Roman"/>
@@ -15713,14 +16121,31 @@
         <a:font script="Viet" typeface="Times New Roman"/>
         <a:font script="Uigh" typeface="Microsoft Uighur"/>
         <a:font script="Geor" typeface="Sylfaen"/>
+        <a:font script="Armn" typeface="Arial"/>
+        <a:font script="Bugi" typeface="Leelawadee UI"/>
+        <a:font script="Bopo" typeface="Microsoft JhengHei"/>
+        <a:font script="Java" typeface="Javanese Text"/>
+        <a:font script="Lisu" typeface="Segoe UI"/>
+        <a:font script="Mymr" typeface="Myanmar Text"/>
+        <a:font script="Nkoo" typeface="Ebrima"/>
+        <a:font script="Olck" typeface="Nirmala UI"/>
+        <a:font script="Osma" typeface="Ebrima"/>
+        <a:font script="Phag" typeface="Phagspa"/>
+        <a:font script="Syrn" typeface="Estrangelo Edessa"/>
+        <a:font script="Syrj" typeface="Estrangelo Edessa"/>
+        <a:font script="Syre" typeface="Estrangelo Edessa"/>
+        <a:font script="Sora" typeface="Nirmala UI"/>
+        <a:font script="Tale" typeface="Microsoft Tai Le"/>
+        <a:font script="Talu" typeface="Microsoft New Tai Lue"/>
+        <a:font script="Tfng" typeface="Ebrima"/>
       </a:majorFont>
       <a:minorFont>
-        <a:latin typeface="Calibri"/>
+        <a:latin typeface="Aptos" panose="02110004020202020204"/>
         <a:ea typeface=""/>
         <a:cs typeface=""/>
-        <a:font script="Jpan" typeface="ＭＳ Ｐゴシック"/>
+        <a:font script="Jpan" typeface="游ゴシック"/>
         <a:font script="Hang" typeface="맑은 고딕"/>
-        <a:font script="Hans" typeface="宋体"/>
+        <a:font script="Hans" typeface="等线"/>
         <a:font script="Hant" typeface="新細明體"/>
         <a:font script="Arab" typeface="Arial"/>
         <a:font script="Hebr" typeface="Arial"/>
@@ -15748,6 +16173,23 @@
         <a:font script="Viet" typeface="Arial"/>
         <a:font script="Uigh" typeface="Microsoft Uighur"/>
         <a:font script="Geor" typeface="Sylfaen"/>
+        <a:font script="Armn" typeface="Arial"/>
+        <a:font script="Bugi" typeface="Leelawadee UI"/>
+        <a:font script="Bopo" typeface="Microsoft JhengHei"/>
+        <a:font script="Java" typeface="Javanese Text"/>
+        <a:font script="Lisu" typeface="Segoe UI"/>
+        <a:font script="Mymr" typeface="Myanmar Text"/>
+        <a:font script="Nkoo" typeface="Ebrima"/>
+        <a:font script="Olck" typeface="Nirmala UI"/>
+        <a:font script="Osma" typeface="Ebrima"/>
+        <a:font script="Phag" typeface="Phagspa"/>
+        <a:font script="Syrn" typeface="Estrangelo Edessa"/>
+        <a:font script="Syrj" typeface="Estrangelo Edessa"/>
+        <a:font script="Syre" typeface="Estrangelo Edessa"/>
+        <a:font script="Sora" typeface="Nirmala UI"/>
+        <a:font script="Tale" typeface="Microsoft Tai Le"/>
+        <a:font script="Talu" typeface="Microsoft New Tai Lue"/>
+        <a:font script="Tfng" typeface="Ebrima"/>
       </a:minorFont>
     </a:fontScheme>
     <a:fmtScheme name="Office">
@@ -15759,180 +16201,136 @@
           <a:gsLst>
             <a:gs pos="0">
               <a:schemeClr val="phClr">
-                <a:tint val="50000"/>
-                <a:satMod val="300000"/>
+                <a:lumMod val="110000"/>
+                <a:satMod val="105000"/>
+                <a:tint val="67000"/>
               </a:schemeClr>
             </a:gs>
-            <a:gs pos="35000">
+            <a:gs pos="50000">
               <a:schemeClr val="phClr">
-                <a:tint val="37000"/>
-                <a:satMod val="300000"/>
+                <a:lumMod val="105000"/>
+                <a:satMod val="103000"/>
+                <a:tint val="73000"/>
               </a:schemeClr>
             </a:gs>
             <a:gs pos="100000">
               <a:schemeClr val="phClr">
-                <a:tint val="15000"/>
-                <a:satMod val="350000"/>
+                <a:lumMod val="105000"/>
+                <a:satMod val="109000"/>
+                <a:tint val="81000"/>
               </a:schemeClr>
             </a:gs>
           </a:gsLst>
-          <a:lin ang="16200000" scaled="1"/>
+          <a:lin ang="5400000" scaled="0"/>
         </a:gradFill>
         <a:gradFill rotWithShape="1">
           <a:gsLst>
             <a:gs pos="0">
               <a:schemeClr val="phClr">
-                <a:tint val="100000"/>
+                <a:satMod val="103000"/>
+                <a:lumMod val="102000"/>
+                <a:tint val="94000"/>
+              </a:schemeClr>
+            </a:gs>
+            <a:gs pos="50000">
+              <a:schemeClr val="phClr">
+                <a:satMod val="110000"/>
+                <a:lumMod val="100000"/>
                 <a:shade val="100000"/>
-                <a:satMod val="130000"/>
               </a:schemeClr>
             </a:gs>
             <a:gs pos="100000">
               <a:schemeClr val="phClr">
-                <a:tint val="50000"/>
-                <a:shade val="100000"/>
-                <a:satMod val="350000"/>
+                <a:lumMod val="99000"/>
+                <a:satMod val="120000"/>
+                <a:shade val="78000"/>
               </a:schemeClr>
             </a:gs>
           </a:gsLst>
-          <a:lin ang="16200000" scaled="0"/>
+          <a:lin ang="5400000" scaled="0"/>
         </a:gradFill>
       </a:fillStyleLst>
       <a:lnStyleLst>
-        <a:ln w="9525" cap="flat" cmpd="sng" algn="ctr">
+        <a:ln w="12700" cap="flat" cmpd="sng" algn="ctr">
           <a:solidFill>
-            <a:schemeClr val="phClr">
-              <a:shade val="95000"/>
-              <a:satMod val="105000"/>
-            </a:schemeClr>
+            <a:schemeClr val="phClr"/>
           </a:solidFill>
           <a:prstDash val="solid"/>
+          <a:miter lim="800000"/>
+        </a:ln>
+        <a:ln w="19050" cap="flat" cmpd="sng" algn="ctr">
+          <a:solidFill>
+            <a:schemeClr val="phClr"/>
+          </a:solidFill>
+          <a:prstDash val="solid"/>
+          <a:miter lim="800000"/>
         </a:ln>
         <a:ln w="25400" cap="flat" cmpd="sng" algn="ctr">
           <a:solidFill>
             <a:schemeClr val="phClr"/>
           </a:solidFill>
           <a:prstDash val="solid"/>
-        </a:ln>
-        <a:ln w="38100" cap="flat" cmpd="sng" algn="ctr">
-          <a:solidFill>
-            <a:schemeClr val="phClr"/>
-          </a:solidFill>
-          <a:prstDash val="solid"/>
+          <a:miter lim="800000"/>
         </a:ln>
       </a:lnStyleLst>
       <a:effectStyleLst>
         <a:effectStyle>
+          <a:effectLst/>
+        </a:effectStyle>
+        <a:effectStyle>
+          <a:effectLst/>
+        </a:effectStyle>
+        <a:effectStyle>
           <a:effectLst>
-            <a:outerShdw blurRad="40000" dist="20000" dir="5400000" rotWithShape="0">
+            <a:outerShdw blurRad="57150" dist="19050" dir="5400000" algn="ctr" rotWithShape="0">
               <a:srgbClr val="000000">
-                <a:alpha val="38000"/>
+                <a:alpha val="63000"/>
               </a:srgbClr>
             </a:outerShdw>
           </a:effectLst>
-        </a:effectStyle>
-        <a:effectStyle>
-          <a:effectLst>
-            <a:outerShdw blurRad="40000" dist="23000" dir="5400000" rotWithShape="0">
-              <a:srgbClr val="000000">
-                <a:alpha val="35000"/>
-              </a:srgbClr>
-            </a:outerShdw>
-          </a:effectLst>
-        </a:effectStyle>
-        <a:effectStyle>
-          <a:effectLst>
-            <a:outerShdw blurRad="40000" dist="23000" dir="5400000" rotWithShape="0">
-              <a:srgbClr val="000000">
-                <a:alpha val="35000"/>
-              </a:srgbClr>
-            </a:outerShdw>
-          </a:effectLst>
-          <a:scene3d>
-            <a:camera prst="orthographicFront">
-              <a:rot lat="0" lon="0" rev="0"/>
-            </a:camera>
-            <a:lightRig rig="threePt" dir="t">
-              <a:rot lat="0" lon="0" rev="1200000"/>
-            </a:lightRig>
-          </a:scene3d>
-          <a:sp3d>
-            <a:bevelT w="63500" h="25400"/>
-          </a:sp3d>
         </a:effectStyle>
       </a:effectStyleLst>
       <a:bgFillStyleLst>
         <a:solidFill>
           <a:schemeClr val="phClr"/>
         </a:solidFill>
+        <a:solidFill>
+          <a:schemeClr val="phClr">
+            <a:tint val="95000"/>
+            <a:satMod val="170000"/>
+          </a:schemeClr>
+        </a:solidFill>
         <a:gradFill rotWithShape="1">
           <a:gsLst>
             <a:gs pos="0">
               <a:schemeClr val="phClr">
-                <a:tint val="40000"/>
-                <a:satMod val="350000"/>
+                <a:tint val="93000"/>
+                <a:satMod val="150000"/>
+                <a:shade val="98000"/>
+                <a:lumMod val="102000"/>
               </a:schemeClr>
             </a:gs>
-            <a:gs pos="40000">
+            <a:gs pos="50000">
               <a:schemeClr val="phClr">
-                <a:tint val="45000"/>
-                <a:shade val="99000"/>
-                <a:satMod val="350000"/>
+                <a:tint val="98000"/>
+                <a:satMod val="130000"/>
+                <a:shade val="90000"/>
+                <a:lumMod val="103000"/>
               </a:schemeClr>
             </a:gs>
             <a:gs pos="100000">
               <a:schemeClr val="phClr">
-                <a:shade val="20000"/>
-                <a:satMod val="255000"/>
+                <a:shade val="63000"/>
+                <a:satMod val="120000"/>
               </a:schemeClr>
             </a:gs>
           </a:gsLst>
-          <a:path path="circle">
-            <a:fillToRect l="50000" t="-80000" r="50000" b="180000"/>
-          </a:path>
-        </a:gradFill>
-        <a:gradFill rotWithShape="1">
-          <a:gsLst>
-            <a:gs pos="0">
-              <a:schemeClr val="phClr">
-                <a:tint val="80000"/>
-                <a:satMod val="300000"/>
-              </a:schemeClr>
-            </a:gs>
-            <a:gs pos="100000">
-              <a:schemeClr val="phClr">
-                <a:shade val="30000"/>
-                <a:satMod val="200000"/>
-              </a:schemeClr>
-            </a:gs>
-          </a:gsLst>
-          <a:path path="circle">
-            <a:fillToRect l="50000" t="50000" r="50000" b="50000"/>
-          </a:path>
+          <a:lin ang="5400000" scaled="0"/>
         </a:gradFill>
       </a:bgFillStyleLst>
     </a:fmtScheme>
   </a:themeElements>
   <a:objectDefaults>
-    <a:spDef>
-      <a:spPr/>
-      <a:bodyPr/>
-      <a:lstStyle/>
-      <a:style>
-        <a:lnRef idx="1">
-          <a:schemeClr val="accent1"/>
-        </a:lnRef>
-        <a:fillRef idx="3">
-          <a:schemeClr val="accent1"/>
-        </a:fillRef>
-        <a:effectRef idx="2">
-          <a:schemeClr val="accent1"/>
-        </a:effectRef>
-        <a:fontRef idx="minor">
-          <a:schemeClr val="lt1"/>
-        </a:fontRef>
-      </a:style>
-    </a:spDef>
     <a:lnDef>
       <a:spPr/>
       <a:bodyPr/>
@@ -15954,5 +16352,10 @@
     </a:lnDef>
   </a:objectDefaults>
   <a:extraClrSchemeLst/>
+  <a:extLst>
+    <a:ext uri="{05A4C25C-085E-4340-85A3-A5531E510DB2}">
+      <thm15:themeFamily xmlns:thm15="http://schemas.microsoft.com/office/thememl/2012/main" name="Office Theme" id="{2E142A2C-CD16-42D6-873A-C26D2A0506FA}" vid="{1BDDFF52-6CD6-40A5-AB3C-68EB2F1E4D0A}"/>
+    </a:ext>
+  </a:extLst>
 </a:theme>
 </file>
--- a/S1-CL1-Cloud-Design-Build/delivery/topic_02/Topic_02_Slides.pptx
+++ b/S1-CL1-Cloud-Design-Build/delivery/topic_02/Topic_02_Slides.pptx
@@ -1769,7 +1769,7 @@
           </a:p>
           <a:p>
             <a:r>
-              <a:t>Question to pose: "If I marked your §2, what's the single fastest way to lose marks?" (uncited claims /</a:t>
+              <a:t>Question to pose: "Looking at your §2, what would most quickly make it not yet satisfactory?" (uncited claims /</a:t>
             </a:r>
           </a:p>
           <a:p>
